--- a/docs/asad ppt thesis 21-10-2026.pptx
+++ b/docs/asad ppt thesis 21-10-2026.pptx
@@ -5,7 +5,7 @@
     <p:sldMasterId id="2147483872" r:id="rId1"/>
   </p:sldMasterIdLst>
   <p:notesMasterIdLst>
-    <p:notesMasterId r:id="rId33"/>
+    <p:notesMasterId r:id="rId35"/>
   </p:notesMasterIdLst>
   <p:sldIdLst>
     <p:sldId id="280" r:id="rId2"/>
@@ -31,14 +31,16 @@
     <p:sldId id="287" r:id="rId22"/>
     <p:sldId id="298" r:id="rId23"/>
     <p:sldId id="273" r:id="rId24"/>
-    <p:sldId id="274" r:id="rId25"/>
-    <p:sldId id="275" r:id="rId26"/>
-    <p:sldId id="271" r:id="rId27"/>
-    <p:sldId id="285" r:id="rId28"/>
-    <p:sldId id="288" r:id="rId29"/>
-    <p:sldId id="299" r:id="rId30"/>
-    <p:sldId id="277" r:id="rId31"/>
-    <p:sldId id="279" r:id="rId32"/>
+    <p:sldId id="301" r:id="rId25"/>
+    <p:sldId id="302" r:id="rId26"/>
+    <p:sldId id="274" r:id="rId27"/>
+    <p:sldId id="275" r:id="rId28"/>
+    <p:sldId id="271" r:id="rId29"/>
+    <p:sldId id="285" r:id="rId30"/>
+    <p:sldId id="288" r:id="rId31"/>
+    <p:sldId id="299" r:id="rId32"/>
+    <p:sldId id="277" r:id="rId33"/>
+    <p:sldId id="279" r:id="rId34"/>
   </p:sldIdLst>
   <p:sldSz cx="12192000" cy="6858000"/>
   <p:notesSz cx="6858000" cy="9144000"/>
@@ -160,8 +162,8 @@
 <pc:chgInfo xmlns:a="http://schemas.openxmlformats.org/drawingml/2006/main" xmlns:r="http://schemas.openxmlformats.org/officeDocument/2006/relationships" xmlns:ac="http://schemas.microsoft.com/office/drawing/2013/main/command" xmlns:pc="http://schemas.microsoft.com/office/powerpoint/2013/main/command">
   <pc:docChgLst>
     <pc:chgData name="ASAD KHAN" userId="be12c95f7d6a9a38" providerId="LiveId" clId="{67E7CF59-C710-4E12-AED3-2F4D9779698B}"/>
-    <pc:docChg chg="undo custSel modSld">
-      <pc:chgData name="ASAD KHAN" userId="be12c95f7d6a9a38" providerId="LiveId" clId="{67E7CF59-C710-4E12-AED3-2F4D9779698B}" dt="2026-10-21T18:36:27.520" v="91" actId="20578"/>
+    <pc:docChg chg="undo custSel addSld modSld">
+      <pc:chgData name="ASAD KHAN" userId="be12c95f7d6a9a38" providerId="LiveId" clId="{67E7CF59-C710-4E12-AED3-2F4D9779698B}" dt="2026-10-22T17:23:19.658" v="162" actId="20577"/>
       <pc:docMkLst>
         <pc:docMk/>
       </pc:docMkLst>
@@ -335,14 +337,22 @@
           </ac:spMkLst>
         </pc:spChg>
       </pc:sldChg>
-      <pc:sldChg chg="modSp mod">
-        <pc:chgData name="ASAD KHAN" userId="be12c95f7d6a9a38" providerId="LiveId" clId="{67E7CF59-C710-4E12-AED3-2F4D9779698B}" dt="2026-10-21T17:56:58.096" v="11" actId="2161"/>
+      <pc:sldChg chg="delSp modSp mod">
+        <pc:chgData name="ASAD KHAN" userId="be12c95f7d6a9a38" providerId="LiveId" clId="{67E7CF59-C710-4E12-AED3-2F4D9779698B}" dt="2026-10-22T17:12:42.419" v="156" actId="1076"/>
         <pc:sldMkLst>
           <pc:docMk/>
           <pc:sldMk cId="0" sldId="273"/>
         </pc:sldMkLst>
-        <pc:graphicFrameChg chg="modGraphic">
-          <ac:chgData name="ASAD KHAN" userId="be12c95f7d6a9a38" providerId="LiveId" clId="{67E7CF59-C710-4E12-AED3-2F4D9779698B}" dt="2026-10-21T17:56:58.096" v="11" actId="2161"/>
+        <pc:spChg chg="del mod">
+          <ac:chgData name="ASAD KHAN" userId="be12c95f7d6a9a38" providerId="LiveId" clId="{67E7CF59-C710-4E12-AED3-2F4D9779698B}" dt="2026-10-22T17:12:33.090" v="155"/>
+          <ac:spMkLst>
+            <pc:docMk/>
+            <pc:sldMk cId="0" sldId="273"/>
+            <ac:spMk id="348" creationId="{00000000-0000-0000-0000-000000000000}"/>
+          </ac:spMkLst>
+        </pc:spChg>
+        <pc:graphicFrameChg chg="mod modGraphic">
+          <ac:chgData name="ASAD KHAN" userId="be12c95f7d6a9a38" providerId="LiveId" clId="{67E7CF59-C710-4E12-AED3-2F4D9779698B}" dt="2026-10-22T17:12:42.419" v="156" actId="1076"/>
           <ac:graphicFrameMkLst>
             <pc:docMk/>
             <pc:sldMk cId="0" sldId="273"/>
@@ -458,6 +468,13 @@
           </ac:spMkLst>
         </pc:spChg>
       </pc:sldChg>
+      <pc:sldChg chg="modNotesTx">
+        <pc:chgData name="ASAD KHAN" userId="be12c95f7d6a9a38" providerId="LiveId" clId="{67E7CF59-C710-4E12-AED3-2F4D9779698B}" dt="2026-10-22T17:23:19.658" v="162" actId="20577"/>
+        <pc:sldMkLst>
+          <pc:docMk/>
+          <pc:sldMk cId="2663058148" sldId="285"/>
+        </pc:sldMkLst>
+      </pc:sldChg>
       <pc:sldChg chg="addSp delSp modSp mod">
         <pc:chgData name="ASAD KHAN" userId="be12c95f7d6a9a38" providerId="LiveId" clId="{67E7CF59-C710-4E12-AED3-2F4D9779698B}" dt="2026-10-21T17:55:59.654" v="9"/>
         <pc:sldMkLst>
@@ -542,6 +559,68 @@
           </ac:spMkLst>
         </pc:spChg>
       </pc:sldChg>
+      <pc:sldChg chg="addSp modSp new mod">
+        <pc:chgData name="ASAD KHAN" userId="be12c95f7d6a9a38" providerId="LiveId" clId="{67E7CF59-C710-4E12-AED3-2F4D9779698B}" dt="2026-10-22T16:56:10.423" v="150" actId="14100"/>
+        <pc:sldMkLst>
+          <pc:docMk/>
+          <pc:sldMk cId="3235812068" sldId="301"/>
+        </pc:sldMkLst>
+        <pc:spChg chg="add mod">
+          <ac:chgData name="ASAD KHAN" userId="be12c95f7d6a9a38" providerId="LiveId" clId="{67E7CF59-C710-4E12-AED3-2F4D9779698B}" dt="2026-10-22T16:50:42.837" v="115" actId="1076"/>
+          <ac:spMkLst>
+            <pc:docMk/>
+            <pc:sldMk cId="3235812068" sldId="301"/>
+            <ac:spMk id="4" creationId="{F326E8B8-8AD8-A479-9D98-11447291E9D5}"/>
+          </ac:spMkLst>
+        </pc:spChg>
+        <pc:spChg chg="add mod">
+          <ac:chgData name="ASAD KHAN" userId="be12c95f7d6a9a38" providerId="LiveId" clId="{67E7CF59-C710-4E12-AED3-2F4D9779698B}" dt="2026-10-22T16:50:52.099" v="117" actId="1076"/>
+          <ac:spMkLst>
+            <pc:docMk/>
+            <pc:sldMk cId="3235812068" sldId="301"/>
+            <ac:spMk id="6" creationId="{599C8E1E-7888-E17A-F226-239028A9CEA5}"/>
+          </ac:spMkLst>
+        </pc:spChg>
+        <pc:graphicFrameChg chg="add mod modGraphic">
+          <ac:chgData name="ASAD KHAN" userId="be12c95f7d6a9a38" providerId="LiveId" clId="{67E7CF59-C710-4E12-AED3-2F4D9779698B}" dt="2026-10-22T16:56:10.423" v="150" actId="14100"/>
+          <ac:graphicFrameMkLst>
+            <pc:docMk/>
+            <pc:sldMk cId="3235812068" sldId="301"/>
+            <ac:graphicFrameMk id="2" creationId="{333ED372-C9EE-5F17-79B9-7E01C064D8CF}"/>
+          </ac:graphicFrameMkLst>
+        </pc:graphicFrameChg>
+      </pc:sldChg>
+      <pc:sldChg chg="addSp modSp new mod modNotesTx">
+        <pc:chgData name="ASAD KHAN" userId="be12c95f7d6a9a38" providerId="LiveId" clId="{67E7CF59-C710-4E12-AED3-2F4D9779698B}" dt="2026-10-22T17:18:51.395" v="160" actId="20577"/>
+        <pc:sldMkLst>
+          <pc:docMk/>
+          <pc:sldMk cId="507702667" sldId="302"/>
+        </pc:sldMkLst>
+        <pc:spChg chg="add mod">
+          <ac:chgData name="ASAD KHAN" userId="be12c95f7d6a9a38" providerId="LiveId" clId="{67E7CF59-C710-4E12-AED3-2F4D9779698B}" dt="2026-10-22T16:55:55.405" v="148" actId="108"/>
+          <ac:spMkLst>
+            <pc:docMk/>
+            <pc:sldMk cId="507702667" sldId="302"/>
+            <ac:spMk id="4" creationId="{F7197D80-E5BF-0C81-D0A6-039EB213621C}"/>
+          </ac:spMkLst>
+        </pc:spChg>
+        <pc:spChg chg="add">
+          <ac:chgData name="ASAD KHAN" userId="be12c95f7d6a9a38" providerId="LiveId" clId="{67E7CF59-C710-4E12-AED3-2F4D9779698B}" dt="2026-10-22T16:55:26.440" v="143" actId="22"/>
+          <ac:spMkLst>
+            <pc:docMk/>
+            <pc:sldMk cId="507702667" sldId="302"/>
+            <ac:spMk id="6" creationId="{D1B1E8FB-9B09-43FE-F863-8D7E57E8D419}"/>
+          </ac:spMkLst>
+        </pc:spChg>
+        <pc:graphicFrameChg chg="add mod modGraphic">
+          <ac:chgData name="ASAD KHAN" userId="be12c95f7d6a9a38" providerId="LiveId" clId="{67E7CF59-C710-4E12-AED3-2F4D9779698B}" dt="2026-10-22T17:18:42.205" v="159" actId="20577"/>
+          <ac:graphicFrameMkLst>
+            <pc:docMk/>
+            <pc:sldMk cId="507702667" sldId="302"/>
+            <ac:graphicFrameMk id="2" creationId="{2C96BE19-12A2-7D02-44E2-36832A38C543}"/>
+          </ac:graphicFrameMkLst>
+        </pc:graphicFrameChg>
+      </pc:sldChg>
     </pc:docChg>
   </pc:docChgLst>
 </pc:chgInfo>
@@ -629,7 +708,7 @@
           <a:p>
             <a:fld id="{9DC3B383-6A14-46AB-A7DE-742B15C33F9E}" type="datetimeFigureOut">
               <a:rPr lang="en-PK" smtClean="0"/>
-              <a:t>21/10/2026</a:t>
+              <a:t>22/10/2026</a:t>
             </a:fld>
             <a:endParaRPr lang="en-PK"/>
           </a:p>
@@ -1001,6 +1080,538 @@
 </p:notes>
 </file>
 
+<file path=ppt/notesSlides/notesSlide10.xml><?xml version="1.0" encoding="utf-8"?>
+<p:notes xmlns:a="http://schemas.openxmlformats.org/drawingml/2006/main" xmlns:r="http://schemas.openxmlformats.org/officeDocument/2006/relationships" xmlns:p="http://schemas.openxmlformats.org/presentationml/2006/main">
+  <p:cSld>
+    <p:spTree>
+      <p:nvGrpSpPr>
+        <p:cNvPr id="1" name=""/>
+        <p:cNvGrpSpPr/>
+        <p:nvPr/>
+      </p:nvGrpSpPr>
+      <p:grpSpPr>
+        <a:xfrm>
+          <a:off x="0" y="0"/>
+          <a:ext cx="0" cy="0"/>
+          <a:chOff x="0" y="0"/>
+          <a:chExt cx="0" cy="0"/>
+        </a:xfrm>
+      </p:grpSpPr>
+      <p:sp>
+        <p:nvSpPr>
+          <p:cNvPr id="2" name="Slide Image Placeholder 1"/>
+          <p:cNvSpPr>
+            <a:spLocks noGrp="1" noRot="1" noChangeAspect="1"/>
+          </p:cNvSpPr>
+          <p:nvPr>
+            <p:ph type="sldImg"/>
+          </p:nvPr>
+        </p:nvSpPr>
+        <p:spPr/>
+      </p:sp>
+      <p:sp>
+        <p:nvSpPr>
+          <p:cNvPr id="3" name="Notes Placeholder 2"/>
+          <p:cNvSpPr>
+            <a:spLocks noGrp="1"/>
+          </p:cNvSpPr>
+          <p:nvPr>
+            <p:ph type="body" idx="1"/>
+          </p:nvPr>
+        </p:nvSpPr>
+        <p:spPr/>
+        <p:txBody>
+          <a:bodyPr/>
+          <a:lstStyle/>
+          <a:p>
+            <a:endParaRPr lang="en-PK" dirty="0"/>
+          </a:p>
+        </p:txBody>
+      </p:sp>
+      <p:sp>
+        <p:nvSpPr>
+          <p:cNvPr id="4" name="Slide Number Placeholder 3"/>
+          <p:cNvSpPr>
+            <a:spLocks noGrp="1"/>
+          </p:cNvSpPr>
+          <p:nvPr>
+            <p:ph type="sldNum" sz="quarter" idx="5"/>
+          </p:nvPr>
+        </p:nvSpPr>
+        <p:spPr/>
+        <p:txBody>
+          <a:bodyPr/>
+          <a:lstStyle/>
+          <a:p>
+            <a:fld id="{DB35007E-B1A3-4106-B116-89CDED5B7D80}" type="slidenum">
+              <a:rPr lang="en-PK" smtClean="0"/>
+              <a:t>28</a:t>
+            </a:fld>
+            <a:endParaRPr lang="en-PK"/>
+          </a:p>
+        </p:txBody>
+      </p:sp>
+    </p:spTree>
+    <p:extLst>
+      <p:ext uri="{BB962C8B-B14F-4D97-AF65-F5344CB8AC3E}">
+        <p14:creationId xmlns:p14="http://schemas.microsoft.com/office/powerpoint/2010/main" val="3267995802"/>
+      </p:ext>
+    </p:extLst>
+  </p:cSld>
+  <p:clrMapOvr>
+    <a:masterClrMapping/>
+  </p:clrMapOvr>
+</p:notes>
+</file>
+
+<file path=ppt/notesSlides/notesSlide11.xml><?xml version="1.0" encoding="utf-8"?>
+<p:notes xmlns:a="http://schemas.openxmlformats.org/drawingml/2006/main" xmlns:r="http://schemas.openxmlformats.org/officeDocument/2006/relationships" xmlns:p="http://schemas.openxmlformats.org/presentationml/2006/main">
+  <p:cSld>
+    <p:spTree>
+      <p:nvGrpSpPr>
+        <p:cNvPr id="1" name=""/>
+        <p:cNvGrpSpPr/>
+        <p:nvPr/>
+      </p:nvGrpSpPr>
+      <p:grpSpPr>
+        <a:xfrm>
+          <a:off x="0" y="0"/>
+          <a:ext cx="0" cy="0"/>
+          <a:chOff x="0" y="0"/>
+          <a:chExt cx="0" cy="0"/>
+        </a:xfrm>
+      </p:grpSpPr>
+      <p:sp>
+        <p:nvSpPr>
+          <p:cNvPr id="2" name="Slide Image Placeholder 1"/>
+          <p:cNvSpPr>
+            <a:spLocks noGrp="1" noRot="1" noChangeAspect="1"/>
+          </p:cNvSpPr>
+          <p:nvPr>
+            <p:ph type="sldImg"/>
+          </p:nvPr>
+        </p:nvSpPr>
+        <p:spPr/>
+      </p:sp>
+      <p:sp>
+        <p:nvSpPr>
+          <p:cNvPr id="3" name="Notes Placeholder 2"/>
+          <p:cNvSpPr>
+            <a:spLocks noGrp="1"/>
+          </p:cNvSpPr>
+          <p:nvPr>
+            <p:ph type="body" idx="1"/>
+          </p:nvPr>
+        </p:nvSpPr>
+        <p:spPr/>
+        <p:txBody>
+          <a:bodyPr/>
+          <a:lstStyle/>
+          <a:p>
+            <a:r>
+              <a:rPr lang="en-PK" sz="1200" b="1" kern="1200" dirty="0">
+                <a:solidFill>
+                  <a:schemeClr val="tx1"/>
+                </a:solidFill>
+                <a:effectLst/>
+                <a:latin typeface="+mn-lt"/>
+                <a:ea typeface="+mn-ea"/>
+                <a:cs typeface="+mn-cs"/>
+              </a:rPr>
+              <a:t>GAN Issue</a:t>
+            </a:r>
+          </a:p>
+          <a:p>
+            <a:r>
+              <a:rPr lang="en-PK" sz="1200" kern="1200" dirty="0">
+                <a:solidFill>
+                  <a:schemeClr val="tx1"/>
+                </a:solidFill>
+                <a:effectLst/>
+                <a:latin typeface="+mn-lt"/>
+                <a:ea typeface="+mn-ea"/>
+                <a:cs typeface="+mn-cs"/>
+              </a:rPr>
+              <a:t>•	</a:t>
+            </a:r>
+            <a:r>
+              <a:rPr lang="en-PK" sz="1200" kern="1200" dirty="0" err="1">
+                <a:solidFill>
+                  <a:schemeClr val="tx1"/>
+                </a:solidFill>
+                <a:effectLst/>
+                <a:latin typeface="+mn-lt"/>
+                <a:ea typeface="+mn-ea"/>
+                <a:cs typeface="+mn-cs"/>
+              </a:rPr>
+              <a:t>GANs</a:t>
+            </a:r>
+            <a:r>
+              <a:rPr lang="en-PK" sz="1200" kern="1200" dirty="0">
+                <a:solidFill>
+                  <a:schemeClr val="tx1"/>
+                </a:solidFill>
+                <a:effectLst/>
+                <a:latin typeface="+mn-lt"/>
+                <a:ea typeface="+mn-ea"/>
+                <a:cs typeface="+mn-cs"/>
+              </a:rPr>
+              <a:t> require highly diverse data, whereas log data is structured and repetitive.</a:t>
+            </a:r>
+          </a:p>
+          <a:p>
+            <a:r>
+              <a:rPr lang="en-PK" sz="1200" kern="1200" dirty="0">
+                <a:solidFill>
+                  <a:schemeClr val="tx1"/>
+                </a:solidFill>
+                <a:effectLst/>
+                <a:latin typeface="+mn-lt"/>
+                <a:ea typeface="+mn-ea"/>
+                <a:cs typeface="+mn-cs"/>
+              </a:rPr>
+              <a:t>•	Mode Collapse — The GAN keeps generating only one specific type of fake data.</a:t>
+            </a:r>
+          </a:p>
+          <a:p>
+            <a:r>
+              <a:rPr lang="en-PK" sz="1200" kern="1200" dirty="0">
+                <a:solidFill>
+                  <a:schemeClr val="tx1"/>
+                </a:solidFill>
+                <a:effectLst/>
+                <a:latin typeface="+mn-lt"/>
+                <a:ea typeface="+mn-ea"/>
+                <a:cs typeface="+mn-cs"/>
+              </a:rPr>
+              <a:t>•	They were not originally designed for anomaly detection.</a:t>
+            </a:r>
+          </a:p>
+          <a:p>
+            <a:r>
+              <a:rPr lang="en-PK" sz="1200" kern="1200" dirty="0">
+                <a:solidFill>
+                  <a:schemeClr val="tx1"/>
+                </a:solidFill>
+                <a:effectLst/>
+                <a:latin typeface="+mn-lt"/>
+                <a:ea typeface="+mn-ea"/>
+                <a:cs typeface="+mn-cs"/>
+              </a:rPr>
+              <a:t>•	Real-life analogy: A GAN is like an artist who creates paintings, but is then tasked with spotting fraud  painting—that simply isn't its job!</a:t>
+            </a:r>
+          </a:p>
+          <a:p>
+            <a:r>
+              <a:rPr lang="en-PK" sz="1200" b="1" kern="1200" dirty="0">
+                <a:solidFill>
+                  <a:schemeClr val="tx1"/>
+                </a:solidFill>
+                <a:effectLst/>
+                <a:latin typeface="+mn-lt"/>
+                <a:ea typeface="+mn-ea"/>
+                <a:cs typeface="+mn-cs"/>
+              </a:rPr>
+              <a:t>VAE Issue</a:t>
+            </a:r>
+          </a:p>
+          <a:p>
+            <a:r>
+              <a:rPr lang="en-PK" sz="1200" kern="1200" dirty="0">
+                <a:solidFill>
+                  <a:schemeClr val="tx1"/>
+                </a:solidFill>
+                <a:effectLst/>
+                <a:latin typeface="+mn-lt"/>
+                <a:ea typeface="+mn-ea"/>
+                <a:cs typeface="+mn-cs"/>
+              </a:rPr>
+              <a:t>•	It produces a blurry reconstruction—fine details in the log lines are lost.</a:t>
+            </a:r>
+          </a:p>
+          <a:p>
+            <a:r>
+              <a:rPr lang="en-PK" sz="1200" kern="1200" dirty="0">
+                <a:solidFill>
+                  <a:schemeClr val="tx1"/>
+                </a:solidFill>
+                <a:effectLst/>
+                <a:latin typeface="+mn-lt"/>
+                <a:ea typeface="+mn-ea"/>
+                <a:cs typeface="+mn-cs"/>
+              </a:rPr>
+              <a:t>•	The difference in reconstruction error between normal and anomalous logs is very small.</a:t>
+            </a:r>
+          </a:p>
+          <a:p>
+            <a:endParaRPr lang="en-US" sz="1200" b="1" kern="1200" dirty="0">
+              <a:solidFill>
+                <a:schemeClr val="tx1"/>
+              </a:solidFill>
+              <a:effectLst/>
+              <a:latin typeface="+mn-lt"/>
+              <a:ea typeface="+mn-ea"/>
+              <a:cs typeface="+mn-cs"/>
+            </a:endParaRPr>
+          </a:p>
+          <a:p>
+            <a:r>
+              <a:rPr lang="en-PK" sz="1200" b="1" kern="1200" dirty="0">
+                <a:solidFill>
+                  <a:schemeClr val="tx1"/>
+                </a:solidFill>
+                <a:effectLst/>
+                <a:latin typeface="+mn-lt"/>
+                <a:ea typeface="+mn-ea"/>
+                <a:cs typeface="+mn-cs"/>
+              </a:rPr>
+              <a:t>Research also suggests the same.</a:t>
+            </a:r>
+            <a:endParaRPr lang="en-PK" sz="1200" kern="1200" dirty="0">
+              <a:solidFill>
+                <a:schemeClr val="tx1"/>
+              </a:solidFill>
+              <a:effectLst/>
+              <a:latin typeface="+mn-lt"/>
+              <a:ea typeface="+mn-ea"/>
+              <a:cs typeface="+mn-cs"/>
+            </a:endParaRPr>
+          </a:p>
+          <a:p>
+            <a:r>
+              <a:rPr lang="en-PK" sz="1200" kern="1200" dirty="0">
+                <a:solidFill>
+                  <a:schemeClr val="tx1"/>
+                </a:solidFill>
+                <a:effectLst/>
+                <a:latin typeface="+mn-lt"/>
+                <a:ea typeface="+mn-ea"/>
+                <a:cs typeface="+mn-cs"/>
+              </a:rPr>
+              <a:t>•	</a:t>
+            </a:r>
+            <a:r>
+              <a:rPr lang="en-PK" sz="1200" kern="1200" dirty="0" err="1">
+                <a:solidFill>
+                  <a:schemeClr val="tx1"/>
+                </a:solidFill>
+                <a:effectLst/>
+                <a:latin typeface="+mn-lt"/>
+                <a:ea typeface="+mn-ea"/>
+                <a:cs typeface="+mn-cs"/>
+              </a:rPr>
+              <a:t>GANs</a:t>
+            </a:r>
+            <a:r>
+              <a:rPr lang="en-PK" sz="1200" kern="1200" dirty="0">
+                <a:solidFill>
+                  <a:schemeClr val="tx1"/>
+                </a:solidFill>
+                <a:effectLst/>
+                <a:latin typeface="+mn-lt"/>
+                <a:ea typeface="+mn-ea"/>
+                <a:cs typeface="+mn-cs"/>
+              </a:rPr>
+              <a:t> and </a:t>
+            </a:r>
+            <a:r>
+              <a:rPr lang="en-PK" sz="1200" kern="1200" dirty="0" err="1">
+                <a:solidFill>
+                  <a:schemeClr val="tx1"/>
+                </a:solidFill>
+                <a:effectLst/>
+                <a:latin typeface="+mn-lt"/>
+                <a:ea typeface="+mn-ea"/>
+                <a:cs typeface="+mn-cs"/>
+              </a:rPr>
+              <a:t>VAEs</a:t>
+            </a:r>
+            <a:r>
+              <a:rPr lang="en-PK" sz="1200" kern="1200" dirty="0">
+                <a:solidFill>
+                  <a:schemeClr val="tx1"/>
+                </a:solidFill>
+                <a:effectLst/>
+                <a:latin typeface="+mn-lt"/>
+                <a:ea typeface="+mn-ea"/>
+                <a:cs typeface="+mn-cs"/>
+              </a:rPr>
+              <a:t> are designed for image/audio generation.</a:t>
+            </a:r>
+          </a:p>
+          <a:p>
+            <a:r>
+              <a:rPr lang="en-PK" sz="1200" kern="1200" dirty="0">
+                <a:solidFill>
+                  <a:schemeClr val="tx1"/>
+                </a:solidFill>
+                <a:effectLst/>
+                <a:latin typeface="+mn-lt"/>
+                <a:ea typeface="+mn-ea"/>
+                <a:cs typeface="+mn-cs"/>
+              </a:rPr>
+              <a:t>•	Supervised models consistently perform better in log anomaly detection.</a:t>
+            </a:r>
+          </a:p>
+          <a:p>
+            <a:r>
+              <a:rPr lang="en-PK" sz="1200" kern="1200" dirty="0">
+                <a:solidFill>
+                  <a:schemeClr val="tx1"/>
+                </a:solidFill>
+                <a:effectLst/>
+                <a:latin typeface="+mn-lt"/>
+                <a:ea typeface="+mn-ea"/>
+                <a:cs typeface="+mn-cs"/>
+              </a:rPr>
+              <a:t>•	IEEE papers also state that generative models require extra feature engineering for log data.</a:t>
+            </a:r>
+          </a:p>
+          <a:p>
+            <a:endParaRPr lang="en-PK" dirty="0"/>
+          </a:p>
+        </p:txBody>
+      </p:sp>
+      <p:sp>
+        <p:nvSpPr>
+          <p:cNvPr id="4" name="Slide Number Placeholder 3"/>
+          <p:cNvSpPr>
+            <a:spLocks noGrp="1"/>
+          </p:cNvSpPr>
+          <p:nvPr>
+            <p:ph type="sldNum" sz="quarter" idx="5"/>
+          </p:nvPr>
+        </p:nvSpPr>
+        <p:spPr/>
+        <p:txBody>
+          <a:bodyPr/>
+          <a:lstStyle/>
+          <a:p>
+            <a:fld id="{DB35007E-B1A3-4106-B116-89CDED5B7D80}" type="slidenum">
+              <a:rPr lang="en-PK" smtClean="0"/>
+              <a:t>29</a:t>
+            </a:fld>
+            <a:endParaRPr lang="en-PK"/>
+          </a:p>
+        </p:txBody>
+      </p:sp>
+    </p:spTree>
+    <p:extLst>
+      <p:ext uri="{BB962C8B-B14F-4D97-AF65-F5344CB8AC3E}">
+        <p14:creationId xmlns:p14="http://schemas.microsoft.com/office/powerpoint/2010/main" val="596383402"/>
+      </p:ext>
+    </p:extLst>
+  </p:cSld>
+  <p:clrMapOvr>
+    <a:masterClrMapping/>
+  </p:clrMapOvr>
+</p:notes>
+</file>
+
+<file path=ppt/notesSlides/notesSlide12.xml><?xml version="1.0" encoding="utf-8"?>
+<p:notes xmlns:a="http://schemas.openxmlformats.org/drawingml/2006/main" xmlns:r="http://schemas.openxmlformats.org/officeDocument/2006/relationships" xmlns:p="http://schemas.openxmlformats.org/presentationml/2006/main" showMasterSp="0" showMasterPhAnim="0">
+  <p:cSld>
+    <p:spTree>
+      <p:nvGrpSpPr>
+        <p:cNvPr id="1" name="Shape 510"/>
+        <p:cNvGrpSpPr/>
+        <p:nvPr/>
+      </p:nvGrpSpPr>
+      <p:grpSpPr>
+        <a:xfrm>
+          <a:off x="0" y="0"/>
+          <a:ext cx="0" cy="0"/>
+          <a:chOff x="0" y="0"/>
+          <a:chExt cx="0" cy="0"/>
+        </a:xfrm>
+      </p:grpSpPr>
+      <p:sp>
+        <p:nvSpPr>
+          <p:cNvPr id="511" name="Google Shape;511;p17:notes"/>
+          <p:cNvSpPr txBox="1">
+            <a:spLocks noGrp="1"/>
+          </p:cNvSpPr>
+          <p:nvPr>
+            <p:ph type="body" idx="1"/>
+          </p:nvPr>
+        </p:nvSpPr>
+        <p:spPr>
+          <a:xfrm>
+            <a:off x="685800" y="4343400"/>
+            <a:ext cx="5486400" cy="4114800"/>
+          </a:xfrm>
+          <a:prstGeom prst="rect">
+            <a:avLst/>
+          </a:prstGeom>
+        </p:spPr>
+        <p:txBody>
+          <a:bodyPr spcFirstLastPara="1" wrap="square" lIns="91425" tIns="91425" rIns="91425" bIns="91425" anchor="t" anchorCtr="0">
+            <a:noAutofit/>
+          </a:bodyPr>
+          <a:lstStyle/>
+          <a:p>
+            <a:pPr marL="0" lvl="0" indent="0" algn="l" rtl="0">
+              <a:spcBef>
+                <a:spcPts val="0"/>
+              </a:spcBef>
+              <a:spcAft>
+                <a:spcPts val="0"/>
+              </a:spcAft>
+              <a:buNone/>
+            </a:pPr>
+            <a:endParaRPr/>
+          </a:p>
+        </p:txBody>
+      </p:sp>
+      <p:sp>
+        <p:nvSpPr>
+          <p:cNvPr id="512" name="Google Shape;512;p17:notes"/>
+          <p:cNvSpPr>
+            <a:spLocks noGrp="1" noRot="1" noChangeAspect="1"/>
+          </p:cNvSpPr>
+          <p:nvPr>
+            <p:ph type="sldImg" idx="2"/>
+          </p:nvPr>
+        </p:nvSpPr>
+        <p:spPr>
+          <a:xfrm>
+            <a:off x="381000" y="685800"/>
+            <a:ext cx="6096000" cy="3429000"/>
+          </a:xfrm>
+          <a:custGeom>
+            <a:avLst/>
+            <a:gdLst/>
+            <a:ahLst/>
+            <a:cxnLst/>
+            <a:rect l="l" t="t" r="r" b="b"/>
+            <a:pathLst>
+              <a:path w="120000" h="120000" extrusionOk="0">
+                <a:moveTo>
+                  <a:pt x="0" y="0"/>
+                </a:moveTo>
+                <a:lnTo>
+                  <a:pt x="120000" y="0"/>
+                </a:lnTo>
+                <a:lnTo>
+                  <a:pt x="120000" y="120000"/>
+                </a:lnTo>
+                <a:lnTo>
+                  <a:pt x="0" y="120000"/>
+                </a:lnTo>
+                <a:close/>
+              </a:path>
+            </a:pathLst>
+          </a:custGeom>
+        </p:spPr>
+      </p:sp>
+    </p:spTree>
+  </p:cSld>
+  <p:clrMapOvr>
+    <a:masterClrMapping/>
+  </p:clrMapOvr>
+</p:notes>
+</file>
+
 <file path=ppt/notesSlides/notesSlide2.xml><?xml version="1.0" encoding="utf-8"?>
 <p:notes xmlns:a="http://schemas.openxmlformats.org/drawingml/2006/main" xmlns:r="http://schemas.openxmlformats.org/officeDocument/2006/relationships" xmlns:p="http://schemas.openxmlformats.org/presentationml/2006/main" showMasterSp="0" showMasterPhAnim="0">
   <p:cSld>
@@ -1585,6 +2196,570 @@
 </file>
 
 <file path=ppt/notesSlides/notesSlide7.xml><?xml version="1.0" encoding="utf-8"?>
+<p:notes xmlns:a="http://schemas.openxmlformats.org/drawingml/2006/main" xmlns:r="http://schemas.openxmlformats.org/officeDocument/2006/relationships" xmlns:p="http://schemas.openxmlformats.org/presentationml/2006/main">
+  <p:cSld>
+    <p:spTree>
+      <p:nvGrpSpPr>
+        <p:cNvPr id="1" name=""/>
+        <p:cNvGrpSpPr/>
+        <p:nvPr/>
+      </p:nvGrpSpPr>
+      <p:grpSpPr>
+        <a:xfrm>
+          <a:off x="0" y="0"/>
+          <a:ext cx="0" cy="0"/>
+          <a:chOff x="0" y="0"/>
+          <a:chExt cx="0" cy="0"/>
+        </a:xfrm>
+      </p:grpSpPr>
+      <p:sp>
+        <p:nvSpPr>
+          <p:cNvPr id="2" name="Slide Image Placeholder 1"/>
+          <p:cNvSpPr>
+            <a:spLocks noGrp="1" noRot="1" noChangeAspect="1"/>
+          </p:cNvSpPr>
+          <p:nvPr>
+            <p:ph type="sldImg"/>
+          </p:nvPr>
+        </p:nvSpPr>
+        <p:spPr/>
+      </p:sp>
+      <p:sp>
+        <p:nvSpPr>
+          <p:cNvPr id="3" name="Notes Placeholder 2"/>
+          <p:cNvSpPr>
+            <a:spLocks noGrp="1"/>
+          </p:cNvSpPr>
+          <p:nvPr>
+            <p:ph type="body" idx="1"/>
+          </p:nvPr>
+        </p:nvSpPr>
+        <p:spPr/>
+        <p:txBody>
+          <a:bodyPr/>
+          <a:lstStyle/>
+          <a:p>
+            <a:r>
+              <a:rPr lang="en-PK" sz="1200" b="1" kern="1200" dirty="0">
+                <a:solidFill>
+                  <a:schemeClr val="tx1"/>
+                </a:solidFill>
+                <a:effectLst/>
+                <a:latin typeface="+mn-lt"/>
+                <a:ea typeface="+mn-ea"/>
+                <a:cs typeface="+mn-cs"/>
+              </a:rPr>
+              <a:t>Root Cause — Data Leakage</a:t>
+            </a:r>
+          </a:p>
+          <a:p>
+            <a:r>
+              <a:rPr lang="en-PK" sz="1200" b="1" kern="1200" dirty="0">
+                <a:solidFill>
+                  <a:schemeClr val="tx1"/>
+                </a:solidFill>
+                <a:effectLst/>
+                <a:latin typeface="+mn-lt"/>
+                <a:ea typeface="+mn-ea"/>
+                <a:cs typeface="+mn-cs"/>
+              </a:rPr>
+              <a:t>Following features are used in Code :</a:t>
+            </a:r>
+            <a:endParaRPr lang="en-PK" sz="1200" kern="1200" dirty="0">
+              <a:solidFill>
+                <a:schemeClr val="tx1"/>
+              </a:solidFill>
+              <a:effectLst/>
+              <a:latin typeface="+mn-lt"/>
+              <a:ea typeface="+mn-ea"/>
+              <a:cs typeface="+mn-cs"/>
+            </a:endParaRPr>
+          </a:p>
+          <a:p>
+            <a:r>
+              <a:rPr lang="en-PK" sz="1200" kern="1200" dirty="0">
+                <a:solidFill>
+                  <a:schemeClr val="tx1"/>
+                </a:solidFill>
+                <a:effectLst/>
+                <a:latin typeface="+mn-lt"/>
+                <a:ea typeface="+mn-ea"/>
+                <a:cs typeface="+mn-cs"/>
+              </a:rPr>
+              <a:t>features = ['</a:t>
+            </a:r>
+            <a:r>
+              <a:rPr lang="en-PK" sz="1200" kern="1200" dirty="0" err="1">
+                <a:solidFill>
+                  <a:schemeClr val="tx1"/>
+                </a:solidFill>
+                <a:effectLst/>
+                <a:latin typeface="+mn-lt"/>
+                <a:ea typeface="+mn-ea"/>
+                <a:cs typeface="+mn-cs"/>
+              </a:rPr>
+              <a:t>cluster_id</a:t>
+            </a:r>
+            <a:r>
+              <a:rPr lang="en-PK" sz="1200" kern="1200" dirty="0">
+                <a:solidFill>
+                  <a:schemeClr val="tx1"/>
+                </a:solidFill>
+                <a:effectLst/>
+                <a:latin typeface="+mn-lt"/>
+                <a:ea typeface="+mn-ea"/>
+                <a:cs typeface="+mn-cs"/>
+              </a:rPr>
+              <a:t>', '</a:t>
+            </a:r>
+            <a:r>
+              <a:rPr lang="en-PK" sz="1200" kern="1200" dirty="0" err="1">
+                <a:solidFill>
+                  <a:schemeClr val="tx1"/>
+                </a:solidFill>
+                <a:effectLst/>
+                <a:latin typeface="+mn-lt"/>
+                <a:ea typeface="+mn-ea"/>
+                <a:cs typeface="+mn-cs"/>
+              </a:rPr>
+              <a:t>app_id_enc</a:t>
+            </a:r>
+            <a:r>
+              <a:rPr lang="en-PK" sz="1200" kern="1200" dirty="0">
+                <a:solidFill>
+                  <a:schemeClr val="tx1"/>
+                </a:solidFill>
+                <a:effectLst/>
+                <a:latin typeface="+mn-lt"/>
+                <a:ea typeface="+mn-ea"/>
+                <a:cs typeface="+mn-cs"/>
+              </a:rPr>
+              <a:t>', '</a:t>
+            </a:r>
+            <a:r>
+              <a:rPr lang="en-PK" sz="1200" kern="1200" dirty="0" err="1">
+                <a:solidFill>
+                  <a:schemeClr val="tx1"/>
+                </a:solidFill>
+                <a:effectLst/>
+                <a:latin typeface="+mn-lt"/>
+                <a:ea typeface="+mn-ea"/>
+                <a:cs typeface="+mn-cs"/>
+              </a:rPr>
+              <a:t>container_id_enc</a:t>
+            </a:r>
+            <a:r>
+              <a:rPr lang="en-PK" sz="1200" kern="1200" dirty="0">
+                <a:solidFill>
+                  <a:schemeClr val="tx1"/>
+                </a:solidFill>
+                <a:effectLst/>
+                <a:latin typeface="+mn-lt"/>
+                <a:ea typeface="+mn-ea"/>
+                <a:cs typeface="+mn-cs"/>
+              </a:rPr>
+              <a:t>']</a:t>
+            </a:r>
+          </a:p>
+          <a:p>
+            <a:r>
+              <a:rPr lang="en-PK" sz="1200" kern="1200" dirty="0">
+                <a:solidFill>
+                  <a:schemeClr val="tx1"/>
+                </a:solidFill>
+                <a:effectLst/>
+                <a:latin typeface="+mn-lt"/>
+                <a:ea typeface="+mn-ea"/>
+                <a:cs typeface="+mn-cs"/>
+              </a:rPr>
+              <a:t> </a:t>
+            </a:r>
+          </a:p>
+          <a:p>
+            <a:pPr lvl="0"/>
+            <a:r>
+              <a:rPr lang="en-PK" sz="1200" kern="1200" dirty="0" err="1">
+                <a:solidFill>
+                  <a:schemeClr val="tx1"/>
+                </a:solidFill>
+                <a:effectLst/>
+                <a:latin typeface="+mn-lt"/>
+                <a:ea typeface="+mn-ea"/>
+                <a:cs typeface="+mn-cs"/>
+              </a:rPr>
+              <a:t>app_id_enc</a:t>
+            </a:r>
+            <a:r>
+              <a:rPr lang="en-PK" sz="1200" kern="1200" dirty="0">
+                <a:solidFill>
+                  <a:schemeClr val="tx1"/>
+                </a:solidFill>
+                <a:effectLst/>
+                <a:latin typeface="+mn-lt"/>
+                <a:ea typeface="+mn-ea"/>
+                <a:cs typeface="+mn-cs"/>
+              </a:rPr>
+              <a:t> and </a:t>
+            </a:r>
+            <a:r>
+              <a:rPr lang="en-PK" sz="1200" kern="1200" dirty="0" err="1">
+                <a:solidFill>
+                  <a:schemeClr val="tx1"/>
+                </a:solidFill>
+                <a:effectLst/>
+                <a:latin typeface="+mn-lt"/>
+                <a:ea typeface="+mn-ea"/>
+                <a:cs typeface="+mn-cs"/>
+              </a:rPr>
+              <a:t>container_id_enc</a:t>
+            </a:r>
+            <a:r>
+              <a:rPr lang="en-PK" sz="1200" kern="1200" dirty="0">
+                <a:solidFill>
+                  <a:schemeClr val="tx1"/>
+                </a:solidFill>
+                <a:effectLst/>
+                <a:latin typeface="+mn-lt"/>
+                <a:ea typeface="+mn-ea"/>
+                <a:cs typeface="+mn-cs"/>
+              </a:rPr>
+              <a:t> are linked directly with labels</a:t>
+            </a:r>
+          </a:p>
+          <a:p>
+            <a:pPr lvl="0"/>
+            <a:r>
+              <a:rPr lang="en-PK" sz="1200" kern="1200" dirty="0" err="1">
+                <a:solidFill>
+                  <a:schemeClr val="tx1"/>
+                </a:solidFill>
+                <a:effectLst/>
+                <a:latin typeface="+mn-lt"/>
+                <a:ea typeface="+mn-ea"/>
+                <a:cs typeface="+mn-cs"/>
+              </a:rPr>
+              <a:t>Labeling</a:t>
+            </a:r>
+            <a:r>
+              <a:rPr lang="en-PK" sz="1200" kern="1200" dirty="0">
+                <a:solidFill>
+                  <a:schemeClr val="tx1"/>
+                </a:solidFill>
+                <a:effectLst/>
+                <a:latin typeface="+mn-lt"/>
+                <a:ea typeface="+mn-ea"/>
+                <a:cs typeface="+mn-cs"/>
+              </a:rPr>
+              <a:t> in Hadoop is per application — app_0001 = always anomaly, app_0002 = always normal Model sees </a:t>
+            </a:r>
+            <a:r>
+              <a:rPr lang="en-PK" sz="1200" kern="1200" dirty="0" err="1">
+                <a:solidFill>
+                  <a:schemeClr val="tx1"/>
+                </a:solidFill>
+                <a:effectLst/>
+                <a:latin typeface="+mn-lt"/>
+                <a:ea typeface="+mn-ea"/>
+                <a:cs typeface="+mn-cs"/>
+              </a:rPr>
+              <a:t>app_id</a:t>
+            </a:r>
+            <a:r>
+              <a:rPr lang="en-PK" sz="1200" kern="1200" dirty="0">
+                <a:solidFill>
+                  <a:schemeClr val="tx1"/>
+                </a:solidFill>
+                <a:effectLst/>
+                <a:latin typeface="+mn-lt"/>
+                <a:ea typeface="+mn-ea"/>
+                <a:cs typeface="+mn-cs"/>
+              </a:rPr>
+              <a:t> and predict label — not learnt the actual log pattern</a:t>
+            </a:r>
+          </a:p>
+          <a:p>
+            <a:r>
+              <a:rPr lang="en-PK" sz="1200" kern="1200" dirty="0">
+                <a:solidFill>
+                  <a:schemeClr val="tx1"/>
+                </a:solidFill>
+                <a:effectLst/>
+                <a:latin typeface="+mn-lt"/>
+                <a:ea typeface="+mn-ea"/>
+                <a:cs typeface="+mn-cs"/>
+              </a:rPr>
+              <a:t>      •    This was a feature leakage — not intentional, a limitation of the data set</a:t>
+            </a:r>
+          </a:p>
+          <a:p>
+            <a:pPr marL="0" marR="0" lvl="0" indent="0" algn="l" defTabSz="914400" rtl="0" eaLnBrk="1" fontAlgn="auto" latinLnBrk="0" hangingPunct="1">
+              <a:lnSpc>
+                <a:spcPct val="100000"/>
+              </a:lnSpc>
+              <a:spcBef>
+                <a:spcPts val="0"/>
+              </a:spcBef>
+              <a:spcAft>
+                <a:spcPts val="0"/>
+              </a:spcAft>
+              <a:buClrTx/>
+              <a:buSzTx/>
+              <a:buFontTx/>
+              <a:buNone/>
+              <a:tabLst/>
+              <a:defRPr/>
+            </a:pPr>
+            <a:r>
+              <a:rPr lang="en-PK" sz="1200" i="1" kern="1200" dirty="0">
+                <a:solidFill>
+                  <a:schemeClr val="tx1"/>
+                </a:solidFill>
+                <a:effectLst/>
+                <a:latin typeface="+mn-lt"/>
+                <a:ea typeface="+mn-ea"/>
+                <a:cs typeface="+mn-cs"/>
+              </a:rPr>
+              <a:t>IF the data was wrong then all models will for sure give 1.0— But Isolation Forest 0.20 and SVM 0.23 gave. Only Random Forest caught </a:t>
+            </a:r>
+            <a:r>
+              <a:rPr lang="en-PK" sz="1200" i="1" kern="1200" dirty="0" err="1">
+                <a:solidFill>
+                  <a:schemeClr val="tx1"/>
+                </a:solidFill>
+                <a:effectLst/>
+                <a:latin typeface="+mn-lt"/>
+                <a:ea typeface="+mn-ea"/>
+                <a:cs typeface="+mn-cs"/>
+              </a:rPr>
+              <a:t>app_id</a:t>
+            </a:r>
+            <a:r>
+              <a:rPr lang="en-PK" sz="1200" i="1" kern="1200" dirty="0">
+                <a:solidFill>
+                  <a:schemeClr val="tx1"/>
+                </a:solidFill>
+                <a:effectLst/>
+                <a:latin typeface="+mn-lt"/>
+                <a:ea typeface="+mn-ea"/>
+                <a:cs typeface="+mn-cs"/>
+              </a:rPr>
+              <a:t> pattern —</a:t>
+            </a:r>
+            <a:r>
+              <a:rPr lang="en-PK" sz="1200" kern="1200" dirty="0">
+                <a:solidFill>
+                  <a:schemeClr val="tx1"/>
+                </a:solidFill>
+                <a:effectLst/>
+                <a:latin typeface="+mn-lt"/>
+                <a:ea typeface="+mn-ea"/>
+                <a:cs typeface="+mn-cs"/>
+              </a:rPr>
+              <a:t> </a:t>
+            </a:r>
+            <a:r>
+              <a:rPr lang="en-PK" sz="1200" i="1" kern="1200" dirty="0">
+                <a:solidFill>
+                  <a:schemeClr val="tx1"/>
+                </a:solidFill>
+                <a:effectLst/>
+                <a:latin typeface="+mn-lt"/>
+                <a:ea typeface="+mn-ea"/>
+                <a:cs typeface="+mn-cs"/>
+              </a:rPr>
+              <a:t>it was model sensitivity leakage!</a:t>
+            </a:r>
+            <a:endParaRPr lang="en-PK" sz="1200" kern="1200" dirty="0">
+              <a:solidFill>
+                <a:schemeClr val="tx1"/>
+              </a:solidFill>
+              <a:effectLst/>
+              <a:latin typeface="+mn-lt"/>
+              <a:ea typeface="+mn-ea"/>
+              <a:cs typeface="+mn-cs"/>
+            </a:endParaRPr>
+          </a:p>
+          <a:p>
+            <a:endParaRPr lang="en-US" dirty="0"/>
+          </a:p>
+          <a:p>
+            <a:pPr marL="0" marR="0" lvl="0" indent="0" algn="l" defTabSz="914400" rtl="0" eaLnBrk="1" fontAlgn="auto" latinLnBrk="0" hangingPunct="1">
+              <a:lnSpc>
+                <a:spcPct val="100000"/>
+              </a:lnSpc>
+              <a:spcBef>
+                <a:spcPts val="0"/>
+              </a:spcBef>
+              <a:spcAft>
+                <a:spcPts val="0"/>
+              </a:spcAft>
+              <a:buClrTx/>
+              <a:buSzTx/>
+              <a:buFontTx/>
+              <a:buNone/>
+              <a:tabLst/>
+              <a:defRPr/>
+            </a:pPr>
+            <a:r>
+              <a:rPr lang="en-PK" sz="1200" i="1" kern="1200" dirty="0">
+                <a:solidFill>
+                  <a:schemeClr val="tx1"/>
+                </a:solidFill>
+                <a:effectLst/>
+                <a:latin typeface="+mn-lt"/>
+                <a:ea typeface="+mn-ea"/>
+                <a:cs typeface="+mn-cs"/>
+              </a:rPr>
+              <a:t>"Sir we used </a:t>
+            </a:r>
+            <a:r>
+              <a:rPr lang="en-PK" sz="1200" i="1" kern="1200" dirty="0" err="1">
+                <a:solidFill>
+                  <a:schemeClr val="tx1"/>
+                </a:solidFill>
+                <a:effectLst/>
+                <a:latin typeface="+mn-lt"/>
+                <a:ea typeface="+mn-ea"/>
+                <a:cs typeface="+mn-cs"/>
+              </a:rPr>
+              <a:t>app_id</a:t>
+            </a:r>
+            <a:r>
+              <a:rPr lang="en-PK" sz="1200" i="1" kern="1200" dirty="0">
+                <a:solidFill>
+                  <a:schemeClr val="tx1"/>
+                </a:solidFill>
+                <a:effectLst/>
+                <a:latin typeface="+mn-lt"/>
+                <a:ea typeface="+mn-ea"/>
+                <a:cs typeface="+mn-cs"/>
+              </a:rPr>
+              <a:t> and </a:t>
+            </a:r>
+            <a:r>
+              <a:rPr lang="en-PK" sz="1200" i="1" kern="1200" dirty="0" err="1">
+                <a:solidFill>
+                  <a:schemeClr val="tx1"/>
+                </a:solidFill>
+                <a:effectLst/>
+                <a:latin typeface="+mn-lt"/>
+                <a:ea typeface="+mn-ea"/>
+                <a:cs typeface="+mn-cs"/>
+              </a:rPr>
+              <a:t>container_id</a:t>
+            </a:r>
+            <a:r>
+              <a:rPr lang="en-PK" sz="1200" i="1" kern="1200" dirty="0">
+                <a:solidFill>
+                  <a:schemeClr val="tx1"/>
+                </a:solidFill>
+                <a:effectLst/>
+                <a:latin typeface="+mn-lt"/>
+                <a:ea typeface="+mn-ea"/>
+                <a:cs typeface="+mn-cs"/>
+              </a:rPr>
+              <a:t> in features — but in Hadoop dataset there are applications in label. It means model has Label mapped directly to </a:t>
+            </a:r>
+            <a:r>
+              <a:rPr lang="en-PK" sz="1200" i="1" kern="1200" dirty="0" err="1">
+                <a:solidFill>
+                  <a:schemeClr val="tx1"/>
+                </a:solidFill>
+                <a:effectLst/>
+                <a:latin typeface="+mn-lt"/>
+                <a:ea typeface="+mn-ea"/>
+                <a:cs typeface="+mn-cs"/>
+              </a:rPr>
+              <a:t>app_id</a:t>
+            </a:r>
+            <a:r>
+              <a:rPr lang="en-PK" sz="1200" i="1" kern="1200" dirty="0">
+                <a:solidFill>
+                  <a:schemeClr val="tx1"/>
+                </a:solidFill>
+                <a:effectLst/>
+                <a:latin typeface="+mn-lt"/>
+                <a:ea typeface="+mn-ea"/>
+                <a:cs typeface="+mn-cs"/>
+              </a:rPr>
+              <a:t>. This was feature leakage - dataset limitation, not intentional. On Spark Random Forest has score 0.9902— its realistic because </a:t>
+            </a:r>
+            <a:r>
+              <a:rPr lang="en-PK" sz="1200" i="1" kern="1200" dirty="0" err="1">
+                <a:solidFill>
+                  <a:schemeClr val="tx1"/>
+                </a:solidFill>
+                <a:effectLst/>
+                <a:latin typeface="+mn-lt"/>
+                <a:ea typeface="+mn-ea"/>
+                <a:cs typeface="+mn-cs"/>
+              </a:rPr>
+              <a:t>App_id</a:t>
+            </a:r>
+            <a:r>
+              <a:rPr lang="en-PK" sz="1200" i="1" kern="1200" dirty="0">
+                <a:solidFill>
+                  <a:schemeClr val="tx1"/>
+                </a:solidFill>
+                <a:effectLst/>
+                <a:latin typeface="+mn-lt"/>
+                <a:ea typeface="+mn-ea"/>
+                <a:cs typeface="+mn-cs"/>
+              </a:rPr>
+              <a:t> and label are not directly related in spark logs."</a:t>
+            </a:r>
+            <a:endParaRPr lang="en-PK" sz="1200" kern="1200" dirty="0">
+              <a:solidFill>
+                <a:schemeClr val="tx1"/>
+              </a:solidFill>
+              <a:effectLst/>
+              <a:latin typeface="+mn-lt"/>
+              <a:ea typeface="+mn-ea"/>
+              <a:cs typeface="+mn-cs"/>
+            </a:endParaRPr>
+          </a:p>
+          <a:p>
+            <a:endParaRPr lang="en-PK" dirty="0"/>
+          </a:p>
+        </p:txBody>
+      </p:sp>
+      <p:sp>
+        <p:nvSpPr>
+          <p:cNvPr id="4" name="Slide Number Placeholder 3"/>
+          <p:cNvSpPr>
+            <a:spLocks noGrp="1"/>
+          </p:cNvSpPr>
+          <p:nvPr>
+            <p:ph type="sldNum" sz="quarter" idx="5"/>
+          </p:nvPr>
+        </p:nvSpPr>
+        <p:spPr/>
+        <p:txBody>
+          <a:bodyPr/>
+          <a:lstStyle/>
+          <a:p>
+            <a:fld id="{DB35007E-B1A3-4106-B116-89CDED5B7D80}" type="slidenum">
+              <a:rPr lang="en-PK" smtClean="0"/>
+              <a:t>25</a:t>
+            </a:fld>
+            <a:endParaRPr lang="en-PK"/>
+          </a:p>
+        </p:txBody>
+      </p:sp>
+    </p:spTree>
+    <p:extLst>
+      <p:ext uri="{BB962C8B-B14F-4D97-AF65-F5344CB8AC3E}">
+        <p14:creationId xmlns:p14="http://schemas.microsoft.com/office/powerpoint/2010/main" val="1910839716"/>
+      </p:ext>
+    </p:extLst>
+  </p:cSld>
+  <p:clrMapOvr>
+    <a:masterClrMapping/>
+  </p:clrMapOvr>
+</p:notes>
+</file>
+
+<file path=ppt/notesSlides/notesSlide8.xml><?xml version="1.0" encoding="utf-8"?>
 <p:notes xmlns:a="http://schemas.openxmlformats.org/drawingml/2006/main" xmlns:r="http://schemas.openxmlformats.org/officeDocument/2006/relationships" xmlns:p="http://schemas.openxmlformats.org/presentationml/2006/main" showMasterSp="0" showMasterPhAnim="0">
   <p:cSld>
     <p:spTree>
@@ -1688,7 +2863,7 @@
 </p:notes>
 </file>
 
-<file path=ppt/notesSlides/notesSlide8.xml><?xml version="1.0" encoding="utf-8"?>
+<file path=ppt/notesSlides/notesSlide9.xml><?xml version="1.0" encoding="utf-8"?>
 <p:notes xmlns:a="http://schemas.openxmlformats.org/drawingml/2006/main" xmlns:r="http://schemas.openxmlformats.org/officeDocument/2006/relationships" xmlns:p="http://schemas.openxmlformats.org/presentationml/2006/main" showMasterSp="0" showMasterPhAnim="0">
   <p:cSld>
     <p:spTree>
@@ -1914,110 +3089,6 @@
       <p:sp>
         <p:nvSpPr>
           <p:cNvPr id="421" name="Google Shape;421;p14:notes"/>
-          <p:cNvSpPr>
-            <a:spLocks noGrp="1" noRot="1" noChangeAspect="1"/>
-          </p:cNvSpPr>
-          <p:nvPr>
-            <p:ph type="sldImg" idx="2"/>
-          </p:nvPr>
-        </p:nvSpPr>
-        <p:spPr>
-          <a:xfrm>
-            <a:off x="381000" y="685800"/>
-            <a:ext cx="6096000" cy="3429000"/>
-          </a:xfrm>
-          <a:custGeom>
-            <a:avLst/>
-            <a:gdLst/>
-            <a:ahLst/>
-            <a:cxnLst/>
-            <a:rect l="l" t="t" r="r" b="b"/>
-            <a:pathLst>
-              <a:path w="120000" h="120000" extrusionOk="0">
-                <a:moveTo>
-                  <a:pt x="0" y="0"/>
-                </a:moveTo>
-                <a:lnTo>
-                  <a:pt x="120000" y="0"/>
-                </a:lnTo>
-                <a:lnTo>
-                  <a:pt x="120000" y="120000"/>
-                </a:lnTo>
-                <a:lnTo>
-                  <a:pt x="0" y="120000"/>
-                </a:lnTo>
-                <a:close/>
-              </a:path>
-            </a:pathLst>
-          </a:custGeom>
-        </p:spPr>
-      </p:sp>
-    </p:spTree>
-  </p:cSld>
-  <p:clrMapOvr>
-    <a:masterClrMapping/>
-  </p:clrMapOvr>
-</p:notes>
-</file>
-
-<file path=ppt/notesSlides/notesSlide9.xml><?xml version="1.0" encoding="utf-8"?>
-<p:notes xmlns:a="http://schemas.openxmlformats.org/drawingml/2006/main" xmlns:r="http://schemas.openxmlformats.org/officeDocument/2006/relationships" xmlns:p="http://schemas.openxmlformats.org/presentationml/2006/main" showMasterSp="0" showMasterPhAnim="0">
-  <p:cSld>
-    <p:spTree>
-      <p:nvGrpSpPr>
-        <p:cNvPr id="1" name="Shape 510"/>
-        <p:cNvGrpSpPr/>
-        <p:nvPr/>
-      </p:nvGrpSpPr>
-      <p:grpSpPr>
-        <a:xfrm>
-          <a:off x="0" y="0"/>
-          <a:ext cx="0" cy="0"/>
-          <a:chOff x="0" y="0"/>
-          <a:chExt cx="0" cy="0"/>
-        </a:xfrm>
-      </p:grpSpPr>
-      <p:sp>
-        <p:nvSpPr>
-          <p:cNvPr id="511" name="Google Shape;511;p17:notes"/>
-          <p:cNvSpPr txBox="1">
-            <a:spLocks noGrp="1"/>
-          </p:cNvSpPr>
-          <p:nvPr>
-            <p:ph type="body" idx="1"/>
-          </p:nvPr>
-        </p:nvSpPr>
-        <p:spPr>
-          <a:xfrm>
-            <a:off x="685800" y="4343400"/>
-            <a:ext cx="5486400" cy="4114800"/>
-          </a:xfrm>
-          <a:prstGeom prst="rect">
-            <a:avLst/>
-          </a:prstGeom>
-        </p:spPr>
-        <p:txBody>
-          <a:bodyPr spcFirstLastPara="1" wrap="square" lIns="91425" tIns="91425" rIns="91425" bIns="91425" anchor="t" anchorCtr="0">
-            <a:noAutofit/>
-          </a:bodyPr>
-          <a:lstStyle/>
-          <a:p>
-            <a:pPr marL="0" lvl="0" indent="0" algn="l" rtl="0">
-              <a:spcBef>
-                <a:spcPts val="0"/>
-              </a:spcBef>
-              <a:spcAft>
-                <a:spcPts val="0"/>
-              </a:spcAft>
-              <a:buNone/>
-            </a:pPr>
-            <a:endParaRPr/>
-          </a:p>
-        </p:txBody>
-      </p:sp>
-      <p:sp>
-        <p:nvSpPr>
-          <p:cNvPr id="512" name="Google Shape;512;p17:notes"/>
           <p:cNvSpPr>
             <a:spLocks noGrp="1" noRot="1" noChangeAspect="1"/>
           </p:cNvSpPr>
@@ -2213,7 +3284,7 @@
           <a:p>
             <a:fld id="{5BCAD085-E8A6-8845-BD4E-CB4CCA059FC4}" type="datetimeFigureOut">
               <a:rPr lang="en-US" smtClean="0"/>
-              <a:t>10/21/2026</a:t>
+              <a:t>10/22/2026</a:t>
             </a:fld>
             <a:endParaRPr lang="en-US"/>
           </a:p>
@@ -2425,7 +3496,7 @@
           <a:p>
             <a:fld id="{5BCAD085-E8A6-8845-BD4E-CB4CCA059FC4}" type="datetimeFigureOut">
               <a:rPr lang="en-US" smtClean="0"/>
-              <a:t>10/21/2026</a:t>
+              <a:t>10/22/2026</a:t>
             </a:fld>
             <a:endParaRPr lang="en-US"/>
           </a:p>
@@ -2647,7 +3718,7 @@
           <a:p>
             <a:fld id="{5BCAD085-E8A6-8845-BD4E-CB4CCA059FC4}" type="datetimeFigureOut">
               <a:rPr lang="en-US" smtClean="0"/>
-              <a:t>10/21/2026</a:t>
+              <a:t>10/22/2026</a:t>
             </a:fld>
             <a:endParaRPr lang="en-US"/>
           </a:p>
@@ -2859,7 +3930,7 @@
           <a:p>
             <a:fld id="{5BCAD085-E8A6-8845-BD4E-CB4CCA059FC4}" type="datetimeFigureOut">
               <a:rPr lang="en-US" smtClean="0"/>
-              <a:t>10/21/2026</a:t>
+              <a:t>10/22/2026</a:t>
             </a:fld>
             <a:endParaRPr lang="en-US"/>
           </a:p>
@@ -3147,7 +4218,7 @@
           <a:p>
             <a:fld id="{5BCAD085-E8A6-8845-BD4E-CB4CCA059FC4}" type="datetimeFigureOut">
               <a:rPr lang="en-US" smtClean="0"/>
-              <a:t>10/21/2026</a:t>
+              <a:t>10/22/2026</a:t>
             </a:fld>
             <a:endParaRPr lang="en-US"/>
           </a:p>
@@ -3427,7 +4498,7 @@
           <a:p>
             <a:fld id="{5BCAD085-E8A6-8845-BD4E-CB4CCA059FC4}" type="datetimeFigureOut">
               <a:rPr lang="en-US" smtClean="0"/>
-              <a:t>10/21/2026</a:t>
+              <a:t>10/22/2026</a:t>
             </a:fld>
             <a:endParaRPr lang="en-US"/>
           </a:p>
@@ -3854,7 +4925,7 @@
           <a:p>
             <a:fld id="{5BCAD085-E8A6-8845-BD4E-CB4CCA059FC4}" type="datetimeFigureOut">
               <a:rPr lang="en-US" smtClean="0"/>
-              <a:t>10/21/2026</a:t>
+              <a:t>10/22/2026</a:t>
             </a:fld>
             <a:endParaRPr lang="en-US"/>
           </a:p>
@@ -4008,7 +5079,7 @@
           <a:p>
             <a:fld id="{5BCAD085-E8A6-8845-BD4E-CB4CCA059FC4}" type="datetimeFigureOut">
               <a:rPr lang="en-US" smtClean="0"/>
-              <a:t>10/21/2026</a:t>
+              <a:t>10/22/2026</a:t>
             </a:fld>
             <a:endParaRPr lang="en-US"/>
           </a:p>
@@ -4133,7 +5204,7 @@
           <a:p>
             <a:fld id="{5BCAD085-E8A6-8845-BD4E-CB4CCA059FC4}" type="datetimeFigureOut">
               <a:rPr lang="en-US" smtClean="0"/>
-              <a:t>10/21/2026</a:t>
+              <a:t>10/22/2026</a:t>
             </a:fld>
             <a:endParaRPr lang="en-US"/>
           </a:p>
@@ -4458,7 +5529,7 @@
           <a:p>
             <a:fld id="{5BCAD085-E8A6-8845-BD4E-CB4CCA059FC4}" type="datetimeFigureOut">
               <a:rPr lang="en-US" smtClean="0"/>
-              <a:t>10/21/2026</a:t>
+              <a:t>10/22/2026</a:t>
             </a:fld>
             <a:endParaRPr lang="en-US"/>
           </a:p>
@@ -4759,7 +5830,7 @@
           <a:p>
             <a:fld id="{5BCAD085-E8A6-8845-BD4E-CB4CCA059FC4}" type="datetimeFigureOut">
               <a:rPr lang="en-US" smtClean="0"/>
-              <a:t>10/21/2026</a:t>
+              <a:t>10/22/2026</a:t>
             </a:fld>
             <a:endParaRPr lang="en-US"/>
           </a:p>
@@ -5014,7 +6085,7 @@
           <a:p>
             <a:fld id="{5BCAD085-E8A6-8845-BD4E-CB4CCA059FC4}" type="datetimeFigureOut">
               <a:rPr lang="en-US" smtClean="0"/>
-              <a:t>10/21/2026</a:t>
+              <a:t>10/22/2026</a:t>
             </a:fld>
             <a:endParaRPr lang="en-US"/>
           </a:p>
@@ -10720,62 +11791,6 @@
           </a:p>
         </p:txBody>
       </p:sp>
-      <p:sp>
-        <p:nvSpPr>
-          <p:cNvPr id="348" name="Google Shape;348;p24"/>
-          <p:cNvSpPr txBox="1"/>
-          <p:nvPr/>
-        </p:nvSpPr>
-        <p:spPr>
-          <a:xfrm>
-            <a:off x="762000" y="1485900"/>
-            <a:ext cx="10668000" cy="443198"/>
-          </a:xfrm>
-          <a:prstGeom prst="rect">
-            <a:avLst/>
-          </a:prstGeom>
-          <a:noFill/>
-          <a:ln>
-            <a:noFill/>
-          </a:ln>
-        </p:spPr>
-        <p:txBody>
-          <a:bodyPr spcFirstLastPara="1" wrap="square" lIns="0" tIns="0" rIns="0" bIns="0" anchor="t" anchorCtr="0">
-            <a:spAutoFit/>
-          </a:bodyPr>
-          <a:lstStyle/>
-          <a:p>
-            <a:pPr marL="0" marR="0" lvl="0" indent="0" algn="l" rtl="0">
-              <a:lnSpc>
-                <a:spcPct val="159944"/>
-              </a:lnSpc>
-              <a:spcBef>
-                <a:spcPts val="0"/>
-              </a:spcBef>
-              <a:spcAft>
-                <a:spcPts val="0"/>
-              </a:spcAft>
-              <a:buNone/>
-            </a:pPr>
-            <a:r>
-              <a:rPr lang="en-US" sz="1800" b="0" i="0" u="none" strike="noStrike" cap="none">
-                <a:solidFill>
-                  <a:srgbClr val="333333"/>
-                </a:solidFill>
-                <a:latin typeface="Times New Roman" panose="02020603050405020304" pitchFamily="18" charset="0"/>
-                <a:ea typeface="Helvetica Neue"/>
-                <a:cs typeface="Times New Roman" panose="02020603050405020304" pitchFamily="18" charset="0"/>
-                <a:sym typeface="Helvetica Neue"/>
-              </a:rPr>
-              <a:t>Testing completed on 115,013 holdout instances (111,645 normal / 3,368 anomalies).</a:t>
-            </a:r>
-            <a:endParaRPr>
-              <a:latin typeface="Times New Roman" panose="02020603050405020304" pitchFamily="18" charset="0"/>
-              <a:cs typeface="Times New Roman" panose="02020603050405020304" pitchFamily="18" charset="0"/>
-            </a:endParaRPr>
-          </a:p>
-        </p:txBody>
-      </p:sp>
       <p:graphicFrame>
         <p:nvGraphicFramePr>
           <p:cNvPr id="349" name="Google Shape;349;p24"/>
@@ -10783,20 +11798,20 @@
           <p:nvPr>
             <p:extLst>
               <p:ext uri="{D42A27DB-BD31-4B8C-83A1-F6EECF244321}">
-                <p14:modId xmlns:p14="http://schemas.microsoft.com/office/powerpoint/2010/main" val="3285927580"/>
+                <p14:modId xmlns:p14="http://schemas.microsoft.com/office/powerpoint/2010/main" val="3982210349"/>
               </p:ext>
             </p:extLst>
           </p:nvPr>
         </p:nvGraphicFramePr>
         <p:xfrm>
-          <a:off x="762000" y="2137320"/>
+          <a:off x="762050" y="1654468"/>
           <a:ext cx="10667950" cy="3934975"/>
         </p:xfrm>
         <a:graphic>
           <a:graphicData uri="http://schemas.openxmlformats.org/drawingml/2006/table">
             <a:tbl>
               <a:tblPr firstRow="1" bandRow="1">
-                <a:noFill/>
+                <a:tableStyleId>{B301B821-A1FF-4177-AEE7-76D212191A09}</a:tableStyleId>
               </a:tblPr>
               <a:tblGrid>
                 <a:gridCol w="1584425">
@@ -10858,13 +11873,10 @@
                         <a:buNone/>
                       </a:pPr>
                       <a:r>
-                        <a:rPr lang="en-US" sz="1800" b="1" i="0" u="none" strike="noStrike" cap="none" dirty="0">
+                        <a:rPr lang="en-US" sz="1800" b="1" u="none" strike="noStrike" cap="none" dirty="0">
                           <a:solidFill>
                             <a:srgbClr val="003366"/>
                           </a:solidFill>
-                          <a:latin typeface="Helvetica Neue"/>
-                          <a:ea typeface="Helvetica Neue"/>
-                          <a:cs typeface="Helvetica Neue"/>
                           <a:sym typeface="Helvetica Neue"/>
                         </a:rPr>
                         <a:t>Model</a:t>
@@ -10872,55 +11884,7 @@
                       <a:endParaRPr sz="2000" dirty="0"/>
                     </a:p>
                   </a:txBody>
-                  <a:tcPr marL="63500" marR="63500" marT="25400" marB="25400" anchor="ctr">
-                    <a:lnL w="9525" cap="flat" cmpd="sng">
-                      <a:solidFill>
-                        <a:srgbClr val="000000">
-                          <a:alpha val="0"/>
-                        </a:srgbClr>
-                      </a:solidFill>
-                      <a:prstDash val="solid"/>
-                      <a:round/>
-                      <a:headEnd type="none" w="sm" len="sm"/>
-                      <a:tailEnd type="none" w="sm" len="sm"/>
-                    </a:lnL>
-                    <a:lnR w="9525" cap="flat" cmpd="sng">
-                      <a:solidFill>
-                        <a:srgbClr val="000000">
-                          <a:alpha val="0"/>
-                        </a:srgbClr>
-                      </a:solidFill>
-                      <a:prstDash val="solid"/>
-                      <a:round/>
-                      <a:headEnd type="none" w="sm" len="sm"/>
-                      <a:tailEnd type="none" w="sm" len="sm"/>
-                    </a:lnR>
-                    <a:lnT w="9525" cap="flat" cmpd="sng">
-                      <a:solidFill>
-                        <a:srgbClr val="000000">
-                          <a:alpha val="0"/>
-                        </a:srgbClr>
-                      </a:solidFill>
-                      <a:prstDash val="solid"/>
-                      <a:round/>
-                      <a:headEnd type="none" w="sm" len="sm"/>
-                      <a:tailEnd type="none" w="sm" len="sm"/>
-                    </a:lnT>
-                    <a:lnB w="9525" cap="flat" cmpd="sng">
-                      <a:solidFill>
-                        <a:srgbClr val="000000">
-                          <a:alpha val="0"/>
-                        </a:srgbClr>
-                      </a:solidFill>
-                      <a:prstDash val="solid"/>
-                      <a:round/>
-                      <a:headEnd type="none" w="sm" len="sm"/>
-                      <a:tailEnd type="none" w="sm" len="sm"/>
-                    </a:lnB>
-                    <a:solidFill>
-                      <a:srgbClr val="F1F5F9"/>
-                    </a:solidFill>
-                  </a:tcPr>
+                  <a:tcPr marL="63500" marR="63500" marT="25400" marB="25400" anchor="ctr"/>
                 </a:tc>
                 <a:tc>
                   <a:txBody>
@@ -10937,69 +11901,18 @@
                         <a:buNone/>
                       </a:pPr>
                       <a:r>
-                        <a:rPr lang="en-US" sz="1800" b="1" i="0" u="none" strike="noStrike" cap="none">
+                        <a:rPr lang="en-US" sz="1800" b="1" u="none" strike="noStrike" cap="none" dirty="0">
                           <a:solidFill>
                             <a:srgbClr val="003366"/>
                           </a:solidFill>
-                          <a:latin typeface="Helvetica Neue"/>
-                          <a:ea typeface="Helvetica Neue"/>
-                          <a:cs typeface="Helvetica Neue"/>
                           <a:sym typeface="Helvetica Neue"/>
                         </a:rPr>
                         <a:t>Category</a:t>
                       </a:r>
-                      <a:endParaRPr sz="2000"/>
+                      <a:endParaRPr sz="2000" dirty="0"/>
                     </a:p>
                   </a:txBody>
-                  <a:tcPr marL="63500" marR="63500" marT="25400" marB="25400" anchor="ctr">
-                    <a:lnL w="9525" cap="flat" cmpd="sng">
-                      <a:solidFill>
-                        <a:srgbClr val="000000">
-                          <a:alpha val="0"/>
-                        </a:srgbClr>
-                      </a:solidFill>
-                      <a:prstDash val="solid"/>
-                      <a:round/>
-                      <a:headEnd type="none" w="sm" len="sm"/>
-                      <a:tailEnd type="none" w="sm" len="sm"/>
-                    </a:lnL>
-                    <a:lnR w="9525" cap="flat" cmpd="sng">
-                      <a:solidFill>
-                        <a:srgbClr val="000000">
-                          <a:alpha val="0"/>
-                        </a:srgbClr>
-                      </a:solidFill>
-                      <a:prstDash val="solid"/>
-                      <a:round/>
-                      <a:headEnd type="none" w="sm" len="sm"/>
-                      <a:tailEnd type="none" w="sm" len="sm"/>
-                    </a:lnR>
-                    <a:lnT w="9525" cap="flat" cmpd="sng">
-                      <a:solidFill>
-                        <a:srgbClr val="000000">
-                          <a:alpha val="0"/>
-                        </a:srgbClr>
-                      </a:solidFill>
-                      <a:prstDash val="solid"/>
-                      <a:round/>
-                      <a:headEnd type="none" w="sm" len="sm"/>
-                      <a:tailEnd type="none" w="sm" len="sm"/>
-                    </a:lnT>
-                    <a:lnB w="9525" cap="flat" cmpd="sng">
-                      <a:solidFill>
-                        <a:srgbClr val="000000">
-                          <a:alpha val="0"/>
-                        </a:srgbClr>
-                      </a:solidFill>
-                      <a:prstDash val="solid"/>
-                      <a:round/>
-                      <a:headEnd type="none" w="sm" len="sm"/>
-                      <a:tailEnd type="none" w="sm" len="sm"/>
-                    </a:lnB>
-                    <a:solidFill>
-                      <a:srgbClr val="F1F5F9"/>
-                    </a:solidFill>
-                  </a:tcPr>
+                  <a:tcPr marL="63500" marR="63500" marT="25400" marB="25400" anchor="ctr"/>
                 </a:tc>
                 <a:tc>
                   <a:txBody>
@@ -11016,13 +11929,10 @@
                         <a:buNone/>
                       </a:pPr>
                       <a:r>
-                        <a:rPr lang="en-US" sz="1800" b="1" i="0" u="none" strike="noStrike" cap="none">
+                        <a:rPr lang="en-US" sz="1800" b="1" u="none" strike="noStrike" cap="none">
                           <a:solidFill>
                             <a:srgbClr val="003366"/>
                           </a:solidFill>
-                          <a:latin typeface="Helvetica Neue"/>
-                          <a:ea typeface="Helvetica Neue"/>
-                          <a:cs typeface="Helvetica Neue"/>
                           <a:sym typeface="Helvetica Neue"/>
                         </a:rPr>
                         <a:t>Precision</a:t>
@@ -11030,55 +11940,7 @@
                       <a:endParaRPr sz="2000"/>
                     </a:p>
                   </a:txBody>
-                  <a:tcPr marL="63500" marR="63500" marT="25400" marB="25400" anchor="ctr">
-                    <a:lnL w="9525" cap="flat" cmpd="sng">
-                      <a:solidFill>
-                        <a:srgbClr val="000000">
-                          <a:alpha val="0"/>
-                        </a:srgbClr>
-                      </a:solidFill>
-                      <a:prstDash val="solid"/>
-                      <a:round/>
-                      <a:headEnd type="none" w="sm" len="sm"/>
-                      <a:tailEnd type="none" w="sm" len="sm"/>
-                    </a:lnL>
-                    <a:lnR w="9525" cap="flat" cmpd="sng">
-                      <a:solidFill>
-                        <a:srgbClr val="000000">
-                          <a:alpha val="0"/>
-                        </a:srgbClr>
-                      </a:solidFill>
-                      <a:prstDash val="solid"/>
-                      <a:round/>
-                      <a:headEnd type="none" w="sm" len="sm"/>
-                      <a:tailEnd type="none" w="sm" len="sm"/>
-                    </a:lnR>
-                    <a:lnT w="9525" cap="flat" cmpd="sng">
-                      <a:solidFill>
-                        <a:srgbClr val="000000">
-                          <a:alpha val="0"/>
-                        </a:srgbClr>
-                      </a:solidFill>
-                      <a:prstDash val="solid"/>
-                      <a:round/>
-                      <a:headEnd type="none" w="sm" len="sm"/>
-                      <a:tailEnd type="none" w="sm" len="sm"/>
-                    </a:lnT>
-                    <a:lnB w="9525" cap="flat" cmpd="sng">
-                      <a:solidFill>
-                        <a:srgbClr val="000000">
-                          <a:alpha val="0"/>
-                        </a:srgbClr>
-                      </a:solidFill>
-                      <a:prstDash val="solid"/>
-                      <a:round/>
-                      <a:headEnd type="none" w="sm" len="sm"/>
-                      <a:tailEnd type="none" w="sm" len="sm"/>
-                    </a:lnB>
-                    <a:solidFill>
-                      <a:srgbClr val="F1F5F9"/>
-                    </a:solidFill>
-                  </a:tcPr>
+                  <a:tcPr marL="63500" marR="63500" marT="25400" marB="25400" anchor="ctr"/>
                 </a:tc>
                 <a:tc>
                   <a:txBody>
@@ -11095,13 +11957,10 @@
                         <a:buNone/>
                       </a:pPr>
                       <a:r>
-                        <a:rPr lang="en-US" sz="1800" b="1" i="0" u="none" strike="noStrike" cap="none">
+                        <a:rPr lang="en-US" sz="1800" b="1" u="none" strike="noStrike" cap="none">
                           <a:solidFill>
                             <a:srgbClr val="003366"/>
                           </a:solidFill>
-                          <a:latin typeface="Helvetica Neue"/>
-                          <a:ea typeface="Helvetica Neue"/>
-                          <a:cs typeface="Helvetica Neue"/>
                           <a:sym typeface="Helvetica Neue"/>
                         </a:rPr>
                         <a:t>Recall</a:t>
@@ -11109,55 +11968,7 @@
                       <a:endParaRPr sz="2000"/>
                     </a:p>
                   </a:txBody>
-                  <a:tcPr marL="63500" marR="63500" marT="25400" marB="25400" anchor="ctr">
-                    <a:lnL w="9525" cap="flat" cmpd="sng">
-                      <a:solidFill>
-                        <a:srgbClr val="000000">
-                          <a:alpha val="0"/>
-                        </a:srgbClr>
-                      </a:solidFill>
-                      <a:prstDash val="solid"/>
-                      <a:round/>
-                      <a:headEnd type="none" w="sm" len="sm"/>
-                      <a:tailEnd type="none" w="sm" len="sm"/>
-                    </a:lnL>
-                    <a:lnR w="9525" cap="flat" cmpd="sng">
-                      <a:solidFill>
-                        <a:srgbClr val="000000">
-                          <a:alpha val="0"/>
-                        </a:srgbClr>
-                      </a:solidFill>
-                      <a:prstDash val="solid"/>
-                      <a:round/>
-                      <a:headEnd type="none" w="sm" len="sm"/>
-                      <a:tailEnd type="none" w="sm" len="sm"/>
-                    </a:lnR>
-                    <a:lnT w="9525" cap="flat" cmpd="sng">
-                      <a:solidFill>
-                        <a:srgbClr val="000000">
-                          <a:alpha val="0"/>
-                        </a:srgbClr>
-                      </a:solidFill>
-                      <a:prstDash val="solid"/>
-                      <a:round/>
-                      <a:headEnd type="none" w="sm" len="sm"/>
-                      <a:tailEnd type="none" w="sm" len="sm"/>
-                    </a:lnT>
-                    <a:lnB w="9525" cap="flat" cmpd="sng">
-                      <a:solidFill>
-                        <a:srgbClr val="000000">
-                          <a:alpha val="0"/>
-                        </a:srgbClr>
-                      </a:solidFill>
-                      <a:prstDash val="solid"/>
-                      <a:round/>
-                      <a:headEnd type="none" w="sm" len="sm"/>
-                      <a:tailEnd type="none" w="sm" len="sm"/>
-                    </a:lnB>
-                    <a:solidFill>
-                      <a:srgbClr val="F1F5F9"/>
-                    </a:solidFill>
-                  </a:tcPr>
+                  <a:tcPr marL="63500" marR="63500" marT="25400" marB="25400" anchor="ctr"/>
                 </a:tc>
                 <a:tc>
                   <a:txBody>
@@ -11174,13 +11985,10 @@
                         <a:buNone/>
                       </a:pPr>
                       <a:r>
-                        <a:rPr lang="en-US" sz="1800" b="1" i="0" u="none" strike="noStrike" cap="none">
+                        <a:rPr lang="en-US" sz="1800" b="1" u="none" strike="noStrike" cap="none">
                           <a:solidFill>
                             <a:srgbClr val="003366"/>
                           </a:solidFill>
-                          <a:latin typeface="Helvetica Neue"/>
-                          <a:ea typeface="Helvetica Neue"/>
-                          <a:cs typeface="Helvetica Neue"/>
                           <a:sym typeface="Helvetica Neue"/>
                         </a:rPr>
                         <a:t>F1-Score</a:t>
@@ -11188,55 +11996,7 @@
                       <a:endParaRPr sz="2000"/>
                     </a:p>
                   </a:txBody>
-                  <a:tcPr marL="63500" marR="63500" marT="25400" marB="25400" anchor="ctr">
-                    <a:lnL w="9525" cap="flat" cmpd="sng">
-                      <a:solidFill>
-                        <a:srgbClr val="000000">
-                          <a:alpha val="0"/>
-                        </a:srgbClr>
-                      </a:solidFill>
-                      <a:prstDash val="solid"/>
-                      <a:round/>
-                      <a:headEnd type="none" w="sm" len="sm"/>
-                      <a:tailEnd type="none" w="sm" len="sm"/>
-                    </a:lnL>
-                    <a:lnR w="9525" cap="flat" cmpd="sng">
-                      <a:solidFill>
-                        <a:srgbClr val="000000">
-                          <a:alpha val="0"/>
-                        </a:srgbClr>
-                      </a:solidFill>
-                      <a:prstDash val="solid"/>
-                      <a:round/>
-                      <a:headEnd type="none" w="sm" len="sm"/>
-                      <a:tailEnd type="none" w="sm" len="sm"/>
-                    </a:lnR>
-                    <a:lnT w="9525" cap="flat" cmpd="sng">
-                      <a:solidFill>
-                        <a:srgbClr val="000000">
-                          <a:alpha val="0"/>
-                        </a:srgbClr>
-                      </a:solidFill>
-                      <a:prstDash val="solid"/>
-                      <a:round/>
-                      <a:headEnd type="none" w="sm" len="sm"/>
-                      <a:tailEnd type="none" w="sm" len="sm"/>
-                    </a:lnT>
-                    <a:lnB w="9525" cap="flat" cmpd="sng">
-                      <a:solidFill>
-                        <a:srgbClr val="000000">
-                          <a:alpha val="0"/>
-                        </a:srgbClr>
-                      </a:solidFill>
-                      <a:prstDash val="solid"/>
-                      <a:round/>
-                      <a:headEnd type="none" w="sm" len="sm"/>
-                      <a:tailEnd type="none" w="sm" len="sm"/>
-                    </a:lnB>
-                    <a:solidFill>
-                      <a:srgbClr val="F1F5F9"/>
-                    </a:solidFill>
-                  </a:tcPr>
+                  <a:tcPr marL="63500" marR="63500" marT="25400" marB="25400" anchor="ctr"/>
                 </a:tc>
                 <a:tc>
                   <a:txBody>
@@ -11253,13 +12013,10 @@
                         <a:buNone/>
                       </a:pPr>
                       <a:r>
-                        <a:rPr lang="en-US" sz="1800" b="1" i="0" u="none" strike="noStrike" cap="none">
+                        <a:rPr lang="en-US" sz="1800" b="1" u="none" strike="noStrike" cap="none">
                           <a:solidFill>
                             <a:srgbClr val="003366"/>
                           </a:solidFill>
-                          <a:latin typeface="Helvetica Neue"/>
-                          <a:ea typeface="Helvetica Neue"/>
-                          <a:cs typeface="Helvetica Neue"/>
                           <a:sym typeface="Helvetica Neue"/>
                         </a:rPr>
                         <a:t>ROC-AUC</a:t>
@@ -11267,55 +12024,7 @@
                       <a:endParaRPr sz="2000"/>
                     </a:p>
                   </a:txBody>
-                  <a:tcPr marL="63500" marR="63500" marT="25400" marB="25400" anchor="ctr">
-                    <a:lnL w="9525" cap="flat" cmpd="sng">
-                      <a:solidFill>
-                        <a:srgbClr val="000000">
-                          <a:alpha val="0"/>
-                        </a:srgbClr>
-                      </a:solidFill>
-                      <a:prstDash val="solid"/>
-                      <a:round/>
-                      <a:headEnd type="none" w="sm" len="sm"/>
-                      <a:tailEnd type="none" w="sm" len="sm"/>
-                    </a:lnL>
-                    <a:lnR w="9525" cap="flat" cmpd="sng">
-                      <a:solidFill>
-                        <a:srgbClr val="000000">
-                          <a:alpha val="0"/>
-                        </a:srgbClr>
-                      </a:solidFill>
-                      <a:prstDash val="solid"/>
-                      <a:round/>
-                      <a:headEnd type="none" w="sm" len="sm"/>
-                      <a:tailEnd type="none" w="sm" len="sm"/>
-                    </a:lnR>
-                    <a:lnT w="9525" cap="flat" cmpd="sng">
-                      <a:solidFill>
-                        <a:srgbClr val="000000">
-                          <a:alpha val="0"/>
-                        </a:srgbClr>
-                      </a:solidFill>
-                      <a:prstDash val="solid"/>
-                      <a:round/>
-                      <a:headEnd type="none" w="sm" len="sm"/>
-                      <a:tailEnd type="none" w="sm" len="sm"/>
-                    </a:lnT>
-                    <a:lnB w="9525" cap="flat" cmpd="sng">
-                      <a:solidFill>
-                        <a:srgbClr val="000000">
-                          <a:alpha val="0"/>
-                        </a:srgbClr>
-                      </a:solidFill>
-                      <a:prstDash val="solid"/>
-                      <a:round/>
-                      <a:headEnd type="none" w="sm" len="sm"/>
-                      <a:tailEnd type="none" w="sm" len="sm"/>
-                    </a:lnB>
-                    <a:solidFill>
-                      <a:srgbClr val="F1F5F9"/>
-                    </a:solidFill>
-                  </a:tcPr>
+                  <a:tcPr marL="63500" marR="63500" marT="25400" marB="25400" anchor="ctr"/>
                 </a:tc>
                 <a:extLst>
                   <a:ext uri="{0D108BD9-81ED-4DB2-BD59-A6C34878D82A}">
@@ -11339,13 +12048,10 @@
                         <a:buNone/>
                       </a:pPr>
                       <a:r>
-                        <a:rPr lang="en-US" sz="1800" b="0" i="0" u="none" strike="noStrike" cap="none" dirty="0" err="1">
+                        <a:rPr lang="en-US" sz="1800" b="0" u="none" strike="noStrike" cap="none" dirty="0" err="1">
                           <a:solidFill>
                             <a:srgbClr val="333333"/>
                           </a:solidFill>
-                          <a:latin typeface="Helvetica Neue"/>
-                          <a:ea typeface="Helvetica Neue"/>
-                          <a:cs typeface="Helvetica Neue"/>
                           <a:sym typeface="Helvetica Neue"/>
                         </a:rPr>
                         <a:t>XGBoost</a:t>
@@ -11353,52 +12059,7 @@
                       <a:endParaRPr sz="2000" dirty="0"/>
                     </a:p>
                   </a:txBody>
-                  <a:tcPr marL="63500" marR="63500" marT="25400" marB="25400" anchor="ctr">
-                    <a:lnL w="9525" cap="flat" cmpd="sng">
-                      <a:solidFill>
-                        <a:srgbClr val="000000">
-                          <a:alpha val="0"/>
-                        </a:srgbClr>
-                      </a:solidFill>
-                      <a:prstDash val="solid"/>
-                      <a:round/>
-                      <a:headEnd type="none" w="sm" len="sm"/>
-                      <a:tailEnd type="none" w="sm" len="sm"/>
-                    </a:lnL>
-                    <a:lnR w="9525" cap="flat" cmpd="sng">
-                      <a:solidFill>
-                        <a:srgbClr val="000000">
-                          <a:alpha val="0"/>
-                        </a:srgbClr>
-                      </a:solidFill>
-                      <a:prstDash val="solid"/>
-                      <a:round/>
-                      <a:headEnd type="none" w="sm" len="sm"/>
-                      <a:tailEnd type="none" w="sm" len="sm"/>
-                    </a:lnR>
-                    <a:lnT w="9525" cap="flat" cmpd="sng">
-                      <a:solidFill>
-                        <a:srgbClr val="000000">
-                          <a:alpha val="0"/>
-                        </a:srgbClr>
-                      </a:solidFill>
-                      <a:prstDash val="solid"/>
-                      <a:round/>
-                      <a:headEnd type="none" w="sm" len="sm"/>
-                      <a:tailEnd type="none" w="sm" len="sm"/>
-                    </a:lnT>
-                    <a:lnB w="9525" cap="flat" cmpd="sng">
-                      <a:solidFill>
-                        <a:srgbClr val="000000">
-                          <a:alpha val="0"/>
-                        </a:srgbClr>
-                      </a:solidFill>
-                      <a:prstDash val="solid"/>
-                      <a:round/>
-                      <a:headEnd type="none" w="sm" len="sm"/>
-                      <a:tailEnd type="none" w="sm" len="sm"/>
-                    </a:lnB>
-                  </a:tcPr>
+                  <a:tcPr marL="63500" marR="63500" marT="25400" marB="25400" anchor="ctr"/>
                 </a:tc>
                 <a:tc>
                   <a:txBody>
@@ -11415,13 +12076,10 @@
                         <a:buNone/>
                       </a:pPr>
                       <a:r>
-                        <a:rPr lang="en-US" sz="1800" b="0" i="0" u="none" strike="noStrike" cap="none" dirty="0">
+                        <a:rPr lang="en-US" sz="1800" b="0" u="none" strike="noStrike" cap="none" dirty="0">
                           <a:solidFill>
                             <a:srgbClr val="333333"/>
                           </a:solidFill>
-                          <a:latin typeface="Helvetica Neue"/>
-                          <a:ea typeface="Helvetica Neue"/>
-                          <a:cs typeface="Helvetica Neue"/>
                           <a:sym typeface="Helvetica Neue"/>
                         </a:rPr>
                         <a:t>Traditional ML (Sup)</a:t>
@@ -11429,52 +12087,7 @@
                       <a:endParaRPr sz="2000" dirty="0"/>
                     </a:p>
                   </a:txBody>
-                  <a:tcPr marL="63500" marR="63500" marT="25400" marB="25400" anchor="ctr">
-                    <a:lnL w="9525" cap="flat" cmpd="sng">
-                      <a:solidFill>
-                        <a:srgbClr val="000000">
-                          <a:alpha val="0"/>
-                        </a:srgbClr>
-                      </a:solidFill>
-                      <a:prstDash val="solid"/>
-                      <a:round/>
-                      <a:headEnd type="none" w="sm" len="sm"/>
-                      <a:tailEnd type="none" w="sm" len="sm"/>
-                    </a:lnL>
-                    <a:lnR w="9525" cap="flat" cmpd="sng">
-                      <a:solidFill>
-                        <a:srgbClr val="000000">
-                          <a:alpha val="0"/>
-                        </a:srgbClr>
-                      </a:solidFill>
-                      <a:prstDash val="solid"/>
-                      <a:round/>
-                      <a:headEnd type="none" w="sm" len="sm"/>
-                      <a:tailEnd type="none" w="sm" len="sm"/>
-                    </a:lnR>
-                    <a:lnT w="9525" cap="flat" cmpd="sng">
-                      <a:solidFill>
-                        <a:srgbClr val="000000">
-                          <a:alpha val="0"/>
-                        </a:srgbClr>
-                      </a:solidFill>
-                      <a:prstDash val="solid"/>
-                      <a:round/>
-                      <a:headEnd type="none" w="sm" len="sm"/>
-                      <a:tailEnd type="none" w="sm" len="sm"/>
-                    </a:lnT>
-                    <a:lnB w="9525" cap="flat" cmpd="sng">
-                      <a:solidFill>
-                        <a:srgbClr val="000000">
-                          <a:alpha val="0"/>
-                        </a:srgbClr>
-                      </a:solidFill>
-                      <a:prstDash val="solid"/>
-                      <a:round/>
-                      <a:headEnd type="none" w="sm" len="sm"/>
-                      <a:tailEnd type="none" w="sm" len="sm"/>
-                    </a:lnB>
-                  </a:tcPr>
+                  <a:tcPr marL="63500" marR="63500" marT="25400" marB="25400" anchor="ctr"/>
                 </a:tc>
                 <a:tc>
                   <a:txBody>
@@ -11491,13 +12104,10 @@
                         <a:buNone/>
                       </a:pPr>
                       <a:r>
-                        <a:rPr lang="en-US" sz="1800" b="0" i="0" u="none" strike="noStrike" cap="none">
+                        <a:rPr lang="en-US" sz="1800" b="0" u="none" strike="noStrike" cap="none">
                           <a:solidFill>
                             <a:srgbClr val="333333"/>
                           </a:solidFill>
-                          <a:latin typeface="Helvetica Neue"/>
-                          <a:ea typeface="Helvetica Neue"/>
-                          <a:cs typeface="Helvetica Neue"/>
                           <a:sym typeface="Helvetica Neue"/>
                         </a:rPr>
                         <a:t>99.85%</a:t>
@@ -11505,52 +12115,7 @@
                       <a:endParaRPr sz="2000"/>
                     </a:p>
                   </a:txBody>
-                  <a:tcPr marL="63500" marR="63500" marT="25400" marB="25400" anchor="ctr">
-                    <a:lnL w="9525" cap="flat" cmpd="sng">
-                      <a:solidFill>
-                        <a:srgbClr val="000000">
-                          <a:alpha val="0"/>
-                        </a:srgbClr>
-                      </a:solidFill>
-                      <a:prstDash val="solid"/>
-                      <a:round/>
-                      <a:headEnd type="none" w="sm" len="sm"/>
-                      <a:tailEnd type="none" w="sm" len="sm"/>
-                    </a:lnL>
-                    <a:lnR w="9525" cap="flat" cmpd="sng">
-                      <a:solidFill>
-                        <a:srgbClr val="000000">
-                          <a:alpha val="0"/>
-                        </a:srgbClr>
-                      </a:solidFill>
-                      <a:prstDash val="solid"/>
-                      <a:round/>
-                      <a:headEnd type="none" w="sm" len="sm"/>
-                      <a:tailEnd type="none" w="sm" len="sm"/>
-                    </a:lnR>
-                    <a:lnT w="9525" cap="flat" cmpd="sng">
-                      <a:solidFill>
-                        <a:srgbClr val="000000">
-                          <a:alpha val="0"/>
-                        </a:srgbClr>
-                      </a:solidFill>
-                      <a:prstDash val="solid"/>
-                      <a:round/>
-                      <a:headEnd type="none" w="sm" len="sm"/>
-                      <a:tailEnd type="none" w="sm" len="sm"/>
-                    </a:lnT>
-                    <a:lnB w="9525" cap="flat" cmpd="sng">
-                      <a:solidFill>
-                        <a:srgbClr val="000000">
-                          <a:alpha val="0"/>
-                        </a:srgbClr>
-                      </a:solidFill>
-                      <a:prstDash val="solid"/>
-                      <a:round/>
-                      <a:headEnd type="none" w="sm" len="sm"/>
-                      <a:tailEnd type="none" w="sm" len="sm"/>
-                    </a:lnB>
-                  </a:tcPr>
+                  <a:tcPr marL="63500" marR="63500" marT="25400" marB="25400" anchor="ctr"/>
                 </a:tc>
                 <a:tc>
                   <a:txBody>
@@ -11567,13 +12132,10 @@
                         <a:buNone/>
                       </a:pPr>
                       <a:r>
-                        <a:rPr lang="en-US" sz="1800" b="0" i="0" u="none" strike="noStrike" cap="none">
+                        <a:rPr lang="en-US" sz="1800" b="0" u="none" strike="noStrike" cap="none">
                           <a:solidFill>
                             <a:srgbClr val="333333"/>
                           </a:solidFill>
-                          <a:latin typeface="Helvetica Neue"/>
-                          <a:ea typeface="Helvetica Neue"/>
-                          <a:cs typeface="Helvetica Neue"/>
                           <a:sym typeface="Helvetica Neue"/>
                         </a:rPr>
                         <a:t>99.97%</a:t>
@@ -11581,52 +12143,7 @@
                       <a:endParaRPr sz="2000"/>
                     </a:p>
                   </a:txBody>
-                  <a:tcPr marL="63500" marR="63500" marT="25400" marB="25400" anchor="ctr">
-                    <a:lnL w="9525" cap="flat" cmpd="sng">
-                      <a:solidFill>
-                        <a:srgbClr val="000000">
-                          <a:alpha val="0"/>
-                        </a:srgbClr>
-                      </a:solidFill>
-                      <a:prstDash val="solid"/>
-                      <a:round/>
-                      <a:headEnd type="none" w="sm" len="sm"/>
-                      <a:tailEnd type="none" w="sm" len="sm"/>
-                    </a:lnL>
-                    <a:lnR w="9525" cap="flat" cmpd="sng">
-                      <a:solidFill>
-                        <a:srgbClr val="000000">
-                          <a:alpha val="0"/>
-                        </a:srgbClr>
-                      </a:solidFill>
-                      <a:prstDash val="solid"/>
-                      <a:round/>
-                      <a:headEnd type="none" w="sm" len="sm"/>
-                      <a:tailEnd type="none" w="sm" len="sm"/>
-                    </a:lnR>
-                    <a:lnT w="9525" cap="flat" cmpd="sng">
-                      <a:solidFill>
-                        <a:srgbClr val="000000">
-                          <a:alpha val="0"/>
-                        </a:srgbClr>
-                      </a:solidFill>
-                      <a:prstDash val="solid"/>
-                      <a:round/>
-                      <a:headEnd type="none" w="sm" len="sm"/>
-                      <a:tailEnd type="none" w="sm" len="sm"/>
-                    </a:lnT>
-                    <a:lnB w="9525" cap="flat" cmpd="sng">
-                      <a:solidFill>
-                        <a:srgbClr val="000000">
-                          <a:alpha val="0"/>
-                        </a:srgbClr>
-                      </a:solidFill>
-                      <a:prstDash val="solid"/>
-                      <a:round/>
-                      <a:headEnd type="none" w="sm" len="sm"/>
-                      <a:tailEnd type="none" w="sm" len="sm"/>
-                    </a:lnB>
-                  </a:tcPr>
+                  <a:tcPr marL="63500" marR="63500" marT="25400" marB="25400" anchor="ctr"/>
                 </a:tc>
                 <a:tc>
                   <a:txBody>
@@ -11643,13 +12160,10 @@
                         <a:buNone/>
                       </a:pPr>
                       <a:r>
-                        <a:rPr lang="en-US" sz="1800" b="1" i="0" u="none" strike="noStrike" cap="none" dirty="0">
+                        <a:rPr lang="en-US" sz="1800" b="1" u="none" strike="noStrike" cap="none" dirty="0">
                           <a:solidFill>
                             <a:srgbClr val="333333"/>
                           </a:solidFill>
-                          <a:latin typeface="Helvetica Neue"/>
-                          <a:ea typeface="Helvetica Neue"/>
-                          <a:cs typeface="Helvetica Neue"/>
                           <a:sym typeface="Helvetica Neue"/>
                         </a:rPr>
                         <a:t>99.91%</a:t>
@@ -11657,52 +12171,7 @@
                       <a:endParaRPr sz="2000" dirty="0"/>
                     </a:p>
                   </a:txBody>
-                  <a:tcPr marL="63500" marR="63500" marT="25400" marB="25400" anchor="ctr">
-                    <a:lnL w="9525" cap="flat" cmpd="sng">
-                      <a:solidFill>
-                        <a:srgbClr val="000000">
-                          <a:alpha val="0"/>
-                        </a:srgbClr>
-                      </a:solidFill>
-                      <a:prstDash val="solid"/>
-                      <a:round/>
-                      <a:headEnd type="none" w="sm" len="sm"/>
-                      <a:tailEnd type="none" w="sm" len="sm"/>
-                    </a:lnL>
-                    <a:lnR w="9525" cap="flat" cmpd="sng">
-                      <a:solidFill>
-                        <a:srgbClr val="000000">
-                          <a:alpha val="0"/>
-                        </a:srgbClr>
-                      </a:solidFill>
-                      <a:prstDash val="solid"/>
-                      <a:round/>
-                      <a:headEnd type="none" w="sm" len="sm"/>
-                      <a:tailEnd type="none" w="sm" len="sm"/>
-                    </a:lnR>
-                    <a:lnT w="9525" cap="flat" cmpd="sng">
-                      <a:solidFill>
-                        <a:srgbClr val="000000">
-                          <a:alpha val="0"/>
-                        </a:srgbClr>
-                      </a:solidFill>
-                      <a:prstDash val="solid"/>
-                      <a:round/>
-                      <a:headEnd type="none" w="sm" len="sm"/>
-                      <a:tailEnd type="none" w="sm" len="sm"/>
-                    </a:lnT>
-                    <a:lnB w="9525" cap="flat" cmpd="sng">
-                      <a:solidFill>
-                        <a:srgbClr val="000000">
-                          <a:alpha val="0"/>
-                        </a:srgbClr>
-                      </a:solidFill>
-                      <a:prstDash val="solid"/>
-                      <a:round/>
-                      <a:headEnd type="none" w="sm" len="sm"/>
-                      <a:tailEnd type="none" w="sm" len="sm"/>
-                    </a:lnB>
-                  </a:tcPr>
+                  <a:tcPr marL="63500" marR="63500" marT="25400" marB="25400" anchor="ctr"/>
                 </a:tc>
                 <a:tc>
                   <a:txBody>
@@ -11719,13 +12188,10 @@
                         <a:buNone/>
                       </a:pPr>
                       <a:r>
-                        <a:rPr lang="en-US" sz="1800" b="0" i="0" u="none" strike="noStrike" cap="none">
+                        <a:rPr lang="en-US" sz="1800" b="0" u="none" strike="noStrike" cap="none">
                           <a:solidFill>
                             <a:srgbClr val="333333"/>
                           </a:solidFill>
-                          <a:latin typeface="Helvetica Neue"/>
-                          <a:ea typeface="Helvetica Neue"/>
-                          <a:cs typeface="Helvetica Neue"/>
                           <a:sym typeface="Helvetica Neue"/>
                         </a:rPr>
                         <a:t>--</a:t>
@@ -11733,52 +12199,7 @@
                       <a:endParaRPr sz="2000"/>
                     </a:p>
                   </a:txBody>
-                  <a:tcPr marL="63500" marR="63500" marT="25400" marB="25400" anchor="ctr">
-                    <a:lnL w="9525" cap="flat" cmpd="sng">
-                      <a:solidFill>
-                        <a:srgbClr val="000000">
-                          <a:alpha val="0"/>
-                        </a:srgbClr>
-                      </a:solidFill>
-                      <a:prstDash val="solid"/>
-                      <a:round/>
-                      <a:headEnd type="none" w="sm" len="sm"/>
-                      <a:tailEnd type="none" w="sm" len="sm"/>
-                    </a:lnL>
-                    <a:lnR w="9525" cap="flat" cmpd="sng">
-                      <a:solidFill>
-                        <a:srgbClr val="000000">
-                          <a:alpha val="0"/>
-                        </a:srgbClr>
-                      </a:solidFill>
-                      <a:prstDash val="solid"/>
-                      <a:round/>
-                      <a:headEnd type="none" w="sm" len="sm"/>
-                      <a:tailEnd type="none" w="sm" len="sm"/>
-                    </a:lnR>
-                    <a:lnT w="9525" cap="flat" cmpd="sng">
-                      <a:solidFill>
-                        <a:srgbClr val="000000">
-                          <a:alpha val="0"/>
-                        </a:srgbClr>
-                      </a:solidFill>
-                      <a:prstDash val="solid"/>
-                      <a:round/>
-                      <a:headEnd type="none" w="sm" len="sm"/>
-                      <a:tailEnd type="none" w="sm" len="sm"/>
-                    </a:lnT>
-                    <a:lnB w="9525" cap="flat" cmpd="sng">
-                      <a:solidFill>
-                        <a:srgbClr val="000000">
-                          <a:alpha val="0"/>
-                        </a:srgbClr>
-                      </a:solidFill>
-                      <a:prstDash val="solid"/>
-                      <a:round/>
-                      <a:headEnd type="none" w="sm" len="sm"/>
-                      <a:tailEnd type="none" w="sm" len="sm"/>
-                    </a:lnB>
-                  </a:tcPr>
+                  <a:tcPr marL="63500" marR="63500" marT="25400" marB="25400" anchor="ctr"/>
                 </a:tc>
                 <a:extLst>
                   <a:ext uri="{0D108BD9-81ED-4DB2-BD59-A6C34878D82A}">
@@ -11802,13 +12223,10 @@
                         <a:buNone/>
                       </a:pPr>
                       <a:r>
-                        <a:rPr lang="en-US" sz="2000" b="0" i="0" u="none" strike="noStrike" cap="none" dirty="0">
+                        <a:rPr lang="en-US" sz="2000" b="0" u="none" strike="noStrike" cap="none" dirty="0">
                           <a:solidFill>
                             <a:srgbClr val="333333"/>
                           </a:solidFill>
-                          <a:latin typeface="Helvetica Neue"/>
-                          <a:ea typeface="Helvetica Neue"/>
-                          <a:cs typeface="Helvetica Neue"/>
                           <a:sym typeface="Helvetica Neue"/>
                         </a:rPr>
                         <a:t>SVM</a:t>
@@ -11816,52 +12234,7 @@
                       <a:endParaRPr sz="2000" dirty="0"/>
                     </a:p>
                   </a:txBody>
-                  <a:tcPr marL="63500" marR="63500" marT="25400" marB="25400" anchor="ctr">
-                    <a:lnL w="9525" cap="flat" cmpd="sng">
-                      <a:solidFill>
-                        <a:srgbClr val="000000">
-                          <a:alpha val="0"/>
-                        </a:srgbClr>
-                      </a:solidFill>
-                      <a:prstDash val="solid"/>
-                      <a:round/>
-                      <a:headEnd type="none" w="sm" len="sm"/>
-                      <a:tailEnd type="none" w="sm" len="sm"/>
-                    </a:lnL>
-                    <a:lnR w="9525" cap="flat" cmpd="sng">
-                      <a:solidFill>
-                        <a:srgbClr val="000000">
-                          <a:alpha val="0"/>
-                        </a:srgbClr>
-                      </a:solidFill>
-                      <a:prstDash val="solid"/>
-                      <a:round/>
-                      <a:headEnd type="none" w="sm" len="sm"/>
-                      <a:tailEnd type="none" w="sm" len="sm"/>
-                    </a:lnR>
-                    <a:lnT w="9525" cap="flat" cmpd="sng">
-                      <a:solidFill>
-                        <a:srgbClr val="000000">
-                          <a:alpha val="0"/>
-                        </a:srgbClr>
-                      </a:solidFill>
-                      <a:prstDash val="solid"/>
-                      <a:round/>
-                      <a:headEnd type="none" w="sm" len="sm"/>
-                      <a:tailEnd type="none" w="sm" len="sm"/>
-                    </a:lnT>
-                    <a:lnB w="9525" cap="flat" cmpd="sng">
-                      <a:solidFill>
-                        <a:srgbClr val="000000">
-                          <a:alpha val="0"/>
-                        </a:srgbClr>
-                      </a:solidFill>
-                      <a:prstDash val="solid"/>
-                      <a:round/>
-                      <a:headEnd type="none" w="sm" len="sm"/>
-                      <a:tailEnd type="none" w="sm" len="sm"/>
-                    </a:lnB>
-                  </a:tcPr>
+                  <a:tcPr marL="63500" marR="63500" marT="25400" marB="25400" anchor="ctr"/>
                 </a:tc>
                 <a:tc>
                   <a:txBody>
@@ -11878,13 +12251,10 @@
                         <a:buNone/>
                       </a:pPr>
                       <a:r>
-                        <a:rPr lang="en-US" sz="1800" b="0" i="0" u="none" strike="noStrike" cap="none" dirty="0">
+                        <a:rPr lang="en-US" sz="1800" b="0" u="none" strike="noStrike" cap="none" dirty="0">
                           <a:solidFill>
                             <a:srgbClr val="333333"/>
                           </a:solidFill>
-                          <a:latin typeface="Helvetica Neue"/>
-                          <a:ea typeface="Helvetica Neue"/>
-                          <a:cs typeface="Helvetica Neue"/>
                           <a:sym typeface="Helvetica Neue"/>
                         </a:rPr>
                         <a:t>Traditional ML (Sup)</a:t>
@@ -11892,52 +12262,7 @@
                       <a:endParaRPr sz="2000" dirty="0"/>
                     </a:p>
                   </a:txBody>
-                  <a:tcPr marL="63500" marR="63500" marT="25400" marB="25400" anchor="ctr">
-                    <a:lnL w="9525" cap="flat" cmpd="sng">
-                      <a:solidFill>
-                        <a:srgbClr val="000000">
-                          <a:alpha val="0"/>
-                        </a:srgbClr>
-                      </a:solidFill>
-                      <a:prstDash val="solid"/>
-                      <a:round/>
-                      <a:headEnd type="none" w="sm" len="sm"/>
-                      <a:tailEnd type="none" w="sm" len="sm"/>
-                    </a:lnL>
-                    <a:lnR w="9525" cap="flat" cmpd="sng">
-                      <a:solidFill>
-                        <a:srgbClr val="000000">
-                          <a:alpha val="0"/>
-                        </a:srgbClr>
-                      </a:solidFill>
-                      <a:prstDash val="solid"/>
-                      <a:round/>
-                      <a:headEnd type="none" w="sm" len="sm"/>
-                      <a:tailEnd type="none" w="sm" len="sm"/>
-                    </a:lnR>
-                    <a:lnT w="9525" cap="flat" cmpd="sng">
-                      <a:solidFill>
-                        <a:srgbClr val="000000">
-                          <a:alpha val="0"/>
-                        </a:srgbClr>
-                      </a:solidFill>
-                      <a:prstDash val="solid"/>
-                      <a:round/>
-                      <a:headEnd type="none" w="sm" len="sm"/>
-                      <a:tailEnd type="none" w="sm" len="sm"/>
-                    </a:lnT>
-                    <a:lnB w="9525" cap="flat" cmpd="sng">
-                      <a:solidFill>
-                        <a:srgbClr val="000000">
-                          <a:alpha val="0"/>
-                        </a:srgbClr>
-                      </a:solidFill>
-                      <a:prstDash val="solid"/>
-                      <a:round/>
-                      <a:headEnd type="none" w="sm" len="sm"/>
-                      <a:tailEnd type="none" w="sm" len="sm"/>
-                    </a:lnB>
-                  </a:tcPr>
+                  <a:tcPr marL="63500" marR="63500" marT="25400" marB="25400" anchor="ctr"/>
                 </a:tc>
                 <a:tc>
                   <a:txBody>
@@ -11954,13 +12279,10 @@
                         <a:buNone/>
                       </a:pPr>
                       <a:r>
-                        <a:rPr lang="en-US" sz="1800" b="0" i="0" u="none" strike="noStrike" cap="none" dirty="0">
+                        <a:rPr lang="en-US" sz="1800" b="0" u="none" strike="noStrike" cap="none" dirty="0">
                           <a:solidFill>
                             <a:srgbClr val="333333"/>
                           </a:solidFill>
-                          <a:latin typeface="Helvetica Neue"/>
-                          <a:ea typeface="Helvetica Neue"/>
-                          <a:cs typeface="Helvetica Neue"/>
                           <a:sym typeface="Helvetica Neue"/>
                         </a:rPr>
                         <a:t>96.34%</a:t>
@@ -11968,52 +12290,7 @@
                       <a:endParaRPr sz="2000" dirty="0"/>
                     </a:p>
                   </a:txBody>
-                  <a:tcPr marL="63500" marR="63500" marT="25400" marB="25400" anchor="ctr">
-                    <a:lnL w="9525" cap="flat" cmpd="sng">
-                      <a:solidFill>
-                        <a:srgbClr val="000000">
-                          <a:alpha val="0"/>
-                        </a:srgbClr>
-                      </a:solidFill>
-                      <a:prstDash val="solid"/>
-                      <a:round/>
-                      <a:headEnd type="none" w="sm" len="sm"/>
-                      <a:tailEnd type="none" w="sm" len="sm"/>
-                    </a:lnL>
-                    <a:lnR w="9525" cap="flat" cmpd="sng">
-                      <a:solidFill>
-                        <a:srgbClr val="000000">
-                          <a:alpha val="0"/>
-                        </a:srgbClr>
-                      </a:solidFill>
-                      <a:prstDash val="solid"/>
-                      <a:round/>
-                      <a:headEnd type="none" w="sm" len="sm"/>
-                      <a:tailEnd type="none" w="sm" len="sm"/>
-                    </a:lnR>
-                    <a:lnT w="9525" cap="flat" cmpd="sng">
-                      <a:solidFill>
-                        <a:srgbClr val="000000">
-                          <a:alpha val="0"/>
-                        </a:srgbClr>
-                      </a:solidFill>
-                      <a:prstDash val="solid"/>
-                      <a:round/>
-                      <a:headEnd type="none" w="sm" len="sm"/>
-                      <a:tailEnd type="none" w="sm" len="sm"/>
-                    </a:lnT>
-                    <a:lnB w="9525" cap="flat" cmpd="sng">
-                      <a:solidFill>
-                        <a:srgbClr val="000000">
-                          <a:alpha val="0"/>
-                        </a:srgbClr>
-                      </a:solidFill>
-                      <a:prstDash val="solid"/>
-                      <a:round/>
-                      <a:headEnd type="none" w="sm" len="sm"/>
-                      <a:tailEnd type="none" w="sm" len="sm"/>
-                    </a:lnB>
-                  </a:tcPr>
+                  <a:tcPr marL="63500" marR="63500" marT="25400" marB="25400" anchor="ctr"/>
                 </a:tc>
                 <a:tc>
                   <a:txBody>
@@ -12030,13 +12307,10 @@
                         <a:buNone/>
                       </a:pPr>
                       <a:r>
-                        <a:rPr lang="en-US" sz="1800" b="0" i="0" u="none" strike="noStrike" cap="none" dirty="0">
+                        <a:rPr lang="en-US" sz="1800" b="0" u="none" strike="noStrike" cap="none" dirty="0">
                           <a:solidFill>
                             <a:srgbClr val="333333"/>
                           </a:solidFill>
-                          <a:latin typeface="Helvetica Neue"/>
-                          <a:ea typeface="Helvetica Neue"/>
-                          <a:cs typeface="Helvetica Neue"/>
                           <a:sym typeface="Helvetica Neue"/>
                         </a:rPr>
                         <a:t>99.94%</a:t>
@@ -12044,52 +12318,7 @@
                       <a:endParaRPr sz="2000" dirty="0"/>
                     </a:p>
                   </a:txBody>
-                  <a:tcPr marL="63500" marR="63500" marT="25400" marB="25400" anchor="ctr">
-                    <a:lnL w="9525" cap="flat" cmpd="sng">
-                      <a:solidFill>
-                        <a:srgbClr val="000000">
-                          <a:alpha val="0"/>
-                        </a:srgbClr>
-                      </a:solidFill>
-                      <a:prstDash val="solid"/>
-                      <a:round/>
-                      <a:headEnd type="none" w="sm" len="sm"/>
-                      <a:tailEnd type="none" w="sm" len="sm"/>
-                    </a:lnL>
-                    <a:lnR w="9525" cap="flat" cmpd="sng">
-                      <a:solidFill>
-                        <a:srgbClr val="000000">
-                          <a:alpha val="0"/>
-                        </a:srgbClr>
-                      </a:solidFill>
-                      <a:prstDash val="solid"/>
-                      <a:round/>
-                      <a:headEnd type="none" w="sm" len="sm"/>
-                      <a:tailEnd type="none" w="sm" len="sm"/>
-                    </a:lnR>
-                    <a:lnT w="9525" cap="flat" cmpd="sng">
-                      <a:solidFill>
-                        <a:srgbClr val="000000">
-                          <a:alpha val="0"/>
-                        </a:srgbClr>
-                      </a:solidFill>
-                      <a:prstDash val="solid"/>
-                      <a:round/>
-                      <a:headEnd type="none" w="sm" len="sm"/>
-                      <a:tailEnd type="none" w="sm" len="sm"/>
-                    </a:lnT>
-                    <a:lnB w="9525" cap="flat" cmpd="sng">
-                      <a:solidFill>
-                        <a:srgbClr val="000000">
-                          <a:alpha val="0"/>
-                        </a:srgbClr>
-                      </a:solidFill>
-                      <a:prstDash val="solid"/>
-                      <a:round/>
-                      <a:headEnd type="none" w="sm" len="sm"/>
-                      <a:tailEnd type="none" w="sm" len="sm"/>
-                    </a:lnB>
-                  </a:tcPr>
+                  <a:tcPr marL="63500" marR="63500" marT="25400" marB="25400" anchor="ctr"/>
                 </a:tc>
                 <a:tc>
                   <a:txBody>
@@ -12106,13 +12335,10 @@
                         <a:buNone/>
                       </a:pPr>
                       <a:r>
-                        <a:rPr lang="en-US" sz="1800" b="1" i="0" u="none" strike="noStrike" cap="none">
+                        <a:rPr lang="en-US" sz="1800" b="1" u="none" strike="noStrike" cap="none">
                           <a:solidFill>
                             <a:srgbClr val="333333"/>
                           </a:solidFill>
-                          <a:latin typeface="Helvetica Neue"/>
-                          <a:ea typeface="Helvetica Neue"/>
-                          <a:cs typeface="Helvetica Neue"/>
                           <a:sym typeface="Helvetica Neue"/>
                         </a:rPr>
                         <a:t>98.11%</a:t>
@@ -12120,52 +12346,7 @@
                       <a:endParaRPr sz="2000"/>
                     </a:p>
                   </a:txBody>
-                  <a:tcPr marL="63500" marR="63500" marT="25400" marB="25400" anchor="ctr">
-                    <a:lnL w="9525" cap="flat" cmpd="sng">
-                      <a:solidFill>
-                        <a:srgbClr val="000000">
-                          <a:alpha val="0"/>
-                        </a:srgbClr>
-                      </a:solidFill>
-                      <a:prstDash val="solid"/>
-                      <a:round/>
-                      <a:headEnd type="none" w="sm" len="sm"/>
-                      <a:tailEnd type="none" w="sm" len="sm"/>
-                    </a:lnL>
-                    <a:lnR w="9525" cap="flat" cmpd="sng">
-                      <a:solidFill>
-                        <a:srgbClr val="000000">
-                          <a:alpha val="0"/>
-                        </a:srgbClr>
-                      </a:solidFill>
-                      <a:prstDash val="solid"/>
-                      <a:round/>
-                      <a:headEnd type="none" w="sm" len="sm"/>
-                      <a:tailEnd type="none" w="sm" len="sm"/>
-                    </a:lnR>
-                    <a:lnT w="9525" cap="flat" cmpd="sng">
-                      <a:solidFill>
-                        <a:srgbClr val="000000">
-                          <a:alpha val="0"/>
-                        </a:srgbClr>
-                      </a:solidFill>
-                      <a:prstDash val="solid"/>
-                      <a:round/>
-                      <a:headEnd type="none" w="sm" len="sm"/>
-                      <a:tailEnd type="none" w="sm" len="sm"/>
-                    </a:lnT>
-                    <a:lnB w="9525" cap="flat" cmpd="sng">
-                      <a:solidFill>
-                        <a:srgbClr val="000000">
-                          <a:alpha val="0"/>
-                        </a:srgbClr>
-                      </a:solidFill>
-                      <a:prstDash val="solid"/>
-                      <a:round/>
-                      <a:headEnd type="none" w="sm" len="sm"/>
-                      <a:tailEnd type="none" w="sm" len="sm"/>
-                    </a:lnB>
-                  </a:tcPr>
+                  <a:tcPr marL="63500" marR="63500" marT="25400" marB="25400" anchor="ctr"/>
                 </a:tc>
                 <a:tc>
                   <a:txBody>
@@ -12182,13 +12363,10 @@
                         <a:buNone/>
                       </a:pPr>
                       <a:r>
-                        <a:rPr lang="en-US" sz="1800" b="0" i="0" u="none" strike="noStrike" cap="none">
+                        <a:rPr lang="en-US" sz="1800" b="0" u="none" strike="noStrike" cap="none">
                           <a:solidFill>
                             <a:srgbClr val="333333"/>
                           </a:solidFill>
-                          <a:latin typeface="Helvetica Neue"/>
-                          <a:ea typeface="Helvetica Neue"/>
-                          <a:cs typeface="Helvetica Neue"/>
                           <a:sym typeface="Helvetica Neue"/>
                         </a:rPr>
                         <a:t>--</a:t>
@@ -12196,52 +12374,7 @@
                       <a:endParaRPr sz="2000"/>
                     </a:p>
                   </a:txBody>
-                  <a:tcPr marL="63500" marR="63500" marT="25400" marB="25400" anchor="ctr">
-                    <a:lnL w="9525" cap="flat" cmpd="sng">
-                      <a:solidFill>
-                        <a:srgbClr val="000000">
-                          <a:alpha val="0"/>
-                        </a:srgbClr>
-                      </a:solidFill>
-                      <a:prstDash val="solid"/>
-                      <a:round/>
-                      <a:headEnd type="none" w="sm" len="sm"/>
-                      <a:tailEnd type="none" w="sm" len="sm"/>
-                    </a:lnL>
-                    <a:lnR w="9525" cap="flat" cmpd="sng">
-                      <a:solidFill>
-                        <a:srgbClr val="000000">
-                          <a:alpha val="0"/>
-                        </a:srgbClr>
-                      </a:solidFill>
-                      <a:prstDash val="solid"/>
-                      <a:round/>
-                      <a:headEnd type="none" w="sm" len="sm"/>
-                      <a:tailEnd type="none" w="sm" len="sm"/>
-                    </a:lnR>
-                    <a:lnT w="9525" cap="flat" cmpd="sng">
-                      <a:solidFill>
-                        <a:srgbClr val="000000">
-                          <a:alpha val="0"/>
-                        </a:srgbClr>
-                      </a:solidFill>
-                      <a:prstDash val="solid"/>
-                      <a:round/>
-                      <a:headEnd type="none" w="sm" len="sm"/>
-                      <a:tailEnd type="none" w="sm" len="sm"/>
-                    </a:lnT>
-                    <a:lnB w="9525" cap="flat" cmpd="sng">
-                      <a:solidFill>
-                        <a:srgbClr val="000000">
-                          <a:alpha val="0"/>
-                        </a:srgbClr>
-                      </a:solidFill>
-                      <a:prstDash val="solid"/>
-                      <a:round/>
-                      <a:headEnd type="none" w="sm" len="sm"/>
-                      <a:tailEnd type="none" w="sm" len="sm"/>
-                    </a:lnB>
-                  </a:tcPr>
+                  <a:tcPr marL="63500" marR="63500" marT="25400" marB="25400" anchor="ctr"/>
                 </a:tc>
                 <a:extLst>
                   <a:ext uri="{0D108BD9-81ED-4DB2-BD59-A6C34878D82A}">
@@ -12265,13 +12398,10 @@
                         <a:buNone/>
                       </a:pPr>
                       <a:r>
-                        <a:rPr lang="en-US" sz="1800" b="0" i="0" u="none" strike="noStrike" cap="none" dirty="0">
+                        <a:rPr lang="en-US" sz="1800" b="0" u="none" strike="noStrike" cap="none" dirty="0">
                           <a:solidFill>
                             <a:srgbClr val="333333"/>
                           </a:solidFill>
-                          <a:latin typeface="Helvetica Neue"/>
-                          <a:ea typeface="Helvetica Neue"/>
-                          <a:cs typeface="Helvetica Neue"/>
                           <a:sym typeface="Helvetica Neue"/>
                         </a:rPr>
                         <a:t>LSTM</a:t>
@@ -12279,52 +12409,7 @@
                       <a:endParaRPr sz="2000" dirty="0"/>
                     </a:p>
                   </a:txBody>
-                  <a:tcPr marL="63500" marR="63500" marT="25400" marB="25400" anchor="ctr">
-                    <a:lnL w="9525" cap="flat" cmpd="sng">
-                      <a:solidFill>
-                        <a:srgbClr val="000000">
-                          <a:alpha val="0"/>
-                        </a:srgbClr>
-                      </a:solidFill>
-                      <a:prstDash val="solid"/>
-                      <a:round/>
-                      <a:headEnd type="none" w="sm" len="sm"/>
-                      <a:tailEnd type="none" w="sm" len="sm"/>
-                    </a:lnL>
-                    <a:lnR w="9525" cap="flat" cmpd="sng">
-                      <a:solidFill>
-                        <a:srgbClr val="000000">
-                          <a:alpha val="0"/>
-                        </a:srgbClr>
-                      </a:solidFill>
-                      <a:prstDash val="solid"/>
-                      <a:round/>
-                      <a:headEnd type="none" w="sm" len="sm"/>
-                      <a:tailEnd type="none" w="sm" len="sm"/>
-                    </a:lnR>
-                    <a:lnT w="9525" cap="flat" cmpd="sng">
-                      <a:solidFill>
-                        <a:srgbClr val="000000">
-                          <a:alpha val="0"/>
-                        </a:srgbClr>
-                      </a:solidFill>
-                      <a:prstDash val="solid"/>
-                      <a:round/>
-                      <a:headEnd type="none" w="sm" len="sm"/>
-                      <a:tailEnd type="none" w="sm" len="sm"/>
-                    </a:lnT>
-                    <a:lnB w="9525" cap="flat" cmpd="sng">
-                      <a:solidFill>
-                        <a:srgbClr val="000000">
-                          <a:alpha val="0"/>
-                        </a:srgbClr>
-                      </a:solidFill>
-                      <a:prstDash val="solid"/>
-                      <a:round/>
-                      <a:headEnd type="none" w="sm" len="sm"/>
-                      <a:tailEnd type="none" w="sm" len="sm"/>
-                    </a:lnB>
-                  </a:tcPr>
+                  <a:tcPr marL="63500" marR="63500" marT="25400" marB="25400" anchor="ctr"/>
                 </a:tc>
                 <a:tc>
                   <a:txBody>
@@ -12341,13 +12426,10 @@
                         <a:buNone/>
                       </a:pPr>
                       <a:r>
-                        <a:rPr lang="en-US" sz="1800" b="0" i="0" u="none" strike="noStrike" cap="none" dirty="0">
+                        <a:rPr lang="en-US" sz="1800" b="0" u="none" strike="noStrike" cap="none" dirty="0">
                           <a:solidFill>
                             <a:srgbClr val="333333"/>
                           </a:solidFill>
-                          <a:latin typeface="Helvetica Neue"/>
-                          <a:ea typeface="Helvetica Neue"/>
-                          <a:cs typeface="Helvetica Neue"/>
                           <a:sym typeface="Helvetica Neue"/>
                         </a:rPr>
                         <a:t>Deep Learning (Sup)</a:t>
@@ -12355,52 +12437,7 @@
                       <a:endParaRPr sz="2000" dirty="0"/>
                     </a:p>
                   </a:txBody>
-                  <a:tcPr marL="63500" marR="63500" marT="25400" marB="25400" anchor="ctr">
-                    <a:lnL w="9525" cap="flat" cmpd="sng">
-                      <a:solidFill>
-                        <a:srgbClr val="000000">
-                          <a:alpha val="0"/>
-                        </a:srgbClr>
-                      </a:solidFill>
-                      <a:prstDash val="solid"/>
-                      <a:round/>
-                      <a:headEnd type="none" w="sm" len="sm"/>
-                      <a:tailEnd type="none" w="sm" len="sm"/>
-                    </a:lnL>
-                    <a:lnR w="9525" cap="flat" cmpd="sng">
-                      <a:solidFill>
-                        <a:srgbClr val="000000">
-                          <a:alpha val="0"/>
-                        </a:srgbClr>
-                      </a:solidFill>
-                      <a:prstDash val="solid"/>
-                      <a:round/>
-                      <a:headEnd type="none" w="sm" len="sm"/>
-                      <a:tailEnd type="none" w="sm" len="sm"/>
-                    </a:lnR>
-                    <a:lnT w="9525" cap="flat" cmpd="sng">
-                      <a:solidFill>
-                        <a:srgbClr val="000000">
-                          <a:alpha val="0"/>
-                        </a:srgbClr>
-                      </a:solidFill>
-                      <a:prstDash val="solid"/>
-                      <a:round/>
-                      <a:headEnd type="none" w="sm" len="sm"/>
-                      <a:tailEnd type="none" w="sm" len="sm"/>
-                    </a:lnT>
-                    <a:lnB w="9525" cap="flat" cmpd="sng">
-                      <a:solidFill>
-                        <a:srgbClr val="000000">
-                          <a:alpha val="0"/>
-                        </a:srgbClr>
-                      </a:solidFill>
-                      <a:prstDash val="solid"/>
-                      <a:round/>
-                      <a:headEnd type="none" w="sm" len="sm"/>
-                      <a:tailEnd type="none" w="sm" len="sm"/>
-                    </a:lnB>
-                  </a:tcPr>
+                  <a:tcPr marL="63500" marR="63500" marT="25400" marB="25400" anchor="ctr"/>
                 </a:tc>
                 <a:tc>
                   <a:txBody>
@@ -12417,13 +12454,10 @@
                         <a:buNone/>
                       </a:pPr>
                       <a:r>
-                        <a:rPr lang="en-US" sz="1800" b="0" i="0" u="none" strike="noStrike" cap="none">
+                        <a:rPr lang="en-US" sz="1800" b="0" u="none" strike="noStrike" cap="none">
                           <a:solidFill>
                             <a:srgbClr val="333333"/>
                           </a:solidFill>
-                          <a:latin typeface="Helvetica Neue"/>
-                          <a:ea typeface="Helvetica Neue"/>
-                          <a:cs typeface="Helvetica Neue"/>
                           <a:sym typeface="Helvetica Neue"/>
                         </a:rPr>
                         <a:t>98.08%</a:t>
@@ -12431,52 +12465,7 @@
                       <a:endParaRPr sz="2000"/>
                     </a:p>
                   </a:txBody>
-                  <a:tcPr marL="63500" marR="63500" marT="25400" marB="25400" anchor="ctr">
-                    <a:lnL w="9525" cap="flat" cmpd="sng">
-                      <a:solidFill>
-                        <a:srgbClr val="000000">
-                          <a:alpha val="0"/>
-                        </a:srgbClr>
-                      </a:solidFill>
-                      <a:prstDash val="solid"/>
-                      <a:round/>
-                      <a:headEnd type="none" w="sm" len="sm"/>
-                      <a:tailEnd type="none" w="sm" len="sm"/>
-                    </a:lnL>
-                    <a:lnR w="9525" cap="flat" cmpd="sng">
-                      <a:solidFill>
-                        <a:srgbClr val="000000">
-                          <a:alpha val="0"/>
-                        </a:srgbClr>
-                      </a:solidFill>
-                      <a:prstDash val="solid"/>
-                      <a:round/>
-                      <a:headEnd type="none" w="sm" len="sm"/>
-                      <a:tailEnd type="none" w="sm" len="sm"/>
-                    </a:lnR>
-                    <a:lnT w="9525" cap="flat" cmpd="sng">
-                      <a:solidFill>
-                        <a:srgbClr val="000000">
-                          <a:alpha val="0"/>
-                        </a:srgbClr>
-                      </a:solidFill>
-                      <a:prstDash val="solid"/>
-                      <a:round/>
-                      <a:headEnd type="none" w="sm" len="sm"/>
-                      <a:tailEnd type="none" w="sm" len="sm"/>
-                    </a:lnT>
-                    <a:lnB w="9525" cap="flat" cmpd="sng">
-                      <a:solidFill>
-                        <a:srgbClr val="000000">
-                          <a:alpha val="0"/>
-                        </a:srgbClr>
-                      </a:solidFill>
-                      <a:prstDash val="solid"/>
-                      <a:round/>
-                      <a:headEnd type="none" w="sm" len="sm"/>
-                      <a:tailEnd type="none" w="sm" len="sm"/>
-                    </a:lnB>
-                  </a:tcPr>
+                  <a:tcPr marL="63500" marR="63500" marT="25400" marB="25400" anchor="ctr"/>
                 </a:tc>
                 <a:tc>
                   <a:txBody>
@@ -12493,13 +12482,10 @@
                         <a:buNone/>
                       </a:pPr>
                       <a:r>
-                        <a:rPr lang="en-US" sz="1800" b="0" i="0" u="none" strike="noStrike" cap="none" dirty="0">
+                        <a:rPr lang="en-US" sz="1800" b="0" u="none" strike="noStrike" cap="none" dirty="0">
                           <a:solidFill>
                             <a:srgbClr val="333333"/>
                           </a:solidFill>
-                          <a:latin typeface="Helvetica Neue"/>
-                          <a:ea typeface="Helvetica Neue"/>
-                          <a:cs typeface="Helvetica Neue"/>
                           <a:sym typeface="Helvetica Neue"/>
                         </a:rPr>
                         <a:t>99.88%</a:t>
@@ -12507,52 +12493,7 @@
                       <a:endParaRPr sz="2000" dirty="0"/>
                     </a:p>
                   </a:txBody>
-                  <a:tcPr marL="63500" marR="63500" marT="25400" marB="25400" anchor="ctr">
-                    <a:lnL w="9525" cap="flat" cmpd="sng">
-                      <a:solidFill>
-                        <a:srgbClr val="000000">
-                          <a:alpha val="0"/>
-                        </a:srgbClr>
-                      </a:solidFill>
-                      <a:prstDash val="solid"/>
-                      <a:round/>
-                      <a:headEnd type="none" w="sm" len="sm"/>
-                      <a:tailEnd type="none" w="sm" len="sm"/>
-                    </a:lnL>
-                    <a:lnR w="9525" cap="flat" cmpd="sng">
-                      <a:solidFill>
-                        <a:srgbClr val="000000">
-                          <a:alpha val="0"/>
-                        </a:srgbClr>
-                      </a:solidFill>
-                      <a:prstDash val="solid"/>
-                      <a:round/>
-                      <a:headEnd type="none" w="sm" len="sm"/>
-                      <a:tailEnd type="none" w="sm" len="sm"/>
-                    </a:lnR>
-                    <a:lnT w="9525" cap="flat" cmpd="sng">
-                      <a:solidFill>
-                        <a:srgbClr val="000000">
-                          <a:alpha val="0"/>
-                        </a:srgbClr>
-                      </a:solidFill>
-                      <a:prstDash val="solid"/>
-                      <a:round/>
-                      <a:headEnd type="none" w="sm" len="sm"/>
-                      <a:tailEnd type="none" w="sm" len="sm"/>
-                    </a:lnT>
-                    <a:lnB w="9525" cap="flat" cmpd="sng">
-                      <a:solidFill>
-                        <a:srgbClr val="000000">
-                          <a:alpha val="0"/>
-                        </a:srgbClr>
-                      </a:solidFill>
-                      <a:prstDash val="solid"/>
-                      <a:round/>
-                      <a:headEnd type="none" w="sm" len="sm"/>
-                      <a:tailEnd type="none" w="sm" len="sm"/>
-                    </a:lnB>
-                  </a:tcPr>
+                  <a:tcPr marL="63500" marR="63500" marT="25400" marB="25400" anchor="ctr"/>
                 </a:tc>
                 <a:tc>
                   <a:txBody>
@@ -12569,13 +12510,10 @@
                         <a:buNone/>
                       </a:pPr>
                       <a:r>
-                        <a:rPr lang="en-US" sz="1800" b="1" i="0" u="none" strike="noStrike" cap="none" dirty="0">
+                        <a:rPr lang="en-US" sz="1800" b="1" u="none" strike="noStrike" cap="none" dirty="0">
                           <a:solidFill>
                             <a:srgbClr val="333333"/>
                           </a:solidFill>
-                          <a:latin typeface="Helvetica Neue"/>
-                          <a:ea typeface="Helvetica Neue"/>
-                          <a:cs typeface="Helvetica Neue"/>
                           <a:sym typeface="Helvetica Neue"/>
                         </a:rPr>
                         <a:t>98.97%</a:t>
@@ -12583,52 +12521,7 @@
                       <a:endParaRPr sz="2000" dirty="0"/>
                     </a:p>
                   </a:txBody>
-                  <a:tcPr marL="63500" marR="63500" marT="25400" marB="25400" anchor="ctr">
-                    <a:lnL w="9525" cap="flat" cmpd="sng">
-                      <a:solidFill>
-                        <a:srgbClr val="000000">
-                          <a:alpha val="0"/>
-                        </a:srgbClr>
-                      </a:solidFill>
-                      <a:prstDash val="solid"/>
-                      <a:round/>
-                      <a:headEnd type="none" w="sm" len="sm"/>
-                      <a:tailEnd type="none" w="sm" len="sm"/>
-                    </a:lnL>
-                    <a:lnR w="9525" cap="flat" cmpd="sng">
-                      <a:solidFill>
-                        <a:srgbClr val="000000">
-                          <a:alpha val="0"/>
-                        </a:srgbClr>
-                      </a:solidFill>
-                      <a:prstDash val="solid"/>
-                      <a:round/>
-                      <a:headEnd type="none" w="sm" len="sm"/>
-                      <a:tailEnd type="none" w="sm" len="sm"/>
-                    </a:lnR>
-                    <a:lnT w="9525" cap="flat" cmpd="sng">
-                      <a:solidFill>
-                        <a:srgbClr val="000000">
-                          <a:alpha val="0"/>
-                        </a:srgbClr>
-                      </a:solidFill>
-                      <a:prstDash val="solid"/>
-                      <a:round/>
-                      <a:headEnd type="none" w="sm" len="sm"/>
-                      <a:tailEnd type="none" w="sm" len="sm"/>
-                    </a:lnT>
-                    <a:lnB w="9525" cap="flat" cmpd="sng">
-                      <a:solidFill>
-                        <a:srgbClr val="000000">
-                          <a:alpha val="0"/>
-                        </a:srgbClr>
-                      </a:solidFill>
-                      <a:prstDash val="solid"/>
-                      <a:round/>
-                      <a:headEnd type="none" w="sm" len="sm"/>
-                      <a:tailEnd type="none" w="sm" len="sm"/>
-                    </a:lnB>
-                  </a:tcPr>
+                  <a:tcPr marL="63500" marR="63500" marT="25400" marB="25400" anchor="ctr"/>
                 </a:tc>
                 <a:tc>
                   <a:txBody>
@@ -12645,13 +12538,10 @@
                         <a:buNone/>
                       </a:pPr>
                       <a:r>
-                        <a:rPr lang="en-US" sz="1800" b="0" i="0" u="none" strike="noStrike" cap="none">
+                        <a:rPr lang="en-US" sz="1800" b="0" u="none" strike="noStrike" cap="none">
                           <a:solidFill>
                             <a:srgbClr val="333333"/>
                           </a:solidFill>
-                          <a:latin typeface="Helvetica Neue"/>
-                          <a:ea typeface="Helvetica Neue"/>
-                          <a:cs typeface="Helvetica Neue"/>
                           <a:sym typeface="Helvetica Neue"/>
                         </a:rPr>
                         <a:t>100%</a:t>
@@ -12659,52 +12549,7 @@
                       <a:endParaRPr sz="2000"/>
                     </a:p>
                   </a:txBody>
-                  <a:tcPr marL="63500" marR="63500" marT="25400" marB="25400" anchor="ctr">
-                    <a:lnL w="9525" cap="flat" cmpd="sng">
-                      <a:solidFill>
-                        <a:srgbClr val="000000">
-                          <a:alpha val="0"/>
-                        </a:srgbClr>
-                      </a:solidFill>
-                      <a:prstDash val="solid"/>
-                      <a:round/>
-                      <a:headEnd type="none" w="sm" len="sm"/>
-                      <a:tailEnd type="none" w="sm" len="sm"/>
-                    </a:lnL>
-                    <a:lnR w="9525" cap="flat" cmpd="sng">
-                      <a:solidFill>
-                        <a:srgbClr val="000000">
-                          <a:alpha val="0"/>
-                        </a:srgbClr>
-                      </a:solidFill>
-                      <a:prstDash val="solid"/>
-                      <a:round/>
-                      <a:headEnd type="none" w="sm" len="sm"/>
-                      <a:tailEnd type="none" w="sm" len="sm"/>
-                    </a:lnR>
-                    <a:lnT w="9525" cap="flat" cmpd="sng">
-                      <a:solidFill>
-                        <a:srgbClr val="000000">
-                          <a:alpha val="0"/>
-                        </a:srgbClr>
-                      </a:solidFill>
-                      <a:prstDash val="solid"/>
-                      <a:round/>
-                      <a:headEnd type="none" w="sm" len="sm"/>
-                      <a:tailEnd type="none" w="sm" len="sm"/>
-                    </a:lnT>
-                    <a:lnB w="9525" cap="flat" cmpd="sng">
-                      <a:solidFill>
-                        <a:srgbClr val="000000">
-                          <a:alpha val="0"/>
-                        </a:srgbClr>
-                      </a:solidFill>
-                      <a:prstDash val="solid"/>
-                      <a:round/>
-                      <a:headEnd type="none" w="sm" len="sm"/>
-                      <a:tailEnd type="none" w="sm" len="sm"/>
-                    </a:lnB>
-                  </a:tcPr>
+                  <a:tcPr marL="63500" marR="63500" marT="25400" marB="25400" anchor="ctr"/>
                 </a:tc>
                 <a:extLst>
                   <a:ext uri="{0D108BD9-81ED-4DB2-BD59-A6C34878D82A}">
@@ -12728,13 +12573,10 @@
                         <a:buNone/>
                       </a:pPr>
                       <a:r>
-                        <a:rPr lang="en-US" sz="1800" b="0" i="0" u="none" strike="noStrike" cap="none" dirty="0">
+                        <a:rPr lang="en-US" sz="1800" b="0" u="none" strike="noStrike" cap="none" dirty="0">
                           <a:solidFill>
                             <a:srgbClr val="333333"/>
                           </a:solidFill>
-                          <a:latin typeface="Helvetica Neue"/>
-                          <a:ea typeface="Helvetica Neue"/>
-                          <a:cs typeface="Helvetica Neue"/>
                           <a:sym typeface="Helvetica Neue"/>
                         </a:rPr>
                         <a:t>LSTM-AE</a:t>
@@ -12742,52 +12584,7 @@
                       <a:endParaRPr sz="2000" dirty="0"/>
                     </a:p>
                   </a:txBody>
-                  <a:tcPr marL="63500" marR="63500" marT="25400" marB="25400" anchor="ctr">
-                    <a:lnL w="9525" cap="flat" cmpd="sng">
-                      <a:solidFill>
-                        <a:srgbClr val="000000">
-                          <a:alpha val="0"/>
-                        </a:srgbClr>
-                      </a:solidFill>
-                      <a:prstDash val="solid"/>
-                      <a:round/>
-                      <a:headEnd type="none" w="sm" len="sm"/>
-                      <a:tailEnd type="none" w="sm" len="sm"/>
-                    </a:lnL>
-                    <a:lnR w="9525" cap="flat" cmpd="sng" algn="ctr">
-                      <a:solidFill>
-                        <a:srgbClr val="000000">
-                          <a:alpha val="0"/>
-                        </a:srgbClr>
-                      </a:solidFill>
-                      <a:prstDash val="solid"/>
-                      <a:round/>
-                      <a:headEnd type="none" w="sm" len="sm"/>
-                      <a:tailEnd type="none" w="sm" len="sm"/>
-                    </a:lnR>
-                    <a:lnT w="9525" cap="flat" cmpd="sng" algn="ctr">
-                      <a:solidFill>
-                        <a:srgbClr val="000000">
-                          <a:alpha val="0"/>
-                        </a:srgbClr>
-                      </a:solidFill>
-                      <a:prstDash val="solid"/>
-                      <a:round/>
-                      <a:headEnd type="none" w="sm" len="sm"/>
-                      <a:tailEnd type="none" w="sm" len="sm"/>
-                    </a:lnT>
-                    <a:lnB w="9525" cap="flat" cmpd="sng">
-                      <a:solidFill>
-                        <a:srgbClr val="000000">
-                          <a:alpha val="0"/>
-                        </a:srgbClr>
-                      </a:solidFill>
-                      <a:prstDash val="solid"/>
-                      <a:round/>
-                      <a:headEnd type="none" w="sm" len="sm"/>
-                      <a:tailEnd type="none" w="sm" len="sm"/>
-                    </a:lnB>
-                  </a:tcPr>
+                  <a:tcPr marL="63500" marR="63500" marT="25400" marB="25400" anchor="ctr"/>
                 </a:tc>
                 <a:tc>
                   <a:txBody>
@@ -12804,13 +12601,10 @@
                         <a:buNone/>
                       </a:pPr>
                       <a:r>
-                        <a:rPr lang="en-US" sz="1800" b="0" i="0" u="none" strike="noStrike" cap="none">
+                        <a:rPr lang="en-US" sz="1800" b="0" u="none" strike="noStrike" cap="none">
                           <a:solidFill>
                             <a:srgbClr val="333333"/>
                           </a:solidFill>
-                          <a:latin typeface="Helvetica Neue"/>
-                          <a:ea typeface="Helvetica Neue"/>
-                          <a:cs typeface="Helvetica Neue"/>
                           <a:sym typeface="Helvetica Neue"/>
                         </a:rPr>
                         <a:t>Generative (Unsup)</a:t>
@@ -12818,52 +12612,7 @@
                       <a:endParaRPr sz="2000"/>
                     </a:p>
                   </a:txBody>
-                  <a:tcPr marL="63500" marR="63500" marT="25400" marB="25400" anchor="ctr">
-                    <a:lnL w="9525" cap="flat" cmpd="sng" algn="ctr">
-                      <a:solidFill>
-                        <a:srgbClr val="000000">
-                          <a:alpha val="0"/>
-                        </a:srgbClr>
-                      </a:solidFill>
-                      <a:prstDash val="solid"/>
-                      <a:round/>
-                      <a:headEnd type="none" w="sm" len="sm"/>
-                      <a:tailEnd type="none" w="sm" len="sm"/>
-                    </a:lnL>
-                    <a:lnR w="9525" cap="flat" cmpd="sng" algn="ctr">
-                      <a:solidFill>
-                        <a:srgbClr val="000000">
-                          <a:alpha val="0"/>
-                        </a:srgbClr>
-                      </a:solidFill>
-                      <a:prstDash val="solid"/>
-                      <a:round/>
-                      <a:headEnd type="none" w="sm" len="sm"/>
-                      <a:tailEnd type="none" w="sm" len="sm"/>
-                    </a:lnR>
-                    <a:lnT w="9525" cap="flat" cmpd="sng" algn="ctr">
-                      <a:solidFill>
-                        <a:srgbClr val="000000">
-                          <a:alpha val="0"/>
-                        </a:srgbClr>
-                      </a:solidFill>
-                      <a:prstDash val="solid"/>
-                      <a:round/>
-                      <a:headEnd type="none" w="sm" len="sm"/>
-                      <a:tailEnd type="none" w="sm" len="sm"/>
-                    </a:lnT>
-                    <a:lnB w="9525" cap="flat" cmpd="sng">
-                      <a:solidFill>
-                        <a:srgbClr val="000000">
-                          <a:alpha val="0"/>
-                        </a:srgbClr>
-                      </a:solidFill>
-                      <a:prstDash val="solid"/>
-                      <a:round/>
-                      <a:headEnd type="none" w="sm" len="sm"/>
-                      <a:tailEnd type="none" w="sm" len="sm"/>
-                    </a:lnB>
-                  </a:tcPr>
+                  <a:tcPr marL="63500" marR="63500" marT="25400" marB="25400" anchor="ctr"/>
                 </a:tc>
                 <a:tc>
                   <a:txBody>
@@ -12880,13 +12629,10 @@
                         <a:buNone/>
                       </a:pPr>
                       <a:r>
-                        <a:rPr lang="en-US" sz="1800" b="0" i="0" u="none" strike="noStrike" cap="none">
+                        <a:rPr lang="en-US" sz="1800" b="0" u="none" strike="noStrike" cap="none">
                           <a:solidFill>
                             <a:srgbClr val="333333"/>
                           </a:solidFill>
-                          <a:latin typeface="Helvetica Neue"/>
-                          <a:ea typeface="Helvetica Neue"/>
-                          <a:cs typeface="Helvetica Neue"/>
                           <a:sym typeface="Helvetica Neue"/>
                         </a:rPr>
                         <a:t>72.32%</a:t>
@@ -12894,52 +12640,7 @@
                       <a:endParaRPr sz="2000"/>
                     </a:p>
                   </a:txBody>
-                  <a:tcPr marL="63500" marR="63500" marT="25400" marB="25400" anchor="ctr">
-                    <a:lnL w="9525" cap="flat" cmpd="sng" algn="ctr">
-                      <a:solidFill>
-                        <a:srgbClr val="000000">
-                          <a:alpha val="0"/>
-                        </a:srgbClr>
-                      </a:solidFill>
-                      <a:prstDash val="solid"/>
-                      <a:round/>
-                      <a:headEnd type="none" w="sm" len="sm"/>
-                      <a:tailEnd type="none" w="sm" len="sm"/>
-                    </a:lnL>
-                    <a:lnR w="9525" cap="flat" cmpd="sng" algn="ctr">
-                      <a:solidFill>
-                        <a:srgbClr val="000000">
-                          <a:alpha val="0"/>
-                        </a:srgbClr>
-                      </a:solidFill>
-                      <a:prstDash val="solid"/>
-                      <a:round/>
-                      <a:headEnd type="none" w="sm" len="sm"/>
-                      <a:tailEnd type="none" w="sm" len="sm"/>
-                    </a:lnR>
-                    <a:lnT w="9525" cap="flat" cmpd="sng" algn="ctr">
-                      <a:solidFill>
-                        <a:srgbClr val="000000">
-                          <a:alpha val="0"/>
-                        </a:srgbClr>
-                      </a:solidFill>
-                      <a:prstDash val="solid"/>
-                      <a:round/>
-                      <a:headEnd type="none" w="sm" len="sm"/>
-                      <a:tailEnd type="none" w="sm" len="sm"/>
-                    </a:lnT>
-                    <a:lnB w="9525" cap="flat" cmpd="sng">
-                      <a:solidFill>
-                        <a:srgbClr val="000000">
-                          <a:alpha val="0"/>
-                        </a:srgbClr>
-                      </a:solidFill>
-                      <a:prstDash val="solid"/>
-                      <a:round/>
-                      <a:headEnd type="none" w="sm" len="sm"/>
-                      <a:tailEnd type="none" w="sm" len="sm"/>
-                    </a:lnB>
-                  </a:tcPr>
+                  <a:tcPr marL="63500" marR="63500" marT="25400" marB="25400" anchor="ctr"/>
                 </a:tc>
                 <a:tc>
                   <a:txBody>
@@ -12956,13 +12657,10 @@
                         <a:buNone/>
                       </a:pPr>
                       <a:r>
-                        <a:rPr lang="en-US" sz="1800" b="0" i="0" u="none" strike="noStrike" cap="none">
+                        <a:rPr lang="en-US" sz="1800" b="0" u="none" strike="noStrike" cap="none">
                           <a:solidFill>
                             <a:srgbClr val="333333"/>
                           </a:solidFill>
-                          <a:latin typeface="Helvetica Neue"/>
-                          <a:ea typeface="Helvetica Neue"/>
-                          <a:cs typeface="Helvetica Neue"/>
                           <a:sym typeface="Helvetica Neue"/>
                         </a:rPr>
                         <a:t>88.18%</a:t>
@@ -12970,52 +12668,7 @@
                       <a:endParaRPr sz="2000"/>
                     </a:p>
                   </a:txBody>
-                  <a:tcPr marL="63500" marR="63500" marT="25400" marB="25400" anchor="ctr">
-                    <a:lnL w="9525" cap="flat" cmpd="sng" algn="ctr">
-                      <a:solidFill>
-                        <a:srgbClr val="000000">
-                          <a:alpha val="0"/>
-                        </a:srgbClr>
-                      </a:solidFill>
-                      <a:prstDash val="solid"/>
-                      <a:round/>
-                      <a:headEnd type="none" w="sm" len="sm"/>
-                      <a:tailEnd type="none" w="sm" len="sm"/>
-                    </a:lnL>
-                    <a:lnR w="9525" cap="flat" cmpd="sng" algn="ctr">
-                      <a:solidFill>
-                        <a:srgbClr val="000000">
-                          <a:alpha val="0"/>
-                        </a:srgbClr>
-                      </a:solidFill>
-                      <a:prstDash val="solid"/>
-                      <a:round/>
-                      <a:headEnd type="none" w="sm" len="sm"/>
-                      <a:tailEnd type="none" w="sm" len="sm"/>
-                    </a:lnR>
-                    <a:lnT w="9525" cap="flat" cmpd="sng" algn="ctr">
-                      <a:solidFill>
-                        <a:srgbClr val="000000">
-                          <a:alpha val="0"/>
-                        </a:srgbClr>
-                      </a:solidFill>
-                      <a:prstDash val="solid"/>
-                      <a:round/>
-                      <a:headEnd type="none" w="sm" len="sm"/>
-                      <a:tailEnd type="none" w="sm" len="sm"/>
-                    </a:lnT>
-                    <a:lnB w="9525" cap="flat" cmpd="sng">
-                      <a:solidFill>
-                        <a:srgbClr val="000000">
-                          <a:alpha val="0"/>
-                        </a:srgbClr>
-                      </a:solidFill>
-                      <a:prstDash val="solid"/>
-                      <a:round/>
-                      <a:headEnd type="none" w="sm" len="sm"/>
-                      <a:tailEnd type="none" w="sm" len="sm"/>
-                    </a:lnB>
-                  </a:tcPr>
+                  <a:tcPr marL="63500" marR="63500" marT="25400" marB="25400" anchor="ctr"/>
                 </a:tc>
                 <a:tc>
                   <a:txBody>
@@ -13032,13 +12685,10 @@
                         <a:buNone/>
                       </a:pPr>
                       <a:r>
-                        <a:rPr lang="en-US" sz="1800" b="1" i="0" u="none" strike="noStrike" cap="none" dirty="0">
+                        <a:rPr lang="en-US" sz="1800" b="1" u="none" strike="noStrike" cap="none" dirty="0">
                           <a:solidFill>
                             <a:srgbClr val="333333"/>
                           </a:solidFill>
-                          <a:latin typeface="Helvetica Neue"/>
-                          <a:ea typeface="Helvetica Neue"/>
-                          <a:cs typeface="Helvetica Neue"/>
                           <a:sym typeface="Helvetica Neue"/>
                         </a:rPr>
                         <a:t>79.46%</a:t>
@@ -13046,52 +12696,7 @@
                       <a:endParaRPr sz="2000" dirty="0"/>
                     </a:p>
                   </a:txBody>
-                  <a:tcPr marL="63500" marR="63500" marT="25400" marB="25400" anchor="ctr">
-                    <a:lnL w="9525" cap="flat" cmpd="sng" algn="ctr">
-                      <a:solidFill>
-                        <a:srgbClr val="000000">
-                          <a:alpha val="0"/>
-                        </a:srgbClr>
-                      </a:solidFill>
-                      <a:prstDash val="solid"/>
-                      <a:round/>
-                      <a:headEnd type="none" w="sm" len="sm"/>
-                      <a:tailEnd type="none" w="sm" len="sm"/>
-                    </a:lnL>
-                    <a:lnR w="9525" cap="flat" cmpd="sng" algn="ctr">
-                      <a:solidFill>
-                        <a:srgbClr val="000000">
-                          <a:alpha val="0"/>
-                        </a:srgbClr>
-                      </a:solidFill>
-                      <a:prstDash val="solid"/>
-                      <a:round/>
-                      <a:headEnd type="none" w="sm" len="sm"/>
-                      <a:tailEnd type="none" w="sm" len="sm"/>
-                    </a:lnR>
-                    <a:lnT w="9525" cap="flat" cmpd="sng" algn="ctr">
-                      <a:solidFill>
-                        <a:srgbClr val="000000">
-                          <a:alpha val="0"/>
-                        </a:srgbClr>
-                      </a:solidFill>
-                      <a:prstDash val="solid"/>
-                      <a:round/>
-                      <a:headEnd type="none" w="sm" len="sm"/>
-                      <a:tailEnd type="none" w="sm" len="sm"/>
-                    </a:lnT>
-                    <a:lnB w="9525" cap="flat" cmpd="sng">
-                      <a:solidFill>
-                        <a:srgbClr val="000000">
-                          <a:alpha val="0"/>
-                        </a:srgbClr>
-                      </a:solidFill>
-                      <a:prstDash val="solid"/>
-                      <a:round/>
-                      <a:headEnd type="none" w="sm" len="sm"/>
-                      <a:tailEnd type="none" w="sm" len="sm"/>
-                    </a:lnB>
-                  </a:tcPr>
+                  <a:tcPr marL="63500" marR="63500" marT="25400" marB="25400" anchor="ctr"/>
                 </a:tc>
                 <a:tc>
                   <a:txBody>
@@ -13108,13 +12713,10 @@
                         <a:buNone/>
                       </a:pPr>
                       <a:r>
-                        <a:rPr lang="en-US" sz="1800" b="0" i="0" u="none" strike="noStrike" cap="none" dirty="0">
+                        <a:rPr lang="en-US" sz="1800" b="0" u="none" strike="noStrike" cap="none" dirty="0">
                           <a:solidFill>
                             <a:srgbClr val="333333"/>
                           </a:solidFill>
-                          <a:latin typeface="Helvetica Neue"/>
-                          <a:ea typeface="Helvetica Neue"/>
-                          <a:cs typeface="Helvetica Neue"/>
                           <a:sym typeface="Helvetica Neue"/>
                         </a:rPr>
                         <a:t>99.64%</a:t>
@@ -13122,52 +12724,7 @@
                       <a:endParaRPr sz="2000" dirty="0"/>
                     </a:p>
                   </a:txBody>
-                  <a:tcPr marL="63500" marR="63500" marT="25400" marB="25400" anchor="ctr">
-                    <a:lnL w="9525" cap="flat" cmpd="sng" algn="ctr">
-                      <a:solidFill>
-                        <a:srgbClr val="000000">
-                          <a:alpha val="0"/>
-                        </a:srgbClr>
-                      </a:solidFill>
-                      <a:prstDash val="solid"/>
-                      <a:round/>
-                      <a:headEnd type="none" w="sm" len="sm"/>
-                      <a:tailEnd type="none" w="sm" len="sm"/>
-                    </a:lnL>
-                    <a:lnR w="9525" cap="flat" cmpd="sng">
-                      <a:solidFill>
-                        <a:srgbClr val="000000">
-                          <a:alpha val="0"/>
-                        </a:srgbClr>
-                      </a:solidFill>
-                      <a:prstDash val="solid"/>
-                      <a:round/>
-                      <a:headEnd type="none" w="sm" len="sm"/>
-                      <a:tailEnd type="none" w="sm" len="sm"/>
-                    </a:lnR>
-                    <a:lnT w="9525" cap="flat" cmpd="sng" algn="ctr">
-                      <a:solidFill>
-                        <a:srgbClr val="000000">
-                          <a:alpha val="0"/>
-                        </a:srgbClr>
-                      </a:solidFill>
-                      <a:prstDash val="solid"/>
-                      <a:round/>
-                      <a:headEnd type="none" w="sm" len="sm"/>
-                      <a:tailEnd type="none" w="sm" len="sm"/>
-                    </a:lnT>
-                    <a:lnB w="9525" cap="flat" cmpd="sng">
-                      <a:solidFill>
-                        <a:srgbClr val="000000">
-                          <a:alpha val="0"/>
-                        </a:srgbClr>
-                      </a:solidFill>
-                      <a:prstDash val="solid"/>
-                      <a:round/>
-                      <a:headEnd type="none" w="sm" len="sm"/>
-                      <a:tailEnd type="none" w="sm" len="sm"/>
-                    </a:lnB>
-                  </a:tcPr>
+                  <a:tcPr marL="63500" marR="63500" marT="25400" marB="25400" anchor="ctr"/>
                 </a:tc>
                 <a:extLst>
                   <a:ext uri="{0D108BD9-81ED-4DB2-BD59-A6C34878D82A}">
@@ -13191,13 +12748,10 @@
                         <a:buNone/>
                       </a:pPr>
                       <a:r>
-                        <a:rPr lang="en-US" sz="1800" b="0" i="0" u="none" strike="noStrike" cap="none">
+                        <a:rPr lang="en-US" sz="1800" b="0" u="none" strike="noStrike" cap="none">
                           <a:solidFill>
                             <a:srgbClr val="333333"/>
                           </a:solidFill>
-                          <a:latin typeface="Helvetica Neue"/>
-                          <a:ea typeface="Helvetica Neue"/>
-                          <a:cs typeface="Helvetica Neue"/>
                           <a:sym typeface="Helvetica Neue"/>
                         </a:rPr>
                         <a:t>VAE</a:t>
@@ -13205,52 +12759,7 @@
                       <a:endParaRPr sz="2000"/>
                     </a:p>
                   </a:txBody>
-                  <a:tcPr marL="63500" marR="63500" marT="25400" marB="25400" anchor="ctr">
-                    <a:lnL w="9525" cap="flat" cmpd="sng">
-                      <a:solidFill>
-                        <a:srgbClr val="000000">
-                          <a:alpha val="0"/>
-                        </a:srgbClr>
-                      </a:solidFill>
-                      <a:prstDash val="solid"/>
-                      <a:round/>
-                      <a:headEnd type="none" w="sm" len="sm"/>
-                      <a:tailEnd type="none" w="sm" len="sm"/>
-                    </a:lnL>
-                    <a:lnR w="9525" cap="flat" cmpd="sng">
-                      <a:solidFill>
-                        <a:srgbClr val="000000">
-                          <a:alpha val="0"/>
-                        </a:srgbClr>
-                      </a:solidFill>
-                      <a:prstDash val="solid"/>
-                      <a:round/>
-                      <a:headEnd type="none" w="sm" len="sm"/>
-                      <a:tailEnd type="none" w="sm" len="sm"/>
-                    </a:lnR>
-                    <a:lnT w="9525" cap="flat" cmpd="sng">
-                      <a:solidFill>
-                        <a:srgbClr val="000000">
-                          <a:alpha val="0"/>
-                        </a:srgbClr>
-                      </a:solidFill>
-                      <a:prstDash val="solid"/>
-                      <a:round/>
-                      <a:headEnd type="none" w="sm" len="sm"/>
-                      <a:tailEnd type="none" w="sm" len="sm"/>
-                    </a:lnT>
-                    <a:lnB w="9525" cap="flat" cmpd="sng">
-                      <a:solidFill>
-                        <a:srgbClr val="000000">
-                          <a:alpha val="0"/>
-                        </a:srgbClr>
-                      </a:solidFill>
-                      <a:prstDash val="solid"/>
-                      <a:round/>
-                      <a:headEnd type="none" w="sm" len="sm"/>
-                      <a:tailEnd type="none" w="sm" len="sm"/>
-                    </a:lnB>
-                  </a:tcPr>
+                  <a:tcPr marL="63500" marR="63500" marT="25400" marB="25400" anchor="ctr"/>
                 </a:tc>
                 <a:tc>
                   <a:txBody>
@@ -13267,13 +12776,10 @@
                         <a:buNone/>
                       </a:pPr>
                       <a:r>
-                        <a:rPr lang="en-US" sz="1800" b="0" i="0" u="none" strike="noStrike" cap="none">
+                        <a:rPr lang="en-US" sz="1800" b="0" u="none" strike="noStrike" cap="none">
                           <a:solidFill>
                             <a:srgbClr val="333333"/>
                           </a:solidFill>
-                          <a:latin typeface="Helvetica Neue"/>
-                          <a:ea typeface="Helvetica Neue"/>
-                          <a:cs typeface="Helvetica Neue"/>
                           <a:sym typeface="Helvetica Neue"/>
                         </a:rPr>
                         <a:t>Generative (Unsup)</a:t>
@@ -13281,52 +12787,7 @@
                       <a:endParaRPr sz="2000"/>
                     </a:p>
                   </a:txBody>
-                  <a:tcPr marL="63500" marR="63500" marT="25400" marB="25400" anchor="ctr">
-                    <a:lnL w="9525" cap="flat" cmpd="sng">
-                      <a:solidFill>
-                        <a:srgbClr val="000000">
-                          <a:alpha val="0"/>
-                        </a:srgbClr>
-                      </a:solidFill>
-                      <a:prstDash val="solid"/>
-                      <a:round/>
-                      <a:headEnd type="none" w="sm" len="sm"/>
-                      <a:tailEnd type="none" w="sm" len="sm"/>
-                    </a:lnL>
-                    <a:lnR w="9525" cap="flat" cmpd="sng">
-                      <a:solidFill>
-                        <a:srgbClr val="000000">
-                          <a:alpha val="0"/>
-                        </a:srgbClr>
-                      </a:solidFill>
-                      <a:prstDash val="solid"/>
-                      <a:round/>
-                      <a:headEnd type="none" w="sm" len="sm"/>
-                      <a:tailEnd type="none" w="sm" len="sm"/>
-                    </a:lnR>
-                    <a:lnT w="9525" cap="flat" cmpd="sng">
-                      <a:solidFill>
-                        <a:srgbClr val="000000">
-                          <a:alpha val="0"/>
-                        </a:srgbClr>
-                      </a:solidFill>
-                      <a:prstDash val="solid"/>
-                      <a:round/>
-                      <a:headEnd type="none" w="sm" len="sm"/>
-                      <a:tailEnd type="none" w="sm" len="sm"/>
-                    </a:lnT>
-                    <a:lnB w="9525" cap="flat" cmpd="sng">
-                      <a:solidFill>
-                        <a:srgbClr val="000000">
-                          <a:alpha val="0"/>
-                        </a:srgbClr>
-                      </a:solidFill>
-                      <a:prstDash val="solid"/>
-                      <a:round/>
-                      <a:headEnd type="none" w="sm" len="sm"/>
-                      <a:tailEnd type="none" w="sm" len="sm"/>
-                    </a:lnB>
-                  </a:tcPr>
+                  <a:tcPr marL="63500" marR="63500" marT="25400" marB="25400" anchor="ctr"/>
                 </a:tc>
                 <a:tc>
                   <a:txBody>
@@ -13343,13 +12804,10 @@
                         <a:buNone/>
                       </a:pPr>
                       <a:r>
-                        <a:rPr lang="en-US" sz="1800" b="0" i="0" u="none" strike="noStrike" cap="none">
+                        <a:rPr lang="en-US" sz="1800" b="0" u="none" strike="noStrike" cap="none">
                           <a:solidFill>
                             <a:srgbClr val="333333"/>
                           </a:solidFill>
-                          <a:latin typeface="Helvetica Neue"/>
-                          <a:ea typeface="Helvetica Neue"/>
-                          <a:cs typeface="Helvetica Neue"/>
                           <a:sym typeface="Helvetica Neue"/>
                         </a:rPr>
                         <a:t>69.44%</a:t>
@@ -13357,52 +12815,7 @@
                       <a:endParaRPr sz="2000"/>
                     </a:p>
                   </a:txBody>
-                  <a:tcPr marL="63500" marR="63500" marT="25400" marB="25400" anchor="ctr">
-                    <a:lnL w="9525" cap="flat" cmpd="sng">
-                      <a:solidFill>
-                        <a:srgbClr val="000000">
-                          <a:alpha val="0"/>
-                        </a:srgbClr>
-                      </a:solidFill>
-                      <a:prstDash val="solid"/>
-                      <a:round/>
-                      <a:headEnd type="none" w="sm" len="sm"/>
-                      <a:tailEnd type="none" w="sm" len="sm"/>
-                    </a:lnL>
-                    <a:lnR w="9525" cap="flat" cmpd="sng">
-                      <a:solidFill>
-                        <a:srgbClr val="000000">
-                          <a:alpha val="0"/>
-                        </a:srgbClr>
-                      </a:solidFill>
-                      <a:prstDash val="solid"/>
-                      <a:round/>
-                      <a:headEnd type="none" w="sm" len="sm"/>
-                      <a:tailEnd type="none" w="sm" len="sm"/>
-                    </a:lnR>
-                    <a:lnT w="9525" cap="flat" cmpd="sng">
-                      <a:solidFill>
-                        <a:srgbClr val="000000">
-                          <a:alpha val="0"/>
-                        </a:srgbClr>
-                      </a:solidFill>
-                      <a:prstDash val="solid"/>
-                      <a:round/>
-                      <a:headEnd type="none" w="sm" len="sm"/>
-                      <a:tailEnd type="none" w="sm" len="sm"/>
-                    </a:lnT>
-                    <a:lnB w="9525" cap="flat" cmpd="sng">
-                      <a:solidFill>
-                        <a:srgbClr val="000000">
-                          <a:alpha val="0"/>
-                        </a:srgbClr>
-                      </a:solidFill>
-                      <a:prstDash val="solid"/>
-                      <a:round/>
-                      <a:headEnd type="none" w="sm" len="sm"/>
-                      <a:tailEnd type="none" w="sm" len="sm"/>
-                    </a:lnB>
-                  </a:tcPr>
+                  <a:tcPr marL="63500" marR="63500" marT="25400" marB="25400" anchor="ctr"/>
                 </a:tc>
                 <a:tc>
                   <a:txBody>
@@ -13419,13 +12832,10 @@
                         <a:buNone/>
                       </a:pPr>
                       <a:r>
-                        <a:rPr lang="en-US" sz="1800" b="0" i="0" u="none" strike="noStrike" cap="none">
+                        <a:rPr lang="en-US" sz="1800" b="0" u="none" strike="noStrike" cap="none">
                           <a:solidFill>
                             <a:srgbClr val="333333"/>
                           </a:solidFill>
-                          <a:latin typeface="Helvetica Neue"/>
-                          <a:ea typeface="Helvetica Neue"/>
-                          <a:cs typeface="Helvetica Neue"/>
                           <a:sym typeface="Helvetica Neue"/>
                         </a:rPr>
                         <a:t>74.29%</a:t>
@@ -13433,52 +12843,7 @@
                       <a:endParaRPr sz="2000"/>
                     </a:p>
                   </a:txBody>
-                  <a:tcPr marL="63500" marR="63500" marT="25400" marB="25400" anchor="ctr">
-                    <a:lnL w="9525" cap="flat" cmpd="sng">
-                      <a:solidFill>
-                        <a:srgbClr val="000000">
-                          <a:alpha val="0"/>
-                        </a:srgbClr>
-                      </a:solidFill>
-                      <a:prstDash val="solid"/>
-                      <a:round/>
-                      <a:headEnd type="none" w="sm" len="sm"/>
-                      <a:tailEnd type="none" w="sm" len="sm"/>
-                    </a:lnL>
-                    <a:lnR w="9525" cap="flat" cmpd="sng">
-                      <a:solidFill>
-                        <a:srgbClr val="000000">
-                          <a:alpha val="0"/>
-                        </a:srgbClr>
-                      </a:solidFill>
-                      <a:prstDash val="solid"/>
-                      <a:round/>
-                      <a:headEnd type="none" w="sm" len="sm"/>
-                      <a:tailEnd type="none" w="sm" len="sm"/>
-                    </a:lnR>
-                    <a:lnT w="9525" cap="flat" cmpd="sng">
-                      <a:solidFill>
-                        <a:srgbClr val="000000">
-                          <a:alpha val="0"/>
-                        </a:srgbClr>
-                      </a:solidFill>
-                      <a:prstDash val="solid"/>
-                      <a:round/>
-                      <a:headEnd type="none" w="sm" len="sm"/>
-                      <a:tailEnd type="none" w="sm" len="sm"/>
-                    </a:lnT>
-                    <a:lnB w="9525" cap="flat" cmpd="sng">
-                      <a:solidFill>
-                        <a:srgbClr val="000000">
-                          <a:alpha val="0"/>
-                        </a:srgbClr>
-                      </a:solidFill>
-                      <a:prstDash val="solid"/>
-                      <a:round/>
-                      <a:headEnd type="none" w="sm" len="sm"/>
-                      <a:tailEnd type="none" w="sm" len="sm"/>
-                    </a:lnB>
-                  </a:tcPr>
+                  <a:tcPr marL="63500" marR="63500" marT="25400" marB="25400" anchor="ctr"/>
                 </a:tc>
                 <a:tc>
                   <a:txBody>
@@ -13495,13 +12860,10 @@
                         <a:buNone/>
                       </a:pPr>
                       <a:r>
-                        <a:rPr lang="en-US" sz="1800" b="1" i="0" u="none" strike="noStrike" cap="none">
+                        <a:rPr lang="en-US" sz="1800" b="1" u="none" strike="noStrike" cap="none">
                           <a:solidFill>
                             <a:srgbClr val="333333"/>
                           </a:solidFill>
-                          <a:latin typeface="Helvetica Neue"/>
-                          <a:ea typeface="Helvetica Neue"/>
-                          <a:cs typeface="Helvetica Neue"/>
                           <a:sym typeface="Helvetica Neue"/>
                         </a:rPr>
                         <a:t>71.78%</a:t>
@@ -13509,52 +12871,7 @@
                       <a:endParaRPr sz="2000"/>
                     </a:p>
                   </a:txBody>
-                  <a:tcPr marL="63500" marR="63500" marT="25400" marB="25400" anchor="ctr">
-                    <a:lnL w="9525" cap="flat" cmpd="sng">
-                      <a:solidFill>
-                        <a:srgbClr val="000000">
-                          <a:alpha val="0"/>
-                        </a:srgbClr>
-                      </a:solidFill>
-                      <a:prstDash val="solid"/>
-                      <a:round/>
-                      <a:headEnd type="none" w="sm" len="sm"/>
-                      <a:tailEnd type="none" w="sm" len="sm"/>
-                    </a:lnL>
-                    <a:lnR w="9525" cap="flat" cmpd="sng">
-                      <a:solidFill>
-                        <a:srgbClr val="000000">
-                          <a:alpha val="0"/>
-                        </a:srgbClr>
-                      </a:solidFill>
-                      <a:prstDash val="solid"/>
-                      <a:round/>
-                      <a:headEnd type="none" w="sm" len="sm"/>
-                      <a:tailEnd type="none" w="sm" len="sm"/>
-                    </a:lnR>
-                    <a:lnT w="9525" cap="flat" cmpd="sng">
-                      <a:solidFill>
-                        <a:srgbClr val="000000">
-                          <a:alpha val="0"/>
-                        </a:srgbClr>
-                      </a:solidFill>
-                      <a:prstDash val="solid"/>
-                      <a:round/>
-                      <a:headEnd type="none" w="sm" len="sm"/>
-                      <a:tailEnd type="none" w="sm" len="sm"/>
-                    </a:lnT>
-                    <a:lnB w="9525" cap="flat" cmpd="sng">
-                      <a:solidFill>
-                        <a:srgbClr val="000000">
-                          <a:alpha val="0"/>
-                        </a:srgbClr>
-                      </a:solidFill>
-                      <a:prstDash val="solid"/>
-                      <a:round/>
-                      <a:headEnd type="none" w="sm" len="sm"/>
-                      <a:tailEnd type="none" w="sm" len="sm"/>
-                    </a:lnB>
-                  </a:tcPr>
+                  <a:tcPr marL="63500" marR="63500" marT="25400" marB="25400" anchor="ctr"/>
                 </a:tc>
                 <a:tc>
                   <a:txBody>
@@ -13571,13 +12888,10 @@
                         <a:buNone/>
                       </a:pPr>
                       <a:r>
-                        <a:rPr lang="en-US" sz="1800" b="0" i="0" u="none" strike="noStrike" cap="none" dirty="0">
+                        <a:rPr lang="en-US" sz="1800" b="0" u="none" strike="noStrike" cap="none" dirty="0">
                           <a:solidFill>
                             <a:srgbClr val="333333"/>
                           </a:solidFill>
-                          <a:latin typeface="Helvetica Neue"/>
-                          <a:ea typeface="Helvetica Neue"/>
-                          <a:cs typeface="Helvetica Neue"/>
                           <a:sym typeface="Helvetica Neue"/>
                         </a:rPr>
                         <a:t>98.76%</a:t>
@@ -13585,52 +12899,7 @@
                       <a:endParaRPr sz="2000" dirty="0"/>
                     </a:p>
                   </a:txBody>
-                  <a:tcPr marL="63500" marR="63500" marT="25400" marB="25400" anchor="ctr">
-                    <a:lnL w="9525" cap="flat" cmpd="sng">
-                      <a:solidFill>
-                        <a:srgbClr val="000000">
-                          <a:alpha val="0"/>
-                        </a:srgbClr>
-                      </a:solidFill>
-                      <a:prstDash val="solid"/>
-                      <a:round/>
-                      <a:headEnd type="none" w="sm" len="sm"/>
-                      <a:tailEnd type="none" w="sm" len="sm"/>
-                    </a:lnL>
-                    <a:lnR w="9525" cap="flat" cmpd="sng">
-                      <a:solidFill>
-                        <a:srgbClr val="000000">
-                          <a:alpha val="0"/>
-                        </a:srgbClr>
-                      </a:solidFill>
-                      <a:prstDash val="solid"/>
-                      <a:round/>
-                      <a:headEnd type="none" w="sm" len="sm"/>
-                      <a:tailEnd type="none" w="sm" len="sm"/>
-                    </a:lnR>
-                    <a:lnT w="9525" cap="flat" cmpd="sng">
-                      <a:solidFill>
-                        <a:srgbClr val="000000">
-                          <a:alpha val="0"/>
-                        </a:srgbClr>
-                      </a:solidFill>
-                      <a:prstDash val="solid"/>
-                      <a:round/>
-                      <a:headEnd type="none" w="sm" len="sm"/>
-                      <a:tailEnd type="none" w="sm" len="sm"/>
-                    </a:lnT>
-                    <a:lnB w="9525" cap="flat" cmpd="sng">
-                      <a:solidFill>
-                        <a:srgbClr val="000000">
-                          <a:alpha val="0"/>
-                        </a:srgbClr>
-                      </a:solidFill>
-                      <a:prstDash val="solid"/>
-                      <a:round/>
-                      <a:headEnd type="none" w="sm" len="sm"/>
-                      <a:tailEnd type="none" w="sm" len="sm"/>
-                    </a:lnB>
-                  </a:tcPr>
+                  <a:tcPr marL="63500" marR="63500" marT="25400" marB="25400" anchor="ctr"/>
                 </a:tc>
                 <a:extLst>
                   <a:ext uri="{0D108BD9-81ED-4DB2-BD59-A6C34878D82A}">
@@ -15679,6 +14948,2975 @@
 </file>
 
 <file path=ppt/slides/slide24.xml><?xml version="1.0" encoding="utf-8"?>
+<p:sld xmlns:a="http://schemas.openxmlformats.org/drawingml/2006/main" xmlns:r="http://schemas.openxmlformats.org/officeDocument/2006/relationships" xmlns:p="http://schemas.openxmlformats.org/presentationml/2006/main">
+  <p:cSld>
+    <p:spTree>
+      <p:nvGrpSpPr>
+        <p:cNvPr id="1" name=""/>
+        <p:cNvGrpSpPr/>
+        <p:nvPr/>
+      </p:nvGrpSpPr>
+      <p:grpSpPr>
+        <a:xfrm>
+          <a:off x="0" y="0"/>
+          <a:ext cx="0" cy="0"/>
+          <a:chOff x="0" y="0"/>
+          <a:chExt cx="0" cy="0"/>
+        </a:xfrm>
+      </p:grpSpPr>
+      <p:graphicFrame>
+        <p:nvGraphicFramePr>
+          <p:cNvPr id="2" name="Table 1">
+            <a:extLst>
+              <a:ext uri="{FF2B5EF4-FFF2-40B4-BE49-F238E27FC236}">
+                <a16:creationId xmlns:a16="http://schemas.microsoft.com/office/drawing/2014/main" id="{333ED372-C9EE-5F17-79B9-7E01C064D8CF}"/>
+              </a:ext>
+            </a:extLst>
+          </p:cNvPr>
+          <p:cNvGraphicFramePr>
+            <a:graphicFrameLocks noGrp="1"/>
+          </p:cNvGraphicFramePr>
+          <p:nvPr>
+            <p:extLst>
+              <p:ext uri="{D42A27DB-BD31-4B8C-83A1-F6EECF244321}">
+                <p14:modId xmlns:p14="http://schemas.microsoft.com/office/powerpoint/2010/main" val="367831516"/>
+              </p:ext>
+            </p:extLst>
+          </p:nvPr>
+        </p:nvGraphicFramePr>
+        <p:xfrm>
+          <a:off x="1028698" y="1669312"/>
+          <a:ext cx="10401300" cy="3988536"/>
+        </p:xfrm>
+        <a:graphic>
+          <a:graphicData uri="http://schemas.openxmlformats.org/drawingml/2006/table">
+            <a:tbl>
+              <a:tblPr>
+                <a:tableStyleId>{B301B821-A1FF-4177-AEE7-76D212191A09}</a:tableStyleId>
+              </a:tblPr>
+              <a:tblGrid>
+                <a:gridCol w="2778125">
+                  <a:extLst>
+                    <a:ext uri="{9D8B030D-6E8A-4147-A177-3AD203B41FA5}">
+                      <a16:colId xmlns:a16="http://schemas.microsoft.com/office/drawing/2014/main" val="2998840343"/>
+                    </a:ext>
+                  </a:extLst>
+                </a:gridCol>
+                <a:gridCol w="1666875">
+                  <a:extLst>
+                    <a:ext uri="{9D8B030D-6E8A-4147-A177-3AD203B41FA5}">
+                      <a16:colId xmlns:a16="http://schemas.microsoft.com/office/drawing/2014/main" val="472041408"/>
+                    </a:ext>
+                  </a:extLst>
+                </a:gridCol>
+                <a:gridCol w="1666875">
+                  <a:extLst>
+                    <a:ext uri="{9D8B030D-6E8A-4147-A177-3AD203B41FA5}">
+                      <a16:colId xmlns:a16="http://schemas.microsoft.com/office/drawing/2014/main" val="3602447331"/>
+                    </a:ext>
+                  </a:extLst>
+                </a:gridCol>
+                <a:gridCol w="1666875">
+                  <a:extLst>
+                    <a:ext uri="{9D8B030D-6E8A-4147-A177-3AD203B41FA5}">
+                      <a16:colId xmlns:a16="http://schemas.microsoft.com/office/drawing/2014/main" val="2478312340"/>
+                    </a:ext>
+                  </a:extLst>
+                </a:gridCol>
+                <a:gridCol w="2622550">
+                  <a:extLst>
+                    <a:ext uri="{9D8B030D-6E8A-4147-A177-3AD203B41FA5}">
+                      <a16:colId xmlns:a16="http://schemas.microsoft.com/office/drawing/2014/main" val="3360315924"/>
+                    </a:ext>
+                  </a:extLst>
+                </a:gridCol>
+              </a:tblGrid>
+              <a:tr h="498567">
+                <a:tc>
+                  <a:txBody>
+                    <a:bodyPr/>
+                    <a:lstStyle/>
+                    <a:p>
+                      <a:pPr marL="0" marR="0" lvl="0" indent="0" algn="l" defTabSz="914400" rtl="0" eaLnBrk="1" latinLnBrk="0" hangingPunct="1">
+                        <a:spcBef>
+                          <a:spcPts val="0"/>
+                        </a:spcBef>
+                        <a:spcAft>
+                          <a:spcPts val="0"/>
+                        </a:spcAft>
+                        <a:buNone/>
+                      </a:pPr>
+                      <a:r>
+                        <a:rPr lang="en-PK" sz="1800" b="1" u="none" strike="noStrike" kern="1200" cap="none" dirty="0">
+                          <a:solidFill>
+                            <a:srgbClr val="003366"/>
+                          </a:solidFill>
+                          <a:latin typeface="+mn-lt"/>
+                          <a:ea typeface="+mn-ea"/>
+                          <a:cs typeface="+mn-cs"/>
+                        </a:rPr>
+                        <a:t>Model</a:t>
+                      </a:r>
+                    </a:p>
+                  </a:txBody>
+                  <a:tcPr marL="76200" marR="76200" marT="50800" marB="50800">
+                    <a:solidFill>
+                      <a:schemeClr val="tx2">
+                        <a:lumMod val="75000"/>
+                        <a:lumOff val="25000"/>
+                      </a:schemeClr>
+                    </a:solidFill>
+                  </a:tcPr>
+                </a:tc>
+                <a:tc>
+                  <a:txBody>
+                    <a:bodyPr/>
+                    <a:lstStyle/>
+                    <a:p>
+                      <a:pPr marL="0" marR="0" lvl="0" indent="0" algn="l" defTabSz="914400" rtl="0" eaLnBrk="1" latinLnBrk="0" hangingPunct="1">
+                        <a:spcBef>
+                          <a:spcPts val="0"/>
+                        </a:spcBef>
+                        <a:spcAft>
+                          <a:spcPts val="0"/>
+                        </a:spcAft>
+                        <a:buNone/>
+                      </a:pPr>
+                      <a:r>
+                        <a:rPr lang="en-PK" sz="1800" b="1" u="none" strike="noStrike" kern="1200" cap="none" dirty="0">
+                          <a:solidFill>
+                            <a:srgbClr val="003366"/>
+                          </a:solidFill>
+                          <a:latin typeface="+mn-lt"/>
+                          <a:ea typeface="+mn-ea"/>
+                          <a:cs typeface="+mn-cs"/>
+                        </a:rPr>
+                        <a:t>ROC-AUC</a:t>
+                      </a:r>
+                    </a:p>
+                  </a:txBody>
+                  <a:tcPr marL="76200" marR="76200" marT="50800" marB="50800">
+                    <a:solidFill>
+                      <a:schemeClr val="tx2">
+                        <a:lumMod val="75000"/>
+                        <a:lumOff val="25000"/>
+                      </a:schemeClr>
+                    </a:solidFill>
+                  </a:tcPr>
+                </a:tc>
+                <a:tc>
+                  <a:txBody>
+                    <a:bodyPr/>
+                    <a:lstStyle/>
+                    <a:p>
+                      <a:pPr marL="0" marR="0" lvl="0" indent="0" algn="l" defTabSz="914400" rtl="0" eaLnBrk="1" latinLnBrk="0" hangingPunct="1">
+                        <a:spcBef>
+                          <a:spcPts val="0"/>
+                        </a:spcBef>
+                        <a:spcAft>
+                          <a:spcPts val="0"/>
+                        </a:spcAft>
+                        <a:buNone/>
+                      </a:pPr>
+                      <a:r>
+                        <a:rPr lang="en-PK" sz="1800" b="1" u="none" strike="noStrike" kern="1200" cap="none" dirty="0">
+                          <a:solidFill>
+                            <a:srgbClr val="003366"/>
+                          </a:solidFill>
+                          <a:latin typeface="+mn-lt"/>
+                          <a:ea typeface="+mn-ea"/>
+                          <a:cs typeface="+mn-cs"/>
+                        </a:rPr>
+                        <a:t>Recall</a:t>
+                      </a:r>
+                    </a:p>
+                  </a:txBody>
+                  <a:tcPr marL="76200" marR="76200" marT="50800" marB="50800">
+                    <a:solidFill>
+                      <a:schemeClr val="tx2">
+                        <a:lumMod val="75000"/>
+                        <a:lumOff val="25000"/>
+                      </a:schemeClr>
+                    </a:solidFill>
+                  </a:tcPr>
+                </a:tc>
+                <a:tc>
+                  <a:txBody>
+                    <a:bodyPr/>
+                    <a:lstStyle/>
+                    <a:p>
+                      <a:pPr marL="0" marR="0" lvl="0" indent="0" algn="l" defTabSz="914400" rtl="0" eaLnBrk="1" latinLnBrk="0" hangingPunct="1">
+                        <a:spcBef>
+                          <a:spcPts val="0"/>
+                        </a:spcBef>
+                        <a:spcAft>
+                          <a:spcPts val="0"/>
+                        </a:spcAft>
+                        <a:buNone/>
+                      </a:pPr>
+                      <a:r>
+                        <a:rPr lang="en-PK" sz="1800" b="1" u="none" strike="noStrike" kern="1200" cap="none" dirty="0">
+                          <a:solidFill>
+                            <a:srgbClr val="003366"/>
+                          </a:solidFill>
+                          <a:latin typeface="+mn-lt"/>
+                          <a:ea typeface="+mn-ea"/>
+                          <a:cs typeface="+mn-cs"/>
+                        </a:rPr>
+                        <a:t>F1</a:t>
+                      </a:r>
+                    </a:p>
+                  </a:txBody>
+                  <a:tcPr marL="76200" marR="76200" marT="50800" marB="50800">
+                    <a:solidFill>
+                      <a:schemeClr val="tx2">
+                        <a:lumMod val="75000"/>
+                        <a:lumOff val="25000"/>
+                      </a:schemeClr>
+                    </a:solidFill>
+                  </a:tcPr>
+                </a:tc>
+                <a:tc>
+                  <a:txBody>
+                    <a:bodyPr/>
+                    <a:lstStyle/>
+                    <a:p>
+                      <a:pPr marL="0" marR="0" lvl="0" indent="0" algn="l" defTabSz="914400" rtl="0" eaLnBrk="1" latinLnBrk="0" hangingPunct="1">
+                        <a:spcBef>
+                          <a:spcPts val="0"/>
+                        </a:spcBef>
+                        <a:spcAft>
+                          <a:spcPts val="0"/>
+                        </a:spcAft>
+                        <a:buNone/>
+                      </a:pPr>
+                      <a:r>
+                        <a:rPr lang="en-PK" sz="1800" b="1" u="none" strike="noStrike" kern="1200" cap="none" dirty="0">
+                          <a:solidFill>
+                            <a:srgbClr val="003366"/>
+                          </a:solidFill>
+                          <a:latin typeface="+mn-lt"/>
+                          <a:ea typeface="+mn-ea"/>
+                          <a:cs typeface="+mn-cs"/>
+                        </a:rPr>
+                        <a:t>Ranking</a:t>
+                      </a:r>
+                    </a:p>
+                  </a:txBody>
+                  <a:tcPr marL="76200" marR="76200" marT="50800" marB="50800">
+                    <a:solidFill>
+                      <a:schemeClr val="tx2">
+                        <a:lumMod val="75000"/>
+                        <a:lumOff val="25000"/>
+                      </a:schemeClr>
+                    </a:solidFill>
+                  </a:tcPr>
+                </a:tc>
+                <a:extLst>
+                  <a:ext uri="{0D108BD9-81ED-4DB2-BD59-A6C34878D82A}">
+                    <a16:rowId xmlns:a16="http://schemas.microsoft.com/office/drawing/2014/main" val="2779425814"/>
+                  </a:ext>
+                </a:extLst>
+              </a:tr>
+              <a:tr h="498567">
+                <a:tc>
+                  <a:txBody>
+                    <a:bodyPr/>
+                    <a:lstStyle/>
+                    <a:p>
+                      <a:pPr marL="0" marR="0" lvl="0" indent="0" algn="l" defTabSz="914400" rtl="0" eaLnBrk="1" latinLnBrk="0" hangingPunct="1">
+                        <a:spcBef>
+                          <a:spcPts val="0"/>
+                        </a:spcBef>
+                        <a:spcAft>
+                          <a:spcPts val="0"/>
+                        </a:spcAft>
+                        <a:buNone/>
+                      </a:pPr>
+                      <a:r>
+                        <a:rPr lang="en-PK" sz="1800" b="0" u="none" strike="noStrike" kern="1200" cap="none" dirty="0">
+                          <a:solidFill>
+                            <a:srgbClr val="333333"/>
+                          </a:solidFill>
+                        </a:rPr>
+                        <a:t>CNN Classifier</a:t>
+                      </a:r>
+                      <a:endParaRPr lang="en-PK" sz="1800" b="0" u="none" strike="noStrike" kern="1200" cap="none" dirty="0">
+                        <a:solidFill>
+                          <a:srgbClr val="333333"/>
+                        </a:solidFill>
+                        <a:latin typeface="+mn-lt"/>
+                        <a:ea typeface="+mn-ea"/>
+                        <a:cs typeface="+mn-cs"/>
+                      </a:endParaRPr>
+                    </a:p>
+                  </a:txBody>
+                  <a:tcPr marL="76200" marR="76200" marT="50800" marB="50800"/>
+                </a:tc>
+                <a:tc>
+                  <a:txBody>
+                    <a:bodyPr/>
+                    <a:lstStyle/>
+                    <a:p>
+                      <a:pPr marL="0" marR="0" lvl="0" indent="0" algn="l" defTabSz="914400" rtl="0" eaLnBrk="1" latinLnBrk="0" hangingPunct="1">
+                        <a:spcBef>
+                          <a:spcPts val="0"/>
+                        </a:spcBef>
+                        <a:spcAft>
+                          <a:spcPts val="0"/>
+                        </a:spcAft>
+                        <a:buNone/>
+                      </a:pPr>
+                      <a:r>
+                        <a:rPr lang="en-PK" sz="1800" b="0" u="none" strike="noStrike" kern="1200" cap="none" dirty="0">
+                          <a:solidFill>
+                            <a:srgbClr val="333333"/>
+                          </a:solidFill>
+                        </a:rPr>
+                        <a:t>0.9978</a:t>
+                      </a:r>
+                      <a:endParaRPr lang="en-PK" sz="1800" b="0" u="none" strike="noStrike" kern="1200" cap="none" dirty="0">
+                        <a:solidFill>
+                          <a:srgbClr val="333333"/>
+                        </a:solidFill>
+                        <a:latin typeface="+mn-lt"/>
+                        <a:ea typeface="+mn-ea"/>
+                        <a:cs typeface="+mn-cs"/>
+                      </a:endParaRPr>
+                    </a:p>
+                  </a:txBody>
+                  <a:tcPr marL="76200" marR="76200" marT="50800" marB="50800"/>
+                </a:tc>
+                <a:tc>
+                  <a:txBody>
+                    <a:bodyPr/>
+                    <a:lstStyle/>
+                    <a:p>
+                      <a:pPr marL="0" marR="0" lvl="0" indent="0" algn="l" defTabSz="914400" rtl="0" eaLnBrk="1" latinLnBrk="0" hangingPunct="1">
+                        <a:spcBef>
+                          <a:spcPts val="0"/>
+                        </a:spcBef>
+                        <a:spcAft>
+                          <a:spcPts val="0"/>
+                        </a:spcAft>
+                        <a:buNone/>
+                      </a:pPr>
+                      <a:r>
+                        <a:rPr lang="en-PK" sz="1800" b="0" u="none" strike="noStrike" kern="1200" cap="none" dirty="0">
+                          <a:solidFill>
+                            <a:srgbClr val="333333"/>
+                          </a:solidFill>
+                        </a:rPr>
+                        <a:t>1.00</a:t>
+                      </a:r>
+                      <a:endParaRPr lang="en-PK" sz="1800" b="0" u="none" strike="noStrike" kern="1200" cap="none" dirty="0">
+                        <a:solidFill>
+                          <a:srgbClr val="333333"/>
+                        </a:solidFill>
+                        <a:latin typeface="+mn-lt"/>
+                        <a:ea typeface="+mn-ea"/>
+                        <a:cs typeface="+mn-cs"/>
+                      </a:endParaRPr>
+                    </a:p>
+                  </a:txBody>
+                  <a:tcPr marL="76200" marR="76200" marT="50800" marB="50800"/>
+                </a:tc>
+                <a:tc>
+                  <a:txBody>
+                    <a:bodyPr/>
+                    <a:lstStyle/>
+                    <a:p>
+                      <a:pPr marL="0" marR="0" lvl="0" indent="0" algn="l" defTabSz="914400" rtl="0" eaLnBrk="1" latinLnBrk="0" hangingPunct="1">
+                        <a:spcBef>
+                          <a:spcPts val="0"/>
+                        </a:spcBef>
+                        <a:spcAft>
+                          <a:spcPts val="0"/>
+                        </a:spcAft>
+                        <a:buNone/>
+                      </a:pPr>
+                      <a:r>
+                        <a:rPr lang="en-PK" sz="1800" b="0" u="none" strike="noStrike" kern="1200" cap="none" dirty="0">
+                          <a:solidFill>
+                            <a:srgbClr val="333333"/>
+                          </a:solidFill>
+                        </a:rPr>
+                        <a:t>0.16</a:t>
+                      </a:r>
+                      <a:endParaRPr lang="en-PK" sz="1800" b="0" u="none" strike="noStrike" kern="1200" cap="none" dirty="0">
+                        <a:solidFill>
+                          <a:srgbClr val="333333"/>
+                        </a:solidFill>
+                        <a:latin typeface="+mn-lt"/>
+                        <a:ea typeface="+mn-ea"/>
+                        <a:cs typeface="+mn-cs"/>
+                      </a:endParaRPr>
+                    </a:p>
+                  </a:txBody>
+                  <a:tcPr marL="76200" marR="76200" marT="50800" marB="50800"/>
+                </a:tc>
+                <a:tc>
+                  <a:txBody>
+                    <a:bodyPr/>
+                    <a:lstStyle/>
+                    <a:p>
+                      <a:pPr marL="0" marR="0" lvl="0" indent="0" algn="l" defTabSz="914400" rtl="0" eaLnBrk="1" latinLnBrk="0" hangingPunct="1">
+                        <a:spcBef>
+                          <a:spcPts val="0"/>
+                        </a:spcBef>
+                        <a:spcAft>
+                          <a:spcPts val="0"/>
+                        </a:spcAft>
+                        <a:buNone/>
+                      </a:pPr>
+                      <a:r>
+                        <a:rPr lang="en-PK" sz="1800" b="0" u="none" strike="noStrike" kern="1200" cap="none" dirty="0">
+                          <a:solidFill>
+                            <a:srgbClr val="333333"/>
+                          </a:solidFill>
+                        </a:rPr>
+                        <a:t>1st ✅</a:t>
+                      </a:r>
+                      <a:endParaRPr lang="en-PK" sz="1800" b="0" u="none" strike="noStrike" kern="1200" cap="none" dirty="0">
+                        <a:solidFill>
+                          <a:srgbClr val="333333"/>
+                        </a:solidFill>
+                        <a:latin typeface="+mn-lt"/>
+                        <a:ea typeface="+mn-ea"/>
+                        <a:cs typeface="+mn-cs"/>
+                      </a:endParaRPr>
+                    </a:p>
+                  </a:txBody>
+                  <a:tcPr marL="76200" marR="76200" marT="50800" marB="50800"/>
+                </a:tc>
+                <a:extLst>
+                  <a:ext uri="{0D108BD9-81ED-4DB2-BD59-A6C34878D82A}">
+                    <a16:rowId xmlns:a16="http://schemas.microsoft.com/office/drawing/2014/main" val="1673659576"/>
+                  </a:ext>
+                </a:extLst>
+              </a:tr>
+              <a:tr h="498567">
+                <a:tc>
+                  <a:txBody>
+                    <a:bodyPr/>
+                    <a:lstStyle/>
+                    <a:p>
+                      <a:pPr marL="0" marR="0" lvl="0" indent="0" algn="l" defTabSz="914400" rtl="0" eaLnBrk="1" latinLnBrk="0" hangingPunct="1">
+                        <a:spcBef>
+                          <a:spcPts val="0"/>
+                        </a:spcBef>
+                        <a:spcAft>
+                          <a:spcPts val="0"/>
+                        </a:spcAft>
+                        <a:buNone/>
+                      </a:pPr>
+                      <a:r>
+                        <a:rPr lang="en-PK" sz="1800" b="0" u="none" strike="noStrike" kern="1200" cap="none" dirty="0">
+                          <a:solidFill>
+                            <a:srgbClr val="333333"/>
+                          </a:solidFill>
+                        </a:rPr>
+                        <a:t>Random Forest</a:t>
+                      </a:r>
+                      <a:endParaRPr lang="en-PK" sz="1800" b="0" u="none" strike="noStrike" kern="1200" cap="none" dirty="0">
+                        <a:solidFill>
+                          <a:srgbClr val="333333"/>
+                        </a:solidFill>
+                        <a:latin typeface="+mn-lt"/>
+                        <a:ea typeface="+mn-ea"/>
+                        <a:cs typeface="+mn-cs"/>
+                      </a:endParaRPr>
+                    </a:p>
+                  </a:txBody>
+                  <a:tcPr marL="76200" marR="76200" marT="50800" marB="50800"/>
+                </a:tc>
+                <a:tc>
+                  <a:txBody>
+                    <a:bodyPr/>
+                    <a:lstStyle/>
+                    <a:p>
+                      <a:pPr marL="0" marR="0" lvl="0" indent="0" algn="l" defTabSz="914400" rtl="0" eaLnBrk="1" latinLnBrk="0" hangingPunct="1">
+                        <a:spcBef>
+                          <a:spcPts val="0"/>
+                        </a:spcBef>
+                        <a:spcAft>
+                          <a:spcPts val="0"/>
+                        </a:spcAft>
+                        <a:buNone/>
+                      </a:pPr>
+                      <a:r>
+                        <a:rPr lang="en-PK" sz="1800" b="0" u="none" strike="noStrike" kern="1200" cap="none">
+                          <a:solidFill>
+                            <a:srgbClr val="333333"/>
+                          </a:solidFill>
+                        </a:rPr>
+                        <a:t>0.9902</a:t>
+                      </a:r>
+                      <a:endParaRPr lang="en-PK" sz="1800" b="0" u="none" strike="noStrike" kern="1200" cap="none">
+                        <a:solidFill>
+                          <a:srgbClr val="333333"/>
+                        </a:solidFill>
+                        <a:latin typeface="+mn-lt"/>
+                        <a:ea typeface="+mn-ea"/>
+                        <a:cs typeface="+mn-cs"/>
+                      </a:endParaRPr>
+                    </a:p>
+                  </a:txBody>
+                  <a:tcPr marL="76200" marR="76200" marT="50800" marB="50800"/>
+                </a:tc>
+                <a:tc>
+                  <a:txBody>
+                    <a:bodyPr/>
+                    <a:lstStyle/>
+                    <a:p>
+                      <a:pPr marL="0" marR="0" lvl="0" indent="0" algn="l" defTabSz="914400" rtl="0" eaLnBrk="1" latinLnBrk="0" hangingPunct="1">
+                        <a:spcBef>
+                          <a:spcPts val="0"/>
+                        </a:spcBef>
+                        <a:spcAft>
+                          <a:spcPts val="0"/>
+                        </a:spcAft>
+                        <a:buNone/>
+                      </a:pPr>
+                      <a:r>
+                        <a:rPr lang="en-PK" sz="1800" b="0" u="none" strike="noStrike" kern="1200" cap="none">
+                          <a:solidFill>
+                            <a:srgbClr val="333333"/>
+                          </a:solidFill>
+                        </a:rPr>
+                        <a:t>0.89</a:t>
+                      </a:r>
+                      <a:endParaRPr lang="en-PK" sz="1800" b="0" u="none" strike="noStrike" kern="1200" cap="none">
+                        <a:solidFill>
+                          <a:srgbClr val="333333"/>
+                        </a:solidFill>
+                        <a:latin typeface="+mn-lt"/>
+                        <a:ea typeface="+mn-ea"/>
+                        <a:cs typeface="+mn-cs"/>
+                      </a:endParaRPr>
+                    </a:p>
+                  </a:txBody>
+                  <a:tcPr marL="76200" marR="76200" marT="50800" marB="50800"/>
+                </a:tc>
+                <a:tc>
+                  <a:txBody>
+                    <a:bodyPr/>
+                    <a:lstStyle/>
+                    <a:p>
+                      <a:pPr marL="0" marR="0" lvl="0" indent="0" algn="l" defTabSz="914400" rtl="0" eaLnBrk="1" latinLnBrk="0" hangingPunct="1">
+                        <a:spcBef>
+                          <a:spcPts val="0"/>
+                        </a:spcBef>
+                        <a:spcAft>
+                          <a:spcPts val="0"/>
+                        </a:spcAft>
+                        <a:buNone/>
+                      </a:pPr>
+                      <a:r>
+                        <a:rPr lang="en-PK" sz="1800" b="0" u="none" strike="noStrike" kern="1200" cap="none">
+                          <a:solidFill>
+                            <a:srgbClr val="333333"/>
+                          </a:solidFill>
+                        </a:rPr>
+                        <a:t>0.44</a:t>
+                      </a:r>
+                      <a:endParaRPr lang="en-PK" sz="1800" b="0" u="none" strike="noStrike" kern="1200" cap="none">
+                        <a:solidFill>
+                          <a:srgbClr val="333333"/>
+                        </a:solidFill>
+                        <a:latin typeface="+mn-lt"/>
+                        <a:ea typeface="+mn-ea"/>
+                        <a:cs typeface="+mn-cs"/>
+                      </a:endParaRPr>
+                    </a:p>
+                  </a:txBody>
+                  <a:tcPr marL="76200" marR="76200" marT="50800" marB="50800"/>
+                </a:tc>
+                <a:tc>
+                  <a:txBody>
+                    <a:bodyPr/>
+                    <a:lstStyle/>
+                    <a:p>
+                      <a:pPr marL="0" marR="0" lvl="0" indent="0" algn="l" defTabSz="914400" rtl="0" eaLnBrk="1" latinLnBrk="0" hangingPunct="1">
+                        <a:spcBef>
+                          <a:spcPts val="0"/>
+                        </a:spcBef>
+                        <a:spcAft>
+                          <a:spcPts val="0"/>
+                        </a:spcAft>
+                        <a:buNone/>
+                      </a:pPr>
+                      <a:r>
+                        <a:rPr lang="en-PK" sz="1800" b="0" u="none" strike="noStrike" kern="1200" cap="none">
+                          <a:solidFill>
+                            <a:srgbClr val="333333"/>
+                          </a:solidFill>
+                        </a:rPr>
+                        <a:t>2nd ✅</a:t>
+                      </a:r>
+                      <a:endParaRPr lang="en-PK" sz="1800" b="0" u="none" strike="noStrike" kern="1200" cap="none">
+                        <a:solidFill>
+                          <a:srgbClr val="333333"/>
+                        </a:solidFill>
+                        <a:latin typeface="+mn-lt"/>
+                        <a:ea typeface="+mn-ea"/>
+                        <a:cs typeface="+mn-cs"/>
+                      </a:endParaRPr>
+                    </a:p>
+                  </a:txBody>
+                  <a:tcPr marL="76200" marR="76200" marT="50800" marB="50800"/>
+                </a:tc>
+                <a:extLst>
+                  <a:ext uri="{0D108BD9-81ED-4DB2-BD59-A6C34878D82A}">
+                    <a16:rowId xmlns:a16="http://schemas.microsoft.com/office/drawing/2014/main" val="80439868"/>
+                  </a:ext>
+                </a:extLst>
+              </a:tr>
+              <a:tr h="498567">
+                <a:tc>
+                  <a:txBody>
+                    <a:bodyPr/>
+                    <a:lstStyle/>
+                    <a:p>
+                      <a:pPr marL="0" marR="0" lvl="0" indent="0" algn="l" defTabSz="914400" rtl="0" eaLnBrk="1" latinLnBrk="0" hangingPunct="1">
+                        <a:spcBef>
+                          <a:spcPts val="0"/>
+                        </a:spcBef>
+                        <a:spcAft>
+                          <a:spcPts val="0"/>
+                        </a:spcAft>
+                        <a:buNone/>
+                      </a:pPr>
+                      <a:r>
+                        <a:rPr lang="en-PK" sz="1800" b="0" u="none" strike="noStrike" kern="1200" cap="none" dirty="0">
+                          <a:solidFill>
+                            <a:srgbClr val="333333"/>
+                          </a:solidFill>
+                        </a:rPr>
+                        <a:t>LSTM Autoencoder</a:t>
+                      </a:r>
+                      <a:endParaRPr lang="en-PK" sz="1800" b="0" u="none" strike="noStrike" kern="1200" cap="none" dirty="0">
+                        <a:solidFill>
+                          <a:srgbClr val="333333"/>
+                        </a:solidFill>
+                        <a:latin typeface="+mn-lt"/>
+                        <a:ea typeface="+mn-ea"/>
+                        <a:cs typeface="+mn-cs"/>
+                      </a:endParaRPr>
+                    </a:p>
+                  </a:txBody>
+                  <a:tcPr marL="76200" marR="76200" marT="50800" marB="50800"/>
+                </a:tc>
+                <a:tc>
+                  <a:txBody>
+                    <a:bodyPr/>
+                    <a:lstStyle/>
+                    <a:p>
+                      <a:pPr marL="0" marR="0" lvl="0" indent="0" algn="l" defTabSz="914400" rtl="0" eaLnBrk="1" latinLnBrk="0" hangingPunct="1">
+                        <a:spcBef>
+                          <a:spcPts val="0"/>
+                        </a:spcBef>
+                        <a:spcAft>
+                          <a:spcPts val="0"/>
+                        </a:spcAft>
+                        <a:buNone/>
+                      </a:pPr>
+                      <a:r>
+                        <a:rPr lang="en-PK" sz="1800" b="0" u="none" strike="noStrike" kern="1200" cap="none" dirty="0">
+                          <a:solidFill>
+                            <a:srgbClr val="333333"/>
+                          </a:solidFill>
+                        </a:rPr>
+                        <a:t>0.9822</a:t>
+                      </a:r>
+                      <a:endParaRPr lang="en-PK" sz="1800" b="0" u="none" strike="noStrike" kern="1200" cap="none" dirty="0">
+                        <a:solidFill>
+                          <a:srgbClr val="333333"/>
+                        </a:solidFill>
+                        <a:latin typeface="+mn-lt"/>
+                        <a:ea typeface="+mn-ea"/>
+                        <a:cs typeface="+mn-cs"/>
+                      </a:endParaRPr>
+                    </a:p>
+                  </a:txBody>
+                  <a:tcPr marL="76200" marR="76200" marT="50800" marB="50800"/>
+                </a:tc>
+                <a:tc>
+                  <a:txBody>
+                    <a:bodyPr/>
+                    <a:lstStyle/>
+                    <a:p>
+                      <a:pPr marL="0" marR="0" lvl="0" indent="0" algn="l" defTabSz="914400" rtl="0" eaLnBrk="1" latinLnBrk="0" hangingPunct="1">
+                        <a:spcBef>
+                          <a:spcPts val="0"/>
+                        </a:spcBef>
+                        <a:spcAft>
+                          <a:spcPts val="0"/>
+                        </a:spcAft>
+                        <a:buNone/>
+                      </a:pPr>
+                      <a:r>
+                        <a:rPr lang="en-PK" sz="1800" b="0" u="none" strike="noStrike" kern="1200" cap="none">
+                          <a:solidFill>
+                            <a:srgbClr val="333333"/>
+                          </a:solidFill>
+                        </a:rPr>
+                        <a:t>0.93</a:t>
+                      </a:r>
+                      <a:endParaRPr lang="en-PK" sz="1800" b="0" u="none" strike="noStrike" kern="1200" cap="none">
+                        <a:solidFill>
+                          <a:srgbClr val="333333"/>
+                        </a:solidFill>
+                        <a:latin typeface="+mn-lt"/>
+                        <a:ea typeface="+mn-ea"/>
+                        <a:cs typeface="+mn-cs"/>
+                      </a:endParaRPr>
+                    </a:p>
+                  </a:txBody>
+                  <a:tcPr marL="76200" marR="76200" marT="50800" marB="50800"/>
+                </a:tc>
+                <a:tc>
+                  <a:txBody>
+                    <a:bodyPr/>
+                    <a:lstStyle/>
+                    <a:p>
+                      <a:pPr marL="0" marR="0" lvl="0" indent="0" algn="l" defTabSz="914400" rtl="0" eaLnBrk="1" latinLnBrk="0" hangingPunct="1">
+                        <a:spcBef>
+                          <a:spcPts val="0"/>
+                        </a:spcBef>
+                        <a:spcAft>
+                          <a:spcPts val="0"/>
+                        </a:spcAft>
+                        <a:buNone/>
+                      </a:pPr>
+                      <a:r>
+                        <a:rPr lang="en-PK" sz="1800" b="0" u="none" strike="noStrike" kern="1200" cap="none">
+                          <a:solidFill>
+                            <a:srgbClr val="333333"/>
+                          </a:solidFill>
+                        </a:rPr>
+                        <a:t>0.05</a:t>
+                      </a:r>
+                      <a:endParaRPr lang="en-PK" sz="1800" b="0" u="none" strike="noStrike" kern="1200" cap="none">
+                        <a:solidFill>
+                          <a:srgbClr val="333333"/>
+                        </a:solidFill>
+                        <a:latin typeface="+mn-lt"/>
+                        <a:ea typeface="+mn-ea"/>
+                        <a:cs typeface="+mn-cs"/>
+                      </a:endParaRPr>
+                    </a:p>
+                  </a:txBody>
+                  <a:tcPr marL="76200" marR="76200" marT="50800" marB="50800"/>
+                </a:tc>
+                <a:tc>
+                  <a:txBody>
+                    <a:bodyPr/>
+                    <a:lstStyle/>
+                    <a:p>
+                      <a:pPr marL="0" marR="0" lvl="0" indent="0" algn="l" defTabSz="914400" rtl="0" eaLnBrk="1" latinLnBrk="0" hangingPunct="1">
+                        <a:spcBef>
+                          <a:spcPts val="0"/>
+                        </a:spcBef>
+                        <a:spcAft>
+                          <a:spcPts val="0"/>
+                        </a:spcAft>
+                        <a:buNone/>
+                      </a:pPr>
+                      <a:r>
+                        <a:rPr lang="en-PK" sz="1800" b="0" u="none" strike="noStrike" kern="1200" cap="none">
+                          <a:solidFill>
+                            <a:srgbClr val="333333"/>
+                          </a:solidFill>
+                        </a:rPr>
+                        <a:t>3rd</a:t>
+                      </a:r>
+                      <a:endParaRPr lang="en-PK" sz="1800" b="0" u="none" strike="noStrike" kern="1200" cap="none">
+                        <a:solidFill>
+                          <a:srgbClr val="333333"/>
+                        </a:solidFill>
+                        <a:latin typeface="+mn-lt"/>
+                        <a:ea typeface="+mn-ea"/>
+                        <a:cs typeface="+mn-cs"/>
+                      </a:endParaRPr>
+                    </a:p>
+                  </a:txBody>
+                  <a:tcPr marL="76200" marR="76200" marT="50800" marB="50800"/>
+                </a:tc>
+                <a:extLst>
+                  <a:ext uri="{0D108BD9-81ED-4DB2-BD59-A6C34878D82A}">
+                    <a16:rowId xmlns:a16="http://schemas.microsoft.com/office/drawing/2014/main" val="2029922477"/>
+                  </a:ext>
+                </a:extLst>
+              </a:tr>
+              <a:tr h="498567">
+                <a:tc>
+                  <a:txBody>
+                    <a:bodyPr/>
+                    <a:lstStyle/>
+                    <a:p>
+                      <a:pPr marL="0" marR="0" lvl="0" indent="0" algn="l" defTabSz="914400" rtl="0" eaLnBrk="1" latinLnBrk="0" hangingPunct="1">
+                        <a:spcBef>
+                          <a:spcPts val="0"/>
+                        </a:spcBef>
+                        <a:spcAft>
+                          <a:spcPts val="0"/>
+                        </a:spcAft>
+                        <a:buNone/>
+                      </a:pPr>
+                      <a:r>
+                        <a:rPr lang="en-PK" sz="1800" b="0" u="none" strike="noStrike" kern="1200" cap="none" dirty="0">
+                          <a:solidFill>
+                            <a:srgbClr val="333333"/>
+                          </a:solidFill>
+                        </a:rPr>
+                        <a:t>Isolation Forest</a:t>
+                      </a:r>
+                      <a:endParaRPr lang="en-PK" sz="1800" b="0" u="none" strike="noStrike" kern="1200" cap="none" dirty="0">
+                        <a:solidFill>
+                          <a:srgbClr val="333333"/>
+                        </a:solidFill>
+                        <a:latin typeface="+mn-lt"/>
+                        <a:ea typeface="+mn-ea"/>
+                        <a:cs typeface="+mn-cs"/>
+                      </a:endParaRPr>
+                    </a:p>
+                  </a:txBody>
+                  <a:tcPr marL="76200" marR="76200" marT="50800" marB="50800"/>
+                </a:tc>
+                <a:tc>
+                  <a:txBody>
+                    <a:bodyPr/>
+                    <a:lstStyle/>
+                    <a:p>
+                      <a:pPr marL="0" marR="0" lvl="0" indent="0" algn="l" defTabSz="914400" rtl="0" eaLnBrk="1" latinLnBrk="0" hangingPunct="1">
+                        <a:spcBef>
+                          <a:spcPts val="0"/>
+                        </a:spcBef>
+                        <a:spcAft>
+                          <a:spcPts val="0"/>
+                        </a:spcAft>
+                        <a:buNone/>
+                      </a:pPr>
+                      <a:r>
+                        <a:rPr lang="en-PK" sz="1800" b="0" u="none" strike="noStrike" kern="1200" cap="none">
+                          <a:solidFill>
+                            <a:srgbClr val="333333"/>
+                          </a:solidFill>
+                        </a:rPr>
+                        <a:t>0.9559</a:t>
+                      </a:r>
+                      <a:endParaRPr lang="en-PK" sz="1800" b="0" u="none" strike="noStrike" kern="1200" cap="none">
+                        <a:solidFill>
+                          <a:srgbClr val="333333"/>
+                        </a:solidFill>
+                        <a:latin typeface="+mn-lt"/>
+                        <a:ea typeface="+mn-ea"/>
+                        <a:cs typeface="+mn-cs"/>
+                      </a:endParaRPr>
+                    </a:p>
+                  </a:txBody>
+                  <a:tcPr marL="76200" marR="76200" marT="50800" marB="50800"/>
+                </a:tc>
+                <a:tc>
+                  <a:txBody>
+                    <a:bodyPr/>
+                    <a:lstStyle/>
+                    <a:p>
+                      <a:pPr marL="0" marR="0" lvl="0" indent="0" algn="l" defTabSz="914400" rtl="0" eaLnBrk="1" latinLnBrk="0" hangingPunct="1">
+                        <a:spcBef>
+                          <a:spcPts val="0"/>
+                        </a:spcBef>
+                        <a:spcAft>
+                          <a:spcPts val="0"/>
+                        </a:spcAft>
+                        <a:buNone/>
+                      </a:pPr>
+                      <a:r>
+                        <a:rPr lang="en-PK" sz="1800" b="0" u="none" strike="noStrike" kern="1200" cap="none" dirty="0">
+                          <a:solidFill>
+                            <a:srgbClr val="333333"/>
+                          </a:solidFill>
+                        </a:rPr>
+                        <a:t>0.04</a:t>
+                      </a:r>
+                      <a:endParaRPr lang="en-PK" sz="1800" b="0" u="none" strike="noStrike" kern="1200" cap="none" dirty="0">
+                        <a:solidFill>
+                          <a:srgbClr val="333333"/>
+                        </a:solidFill>
+                        <a:latin typeface="+mn-lt"/>
+                        <a:ea typeface="+mn-ea"/>
+                        <a:cs typeface="+mn-cs"/>
+                      </a:endParaRPr>
+                    </a:p>
+                  </a:txBody>
+                  <a:tcPr marL="76200" marR="76200" marT="50800" marB="50800"/>
+                </a:tc>
+                <a:tc>
+                  <a:txBody>
+                    <a:bodyPr/>
+                    <a:lstStyle/>
+                    <a:p>
+                      <a:pPr marL="0" marR="0" lvl="0" indent="0" algn="l" defTabSz="914400" rtl="0" eaLnBrk="1" latinLnBrk="0" hangingPunct="1">
+                        <a:spcBef>
+                          <a:spcPts val="0"/>
+                        </a:spcBef>
+                        <a:spcAft>
+                          <a:spcPts val="0"/>
+                        </a:spcAft>
+                        <a:buNone/>
+                      </a:pPr>
+                      <a:r>
+                        <a:rPr lang="en-PK" sz="1800" b="0" u="none" strike="noStrike" kern="1200" cap="none">
+                          <a:solidFill>
+                            <a:srgbClr val="333333"/>
+                          </a:solidFill>
+                        </a:rPr>
+                        <a:t>0.04</a:t>
+                      </a:r>
+                      <a:endParaRPr lang="en-PK" sz="1800" b="0" u="none" strike="noStrike" kern="1200" cap="none">
+                        <a:solidFill>
+                          <a:srgbClr val="333333"/>
+                        </a:solidFill>
+                        <a:latin typeface="+mn-lt"/>
+                        <a:ea typeface="+mn-ea"/>
+                        <a:cs typeface="+mn-cs"/>
+                      </a:endParaRPr>
+                    </a:p>
+                  </a:txBody>
+                  <a:tcPr marL="76200" marR="76200" marT="50800" marB="50800"/>
+                </a:tc>
+                <a:tc>
+                  <a:txBody>
+                    <a:bodyPr/>
+                    <a:lstStyle/>
+                    <a:p>
+                      <a:pPr marL="0" marR="0" lvl="0" indent="0" algn="l" defTabSz="914400" rtl="0" eaLnBrk="1" latinLnBrk="0" hangingPunct="1">
+                        <a:spcBef>
+                          <a:spcPts val="0"/>
+                        </a:spcBef>
+                        <a:spcAft>
+                          <a:spcPts val="0"/>
+                        </a:spcAft>
+                        <a:buNone/>
+                      </a:pPr>
+                      <a:r>
+                        <a:rPr lang="en-PK" sz="1800" b="0" u="none" strike="noStrike" kern="1200" cap="none">
+                          <a:solidFill>
+                            <a:srgbClr val="333333"/>
+                          </a:solidFill>
+                        </a:rPr>
+                        <a:t>4th</a:t>
+                      </a:r>
+                      <a:endParaRPr lang="en-PK" sz="1800" b="0" u="none" strike="noStrike" kern="1200" cap="none">
+                        <a:solidFill>
+                          <a:srgbClr val="333333"/>
+                        </a:solidFill>
+                        <a:latin typeface="+mn-lt"/>
+                        <a:ea typeface="+mn-ea"/>
+                        <a:cs typeface="+mn-cs"/>
+                      </a:endParaRPr>
+                    </a:p>
+                  </a:txBody>
+                  <a:tcPr marL="76200" marR="76200" marT="50800" marB="50800"/>
+                </a:tc>
+                <a:extLst>
+                  <a:ext uri="{0D108BD9-81ED-4DB2-BD59-A6C34878D82A}">
+                    <a16:rowId xmlns:a16="http://schemas.microsoft.com/office/drawing/2014/main" val="2882819450"/>
+                  </a:ext>
+                </a:extLst>
+              </a:tr>
+              <a:tr h="498567">
+                <a:tc>
+                  <a:txBody>
+                    <a:bodyPr/>
+                    <a:lstStyle/>
+                    <a:p>
+                      <a:pPr marL="0" marR="0" lvl="0" indent="0" algn="l" defTabSz="914400" rtl="0" eaLnBrk="1" latinLnBrk="0" hangingPunct="1">
+                        <a:spcBef>
+                          <a:spcPts val="0"/>
+                        </a:spcBef>
+                        <a:spcAft>
+                          <a:spcPts val="0"/>
+                        </a:spcAft>
+                        <a:buNone/>
+                      </a:pPr>
+                      <a:r>
+                        <a:rPr lang="en-PK" sz="1800" b="0" u="none" strike="noStrike" kern="1200" cap="none">
+                          <a:solidFill>
+                            <a:srgbClr val="333333"/>
+                          </a:solidFill>
+                        </a:rPr>
+                        <a:t>VAE</a:t>
+                      </a:r>
+                      <a:endParaRPr lang="en-PK" sz="1800" b="0" u="none" strike="noStrike" kern="1200" cap="none">
+                        <a:solidFill>
+                          <a:srgbClr val="333333"/>
+                        </a:solidFill>
+                        <a:latin typeface="+mn-lt"/>
+                        <a:ea typeface="+mn-ea"/>
+                        <a:cs typeface="+mn-cs"/>
+                      </a:endParaRPr>
+                    </a:p>
+                  </a:txBody>
+                  <a:tcPr marL="76200" marR="76200" marT="50800" marB="50800"/>
+                </a:tc>
+                <a:tc>
+                  <a:txBody>
+                    <a:bodyPr/>
+                    <a:lstStyle/>
+                    <a:p>
+                      <a:pPr marL="0" marR="0" lvl="0" indent="0" algn="l" defTabSz="914400" rtl="0" eaLnBrk="1" latinLnBrk="0" hangingPunct="1">
+                        <a:spcBef>
+                          <a:spcPts val="0"/>
+                        </a:spcBef>
+                        <a:spcAft>
+                          <a:spcPts val="0"/>
+                        </a:spcAft>
+                        <a:buNone/>
+                      </a:pPr>
+                      <a:r>
+                        <a:rPr lang="en-PK" sz="1800" b="0" u="none" strike="noStrike" kern="1200" cap="none">
+                          <a:solidFill>
+                            <a:srgbClr val="333333"/>
+                          </a:solidFill>
+                        </a:rPr>
+                        <a:t>0.7700</a:t>
+                      </a:r>
+                      <a:endParaRPr lang="en-PK" sz="1800" b="0" u="none" strike="noStrike" kern="1200" cap="none">
+                        <a:solidFill>
+                          <a:srgbClr val="333333"/>
+                        </a:solidFill>
+                        <a:latin typeface="+mn-lt"/>
+                        <a:ea typeface="+mn-ea"/>
+                        <a:cs typeface="+mn-cs"/>
+                      </a:endParaRPr>
+                    </a:p>
+                  </a:txBody>
+                  <a:tcPr marL="76200" marR="76200" marT="50800" marB="50800"/>
+                </a:tc>
+                <a:tc>
+                  <a:txBody>
+                    <a:bodyPr/>
+                    <a:lstStyle/>
+                    <a:p>
+                      <a:pPr marL="0" marR="0" lvl="0" indent="0" algn="l" defTabSz="914400" rtl="0" eaLnBrk="1" latinLnBrk="0" hangingPunct="1">
+                        <a:spcBef>
+                          <a:spcPts val="0"/>
+                        </a:spcBef>
+                        <a:spcAft>
+                          <a:spcPts val="0"/>
+                        </a:spcAft>
+                        <a:buNone/>
+                      </a:pPr>
+                      <a:r>
+                        <a:rPr lang="en-PK" sz="1800" b="0" u="none" strike="noStrike" kern="1200" cap="none" dirty="0">
+                          <a:solidFill>
+                            <a:srgbClr val="333333"/>
+                          </a:solidFill>
+                        </a:rPr>
+                        <a:t>0.16</a:t>
+                      </a:r>
+                      <a:endParaRPr lang="en-PK" sz="1800" b="0" u="none" strike="noStrike" kern="1200" cap="none" dirty="0">
+                        <a:solidFill>
+                          <a:srgbClr val="333333"/>
+                        </a:solidFill>
+                        <a:latin typeface="+mn-lt"/>
+                        <a:ea typeface="+mn-ea"/>
+                        <a:cs typeface="+mn-cs"/>
+                      </a:endParaRPr>
+                    </a:p>
+                  </a:txBody>
+                  <a:tcPr marL="76200" marR="76200" marT="50800" marB="50800"/>
+                </a:tc>
+                <a:tc>
+                  <a:txBody>
+                    <a:bodyPr/>
+                    <a:lstStyle/>
+                    <a:p>
+                      <a:pPr marL="0" marR="0" lvl="0" indent="0" algn="l" defTabSz="914400" rtl="0" eaLnBrk="1" latinLnBrk="0" hangingPunct="1">
+                        <a:spcBef>
+                          <a:spcPts val="0"/>
+                        </a:spcBef>
+                        <a:spcAft>
+                          <a:spcPts val="0"/>
+                        </a:spcAft>
+                        <a:buNone/>
+                      </a:pPr>
+                      <a:r>
+                        <a:rPr lang="en-PK" sz="1800" b="0" u="none" strike="noStrike" kern="1200" cap="none" dirty="0">
+                          <a:solidFill>
+                            <a:srgbClr val="333333"/>
+                          </a:solidFill>
+                        </a:rPr>
+                        <a:t>0.01</a:t>
+                      </a:r>
+                      <a:endParaRPr lang="en-PK" sz="1800" b="0" u="none" strike="noStrike" kern="1200" cap="none" dirty="0">
+                        <a:solidFill>
+                          <a:srgbClr val="333333"/>
+                        </a:solidFill>
+                        <a:latin typeface="+mn-lt"/>
+                        <a:ea typeface="+mn-ea"/>
+                        <a:cs typeface="+mn-cs"/>
+                      </a:endParaRPr>
+                    </a:p>
+                  </a:txBody>
+                  <a:tcPr marL="76200" marR="76200" marT="50800" marB="50800"/>
+                </a:tc>
+                <a:tc>
+                  <a:txBody>
+                    <a:bodyPr/>
+                    <a:lstStyle/>
+                    <a:p>
+                      <a:pPr marL="0" marR="0" lvl="0" indent="0" algn="l" defTabSz="914400" rtl="0" eaLnBrk="1" latinLnBrk="0" hangingPunct="1">
+                        <a:spcBef>
+                          <a:spcPts val="0"/>
+                        </a:spcBef>
+                        <a:spcAft>
+                          <a:spcPts val="0"/>
+                        </a:spcAft>
+                        <a:buNone/>
+                      </a:pPr>
+                      <a:r>
+                        <a:rPr lang="en-PK" sz="1800" b="0" u="none" strike="noStrike" kern="1200" cap="none">
+                          <a:solidFill>
+                            <a:srgbClr val="333333"/>
+                          </a:solidFill>
+                        </a:rPr>
+                        <a:t>5th</a:t>
+                      </a:r>
+                      <a:endParaRPr lang="en-PK" sz="1800" b="0" u="none" strike="noStrike" kern="1200" cap="none">
+                        <a:solidFill>
+                          <a:srgbClr val="333333"/>
+                        </a:solidFill>
+                        <a:latin typeface="+mn-lt"/>
+                        <a:ea typeface="+mn-ea"/>
+                        <a:cs typeface="+mn-cs"/>
+                      </a:endParaRPr>
+                    </a:p>
+                  </a:txBody>
+                  <a:tcPr marL="76200" marR="76200" marT="50800" marB="50800"/>
+                </a:tc>
+                <a:extLst>
+                  <a:ext uri="{0D108BD9-81ED-4DB2-BD59-A6C34878D82A}">
+                    <a16:rowId xmlns:a16="http://schemas.microsoft.com/office/drawing/2014/main" val="994806026"/>
+                  </a:ext>
+                </a:extLst>
+              </a:tr>
+              <a:tr h="498567">
+                <a:tc>
+                  <a:txBody>
+                    <a:bodyPr/>
+                    <a:lstStyle/>
+                    <a:p>
+                      <a:pPr marL="0" marR="0" lvl="0" indent="0" algn="l" defTabSz="914400" rtl="0" eaLnBrk="1" latinLnBrk="0" hangingPunct="1">
+                        <a:spcBef>
+                          <a:spcPts val="0"/>
+                        </a:spcBef>
+                        <a:spcAft>
+                          <a:spcPts val="0"/>
+                        </a:spcAft>
+                        <a:buNone/>
+                      </a:pPr>
+                      <a:r>
+                        <a:rPr lang="en-PK" sz="1800" b="0" u="none" strike="noStrike" kern="1200" cap="none">
+                          <a:solidFill>
+                            <a:srgbClr val="333333"/>
+                          </a:solidFill>
+                        </a:rPr>
+                        <a:t>GAN</a:t>
+                      </a:r>
+                      <a:endParaRPr lang="en-PK" sz="1800" b="0" u="none" strike="noStrike" kern="1200" cap="none">
+                        <a:solidFill>
+                          <a:srgbClr val="333333"/>
+                        </a:solidFill>
+                        <a:latin typeface="+mn-lt"/>
+                        <a:ea typeface="+mn-ea"/>
+                        <a:cs typeface="+mn-cs"/>
+                      </a:endParaRPr>
+                    </a:p>
+                  </a:txBody>
+                  <a:tcPr marL="76200" marR="76200" marT="50800" marB="50800"/>
+                </a:tc>
+                <a:tc>
+                  <a:txBody>
+                    <a:bodyPr/>
+                    <a:lstStyle/>
+                    <a:p>
+                      <a:pPr marL="0" marR="0" lvl="0" indent="0" algn="l" defTabSz="914400" rtl="0" eaLnBrk="1" latinLnBrk="0" hangingPunct="1">
+                        <a:spcBef>
+                          <a:spcPts val="0"/>
+                        </a:spcBef>
+                        <a:spcAft>
+                          <a:spcPts val="0"/>
+                        </a:spcAft>
+                        <a:buNone/>
+                      </a:pPr>
+                      <a:r>
+                        <a:rPr lang="en-PK" sz="1800" b="0" u="none" strike="noStrike" kern="1200" cap="none">
+                          <a:solidFill>
+                            <a:srgbClr val="333333"/>
+                          </a:solidFill>
+                        </a:rPr>
+                        <a:t>0.2479</a:t>
+                      </a:r>
+                      <a:endParaRPr lang="en-PK" sz="1800" b="0" u="none" strike="noStrike" kern="1200" cap="none">
+                        <a:solidFill>
+                          <a:srgbClr val="333333"/>
+                        </a:solidFill>
+                        <a:latin typeface="+mn-lt"/>
+                        <a:ea typeface="+mn-ea"/>
+                        <a:cs typeface="+mn-cs"/>
+                      </a:endParaRPr>
+                    </a:p>
+                  </a:txBody>
+                  <a:tcPr marL="76200" marR="76200" marT="50800" marB="50800"/>
+                </a:tc>
+                <a:tc>
+                  <a:txBody>
+                    <a:bodyPr/>
+                    <a:lstStyle/>
+                    <a:p>
+                      <a:pPr marL="0" marR="0" lvl="0" indent="0" algn="l" defTabSz="914400" rtl="0" eaLnBrk="1" latinLnBrk="0" hangingPunct="1">
+                        <a:spcBef>
+                          <a:spcPts val="0"/>
+                        </a:spcBef>
+                        <a:spcAft>
+                          <a:spcPts val="0"/>
+                        </a:spcAft>
+                        <a:buNone/>
+                      </a:pPr>
+                      <a:r>
+                        <a:rPr lang="en-PK" sz="1800" b="0" u="none" strike="noStrike" kern="1200" cap="none">
+                          <a:solidFill>
+                            <a:srgbClr val="333333"/>
+                          </a:solidFill>
+                        </a:rPr>
+                        <a:t>0.12</a:t>
+                      </a:r>
+                      <a:endParaRPr lang="en-PK" sz="1800" b="0" u="none" strike="noStrike" kern="1200" cap="none">
+                        <a:solidFill>
+                          <a:srgbClr val="333333"/>
+                        </a:solidFill>
+                        <a:latin typeface="+mn-lt"/>
+                        <a:ea typeface="+mn-ea"/>
+                        <a:cs typeface="+mn-cs"/>
+                      </a:endParaRPr>
+                    </a:p>
+                  </a:txBody>
+                  <a:tcPr marL="76200" marR="76200" marT="50800" marB="50800"/>
+                </a:tc>
+                <a:tc>
+                  <a:txBody>
+                    <a:bodyPr/>
+                    <a:lstStyle/>
+                    <a:p>
+                      <a:pPr marL="0" marR="0" lvl="0" indent="0" algn="l" defTabSz="914400" rtl="0" eaLnBrk="1" latinLnBrk="0" hangingPunct="1">
+                        <a:spcBef>
+                          <a:spcPts val="0"/>
+                        </a:spcBef>
+                        <a:spcAft>
+                          <a:spcPts val="0"/>
+                        </a:spcAft>
+                        <a:buNone/>
+                      </a:pPr>
+                      <a:r>
+                        <a:rPr lang="en-PK" sz="1800" b="0" u="none" strike="noStrike" kern="1200" cap="none" dirty="0">
+                          <a:solidFill>
+                            <a:srgbClr val="333333"/>
+                          </a:solidFill>
+                        </a:rPr>
+                        <a:t>0.01</a:t>
+                      </a:r>
+                      <a:endParaRPr lang="en-PK" sz="1800" b="0" u="none" strike="noStrike" kern="1200" cap="none" dirty="0">
+                        <a:solidFill>
+                          <a:srgbClr val="333333"/>
+                        </a:solidFill>
+                        <a:latin typeface="+mn-lt"/>
+                        <a:ea typeface="+mn-ea"/>
+                        <a:cs typeface="+mn-cs"/>
+                      </a:endParaRPr>
+                    </a:p>
+                  </a:txBody>
+                  <a:tcPr marL="76200" marR="76200" marT="50800" marB="50800"/>
+                </a:tc>
+                <a:tc>
+                  <a:txBody>
+                    <a:bodyPr/>
+                    <a:lstStyle/>
+                    <a:p>
+                      <a:pPr marL="0" marR="0" lvl="0" indent="0" algn="l" defTabSz="914400" rtl="0" eaLnBrk="1" latinLnBrk="0" hangingPunct="1">
+                        <a:spcBef>
+                          <a:spcPts val="0"/>
+                        </a:spcBef>
+                        <a:spcAft>
+                          <a:spcPts val="0"/>
+                        </a:spcAft>
+                        <a:buNone/>
+                      </a:pPr>
+                      <a:r>
+                        <a:rPr lang="en-PK" sz="1800" b="0" u="none" strike="noStrike" kern="1200" cap="none" dirty="0">
+                          <a:solidFill>
+                            <a:srgbClr val="333333"/>
+                          </a:solidFill>
+                        </a:rPr>
+                        <a:t>6th ❌</a:t>
+                      </a:r>
+                      <a:endParaRPr lang="en-PK" sz="1800" b="0" u="none" strike="noStrike" kern="1200" cap="none" dirty="0">
+                        <a:solidFill>
+                          <a:srgbClr val="333333"/>
+                        </a:solidFill>
+                        <a:latin typeface="+mn-lt"/>
+                        <a:ea typeface="+mn-ea"/>
+                        <a:cs typeface="+mn-cs"/>
+                      </a:endParaRPr>
+                    </a:p>
+                  </a:txBody>
+                  <a:tcPr marL="76200" marR="76200" marT="50800" marB="50800"/>
+                </a:tc>
+                <a:extLst>
+                  <a:ext uri="{0D108BD9-81ED-4DB2-BD59-A6C34878D82A}">
+                    <a16:rowId xmlns:a16="http://schemas.microsoft.com/office/drawing/2014/main" val="3020341745"/>
+                  </a:ext>
+                </a:extLst>
+              </a:tr>
+              <a:tr h="498567">
+                <a:tc>
+                  <a:txBody>
+                    <a:bodyPr/>
+                    <a:lstStyle/>
+                    <a:p>
+                      <a:pPr marL="0" marR="0" lvl="0" indent="0" algn="l" defTabSz="914400" rtl="0" eaLnBrk="1" latinLnBrk="0" hangingPunct="1">
+                        <a:spcBef>
+                          <a:spcPts val="0"/>
+                        </a:spcBef>
+                        <a:spcAft>
+                          <a:spcPts val="0"/>
+                        </a:spcAft>
+                        <a:buNone/>
+                      </a:pPr>
+                      <a:r>
+                        <a:rPr lang="en-PK" sz="1800" b="0" u="none" strike="noStrike" kern="1200" cap="none">
+                          <a:solidFill>
+                            <a:srgbClr val="333333"/>
+                          </a:solidFill>
+                        </a:rPr>
+                        <a:t>One-Class SVM</a:t>
+                      </a:r>
+                      <a:endParaRPr lang="en-PK" sz="1800" b="0" u="none" strike="noStrike" kern="1200" cap="none">
+                        <a:solidFill>
+                          <a:srgbClr val="333333"/>
+                        </a:solidFill>
+                        <a:latin typeface="+mn-lt"/>
+                        <a:ea typeface="+mn-ea"/>
+                        <a:cs typeface="+mn-cs"/>
+                      </a:endParaRPr>
+                    </a:p>
+                  </a:txBody>
+                  <a:tcPr marL="76200" marR="76200" marT="50800" marB="50800"/>
+                </a:tc>
+                <a:tc>
+                  <a:txBody>
+                    <a:bodyPr/>
+                    <a:lstStyle/>
+                    <a:p>
+                      <a:pPr marL="0" marR="0" lvl="0" indent="0" algn="l" defTabSz="914400" rtl="0" eaLnBrk="1" latinLnBrk="0" hangingPunct="1">
+                        <a:spcBef>
+                          <a:spcPts val="0"/>
+                        </a:spcBef>
+                        <a:spcAft>
+                          <a:spcPts val="0"/>
+                        </a:spcAft>
+                        <a:buNone/>
+                      </a:pPr>
+                      <a:r>
+                        <a:rPr lang="en-PK" sz="1800" b="0" u="none" strike="noStrike" kern="1200" cap="none">
+                          <a:solidFill>
+                            <a:srgbClr val="333333"/>
+                          </a:solidFill>
+                        </a:rPr>
+                        <a:t>0.2388</a:t>
+                      </a:r>
+                      <a:endParaRPr lang="en-PK" sz="1800" b="0" u="none" strike="noStrike" kern="1200" cap="none">
+                        <a:solidFill>
+                          <a:srgbClr val="333333"/>
+                        </a:solidFill>
+                        <a:latin typeface="+mn-lt"/>
+                        <a:ea typeface="+mn-ea"/>
+                        <a:cs typeface="+mn-cs"/>
+                      </a:endParaRPr>
+                    </a:p>
+                  </a:txBody>
+                  <a:tcPr marL="76200" marR="76200" marT="50800" marB="50800"/>
+                </a:tc>
+                <a:tc>
+                  <a:txBody>
+                    <a:bodyPr/>
+                    <a:lstStyle/>
+                    <a:p>
+                      <a:pPr marL="0" marR="0" lvl="0" indent="0" algn="l" defTabSz="914400" rtl="0" eaLnBrk="1" latinLnBrk="0" hangingPunct="1">
+                        <a:spcBef>
+                          <a:spcPts val="0"/>
+                        </a:spcBef>
+                        <a:spcAft>
+                          <a:spcPts val="0"/>
+                        </a:spcAft>
+                        <a:buNone/>
+                      </a:pPr>
+                      <a:r>
+                        <a:rPr lang="en-PK" sz="1800" b="0" u="none" strike="noStrike" kern="1200" cap="none">
+                          <a:solidFill>
+                            <a:srgbClr val="333333"/>
+                          </a:solidFill>
+                        </a:rPr>
+                        <a:t>0.01</a:t>
+                      </a:r>
+                      <a:endParaRPr lang="en-PK" sz="1800" b="0" u="none" strike="noStrike" kern="1200" cap="none">
+                        <a:solidFill>
+                          <a:srgbClr val="333333"/>
+                        </a:solidFill>
+                        <a:latin typeface="+mn-lt"/>
+                        <a:ea typeface="+mn-ea"/>
+                        <a:cs typeface="+mn-cs"/>
+                      </a:endParaRPr>
+                    </a:p>
+                  </a:txBody>
+                  <a:tcPr marL="76200" marR="76200" marT="50800" marB="50800"/>
+                </a:tc>
+                <a:tc>
+                  <a:txBody>
+                    <a:bodyPr/>
+                    <a:lstStyle/>
+                    <a:p>
+                      <a:pPr marL="0" marR="0" lvl="0" indent="0" algn="l" defTabSz="914400" rtl="0" eaLnBrk="1" latinLnBrk="0" hangingPunct="1">
+                        <a:spcBef>
+                          <a:spcPts val="0"/>
+                        </a:spcBef>
+                        <a:spcAft>
+                          <a:spcPts val="0"/>
+                        </a:spcAft>
+                        <a:buNone/>
+                      </a:pPr>
+                      <a:r>
+                        <a:rPr lang="en-PK" sz="1800" b="0" u="none" strike="noStrike" kern="1200" cap="none">
+                          <a:solidFill>
+                            <a:srgbClr val="333333"/>
+                          </a:solidFill>
+                        </a:rPr>
+                        <a:t>0.00</a:t>
+                      </a:r>
+                      <a:endParaRPr lang="en-PK" sz="1800" b="0" u="none" strike="noStrike" kern="1200" cap="none">
+                        <a:solidFill>
+                          <a:srgbClr val="333333"/>
+                        </a:solidFill>
+                        <a:latin typeface="+mn-lt"/>
+                        <a:ea typeface="+mn-ea"/>
+                        <a:cs typeface="+mn-cs"/>
+                      </a:endParaRPr>
+                    </a:p>
+                  </a:txBody>
+                  <a:tcPr marL="76200" marR="76200" marT="50800" marB="50800"/>
+                </a:tc>
+                <a:tc>
+                  <a:txBody>
+                    <a:bodyPr/>
+                    <a:lstStyle/>
+                    <a:p>
+                      <a:pPr marL="0" marR="0" lvl="0" indent="0" algn="l" defTabSz="914400" rtl="0" eaLnBrk="1" latinLnBrk="0" hangingPunct="1">
+                        <a:spcBef>
+                          <a:spcPts val="0"/>
+                        </a:spcBef>
+                        <a:spcAft>
+                          <a:spcPts val="0"/>
+                        </a:spcAft>
+                        <a:buNone/>
+                      </a:pPr>
+                      <a:r>
+                        <a:rPr lang="en-PK" sz="1800" b="0" u="none" strike="noStrike" kern="1200" cap="none" dirty="0">
+                          <a:solidFill>
+                            <a:srgbClr val="333333"/>
+                          </a:solidFill>
+                        </a:rPr>
+                        <a:t>7th ❌</a:t>
+                      </a:r>
+                      <a:endParaRPr lang="en-PK" sz="1800" b="0" u="none" strike="noStrike" kern="1200" cap="none" dirty="0">
+                        <a:solidFill>
+                          <a:srgbClr val="333333"/>
+                        </a:solidFill>
+                        <a:latin typeface="+mn-lt"/>
+                        <a:ea typeface="+mn-ea"/>
+                        <a:cs typeface="+mn-cs"/>
+                      </a:endParaRPr>
+                    </a:p>
+                  </a:txBody>
+                  <a:tcPr marL="76200" marR="76200" marT="50800" marB="50800"/>
+                </a:tc>
+                <a:extLst>
+                  <a:ext uri="{0D108BD9-81ED-4DB2-BD59-A6C34878D82A}">
+                    <a16:rowId xmlns:a16="http://schemas.microsoft.com/office/drawing/2014/main" val="3158595811"/>
+                  </a:ext>
+                </a:extLst>
+              </a:tr>
+            </a:tbl>
+          </a:graphicData>
+        </a:graphic>
+      </p:graphicFrame>
+      <p:sp>
+        <p:nvSpPr>
+          <p:cNvPr id="4" name="TextBox 3">
+            <a:extLst>
+              <a:ext uri="{FF2B5EF4-FFF2-40B4-BE49-F238E27FC236}">
+                <a16:creationId xmlns:a16="http://schemas.microsoft.com/office/drawing/2014/main" id="{F326E8B8-8AD8-A479-9D98-11447291E9D5}"/>
+              </a:ext>
+            </a:extLst>
+          </p:cNvPr>
+          <p:cNvSpPr txBox="1"/>
+          <p:nvPr/>
+        </p:nvSpPr>
+        <p:spPr>
+          <a:xfrm>
+            <a:off x="1028699" y="528578"/>
+            <a:ext cx="8910083" cy="938719"/>
+          </a:xfrm>
+          <a:prstGeom prst="rect">
+            <a:avLst/>
+          </a:prstGeom>
+          <a:noFill/>
+        </p:spPr>
+        <p:txBody>
+          <a:bodyPr wrap="square">
+            <a:spAutoFit/>
+          </a:bodyPr>
+          <a:lstStyle/>
+          <a:p>
+            <a:pPr>
+              <a:spcBef>
+                <a:spcPts val="1200"/>
+              </a:spcBef>
+              <a:spcAft>
+                <a:spcPts val="600"/>
+              </a:spcAft>
+              <a:buNone/>
+            </a:pPr>
+            <a:r>
+              <a:rPr lang="en-US" sz="3150" b="1" i="0" u="none" strike="noStrike" cap="none" dirty="0">
+                <a:solidFill>
+                  <a:srgbClr val="003366"/>
+                </a:solidFill>
+                <a:latin typeface="Times New Roman" panose="02020603050405020304" pitchFamily="18" charset="0"/>
+                <a:ea typeface="Helvetica Neue"/>
+                <a:cs typeface="Times New Roman" panose="02020603050405020304" pitchFamily="18" charset="0"/>
+                <a:sym typeface="Helvetica Neue"/>
+              </a:rPr>
+              <a:t>Results: </a:t>
+            </a:r>
+            <a:r>
+              <a:rPr lang="en-PK" sz="3150" b="1" dirty="0">
+                <a:solidFill>
+                  <a:srgbClr val="003366"/>
+                </a:solidFill>
+                <a:latin typeface="Times New Roman" panose="02020603050405020304" pitchFamily="18" charset="0"/>
+                <a:cs typeface="Times New Roman" panose="02020603050405020304" pitchFamily="18" charset="0"/>
+              </a:rPr>
+              <a:t>Spark Dataset Results</a:t>
+            </a:r>
+          </a:p>
+          <a:p>
+            <a:pPr marL="0" marR="0" lvl="0" indent="0" algn="l" rtl="0">
+              <a:spcBef>
+                <a:spcPts val="0"/>
+              </a:spcBef>
+              <a:spcAft>
+                <a:spcPts val="0"/>
+              </a:spcAft>
+              <a:buNone/>
+            </a:pPr>
+            <a:endParaRPr lang="en-US" sz="1800" dirty="0">
+              <a:latin typeface="Times New Roman" panose="02020603050405020304" pitchFamily="18" charset="0"/>
+              <a:cs typeface="Times New Roman" panose="02020603050405020304" pitchFamily="18" charset="0"/>
+            </a:endParaRPr>
+          </a:p>
+        </p:txBody>
+      </p:sp>
+      <p:sp>
+        <p:nvSpPr>
+          <p:cNvPr id="6" name="Google Shape;347;p24">
+            <a:extLst>
+              <a:ext uri="{FF2B5EF4-FFF2-40B4-BE49-F238E27FC236}">
+                <a16:creationId xmlns:a16="http://schemas.microsoft.com/office/drawing/2014/main" id="{599C8E1E-7888-E17A-F226-239028A9CEA5}"/>
+              </a:ext>
+            </a:extLst>
+          </p:cNvPr>
+          <p:cNvSpPr/>
+          <p:nvPr/>
+        </p:nvSpPr>
+        <p:spPr>
+          <a:xfrm>
+            <a:off x="762000" y="1200150"/>
+            <a:ext cx="10668000" cy="28575"/>
+          </a:xfrm>
+          <a:prstGeom prst="rect">
+            <a:avLst/>
+          </a:prstGeom>
+          <a:solidFill>
+            <a:srgbClr val="003366"/>
+          </a:solidFill>
+          <a:ln>
+            <a:noFill/>
+          </a:ln>
+        </p:spPr>
+        <p:txBody>
+          <a:bodyPr spcFirstLastPara="1" wrap="square" lIns="91425" tIns="45700" rIns="91425" bIns="45700" anchor="ctr" anchorCtr="0">
+            <a:noAutofit/>
+          </a:bodyPr>
+          <a:lstStyle/>
+          <a:p>
+            <a:pPr marL="0" marR="0" lvl="0" indent="0" algn="ctr" rtl="0">
+              <a:spcBef>
+                <a:spcPts val="0"/>
+              </a:spcBef>
+              <a:spcAft>
+                <a:spcPts val="0"/>
+              </a:spcAft>
+              <a:buNone/>
+            </a:pPr>
+            <a:endParaRPr sz="1800" b="0" i="0" u="none" strike="noStrike" cap="none">
+              <a:solidFill>
+                <a:schemeClr val="dk1"/>
+              </a:solidFill>
+              <a:latin typeface="Times New Roman" panose="02020603050405020304" pitchFamily="18" charset="0"/>
+              <a:ea typeface="Calibri"/>
+              <a:cs typeface="Times New Roman" panose="02020603050405020304" pitchFamily="18" charset="0"/>
+              <a:sym typeface="Calibri"/>
+            </a:endParaRPr>
+          </a:p>
+        </p:txBody>
+      </p:sp>
+    </p:spTree>
+    <p:extLst>
+      <p:ext uri="{BB962C8B-B14F-4D97-AF65-F5344CB8AC3E}">
+        <p14:creationId xmlns:p14="http://schemas.microsoft.com/office/powerpoint/2010/main" val="3235812068"/>
+      </p:ext>
+    </p:extLst>
+  </p:cSld>
+  <p:clrMapOvr>
+    <a:masterClrMapping/>
+  </p:clrMapOvr>
+  <mc:AlternateContent xmlns:mc="http://schemas.openxmlformats.org/markup-compatibility/2006" xmlns:p14="http://schemas.microsoft.com/office/powerpoint/2010/main">
+    <mc:Choice Requires="p14">
+      <p:transition spd="slow" p14:dur="1500">
+        <p:random/>
+      </p:transition>
+    </mc:Choice>
+    <mc:Fallback xmlns="">
+      <p:transition spd="slow">
+        <p:random/>
+      </p:transition>
+    </mc:Fallback>
+  </mc:AlternateContent>
+</p:sld>
+</file>
+
+<file path=ppt/slides/slide25.xml><?xml version="1.0" encoding="utf-8"?>
+<p:sld xmlns:a="http://schemas.openxmlformats.org/drawingml/2006/main" xmlns:r="http://schemas.openxmlformats.org/officeDocument/2006/relationships" xmlns:p="http://schemas.openxmlformats.org/presentationml/2006/main">
+  <p:cSld>
+    <p:spTree>
+      <p:nvGrpSpPr>
+        <p:cNvPr id="1" name=""/>
+        <p:cNvGrpSpPr/>
+        <p:nvPr/>
+      </p:nvGrpSpPr>
+      <p:grpSpPr>
+        <a:xfrm>
+          <a:off x="0" y="0"/>
+          <a:ext cx="0" cy="0"/>
+          <a:chOff x="0" y="0"/>
+          <a:chExt cx="0" cy="0"/>
+        </a:xfrm>
+      </p:grpSpPr>
+      <p:graphicFrame>
+        <p:nvGraphicFramePr>
+          <p:cNvPr id="2" name="Table 1">
+            <a:extLst>
+              <a:ext uri="{FF2B5EF4-FFF2-40B4-BE49-F238E27FC236}">
+                <a16:creationId xmlns:a16="http://schemas.microsoft.com/office/drawing/2014/main" id="{2C96BE19-12A2-7D02-44E2-36832A38C543}"/>
+              </a:ext>
+            </a:extLst>
+          </p:cNvPr>
+          <p:cNvGraphicFramePr>
+            <a:graphicFrameLocks noGrp="1"/>
+          </p:cNvGraphicFramePr>
+          <p:nvPr>
+            <p:extLst>
+              <p:ext uri="{D42A27DB-BD31-4B8C-83A1-F6EECF244321}">
+                <p14:modId xmlns:p14="http://schemas.microsoft.com/office/powerpoint/2010/main" val="3928025739"/>
+              </p:ext>
+            </p:extLst>
+          </p:nvPr>
+        </p:nvGraphicFramePr>
+        <p:xfrm>
+          <a:off x="762001" y="1708518"/>
+          <a:ext cx="10668000" cy="4075595"/>
+        </p:xfrm>
+        <a:graphic>
+          <a:graphicData uri="http://schemas.openxmlformats.org/drawingml/2006/table">
+            <a:tbl>
+              <a:tblPr>
+                <a:tableStyleId>{5C22544A-7EE6-4342-B048-85BDC9FD1C3A}</a:tableStyleId>
+              </a:tblPr>
+              <a:tblGrid>
+                <a:gridCol w="3304270">
+                  <a:extLst>
+                    <a:ext uri="{9D8B030D-6E8A-4147-A177-3AD203B41FA5}">
+                      <a16:colId xmlns:a16="http://schemas.microsoft.com/office/drawing/2014/main" val="1040471027"/>
+                    </a:ext>
+                  </a:extLst>
+                </a:gridCol>
+                <a:gridCol w="1928944">
+                  <a:extLst>
+                    <a:ext uri="{9D8B030D-6E8A-4147-A177-3AD203B41FA5}">
+                      <a16:colId xmlns:a16="http://schemas.microsoft.com/office/drawing/2014/main" val="953002633"/>
+                    </a:ext>
+                  </a:extLst>
+                </a:gridCol>
+                <a:gridCol w="1520929">
+                  <a:extLst>
+                    <a:ext uri="{9D8B030D-6E8A-4147-A177-3AD203B41FA5}">
+                      <a16:colId xmlns:a16="http://schemas.microsoft.com/office/drawing/2014/main" val="10291725"/>
+                    </a:ext>
+                  </a:extLst>
+                </a:gridCol>
+                <a:gridCol w="1520929">
+                  <a:extLst>
+                    <a:ext uri="{9D8B030D-6E8A-4147-A177-3AD203B41FA5}">
+                      <a16:colId xmlns:a16="http://schemas.microsoft.com/office/drawing/2014/main" val="4183016189"/>
+                    </a:ext>
+                  </a:extLst>
+                </a:gridCol>
+                <a:gridCol w="2392928">
+                  <a:extLst>
+                    <a:ext uri="{9D8B030D-6E8A-4147-A177-3AD203B41FA5}">
+                      <a16:colId xmlns:a16="http://schemas.microsoft.com/office/drawing/2014/main" val="2588229013"/>
+                    </a:ext>
+                  </a:extLst>
+                </a:gridCol>
+              </a:tblGrid>
+              <a:tr h="466864">
+                <a:tc>
+                  <a:txBody>
+                    <a:bodyPr/>
+                    <a:lstStyle/>
+                    <a:p>
+                      <a:pPr marL="0" marR="0" lvl="0" indent="0" algn="l" defTabSz="914400" rtl="0" eaLnBrk="1" latinLnBrk="0" hangingPunct="1">
+                        <a:spcBef>
+                          <a:spcPts val="0"/>
+                        </a:spcBef>
+                        <a:spcAft>
+                          <a:spcPts val="0"/>
+                        </a:spcAft>
+                        <a:buNone/>
+                      </a:pPr>
+                      <a:r>
+                        <a:rPr lang="en-PK" sz="1800" b="1" u="none" strike="noStrike" kern="1200" cap="none" dirty="0">
+                          <a:solidFill>
+                            <a:srgbClr val="003366"/>
+                          </a:solidFill>
+                          <a:latin typeface="+mn-lt"/>
+                          <a:ea typeface="+mn-ea"/>
+                          <a:cs typeface="+mn-cs"/>
+                        </a:rPr>
+                        <a:t>Model</a:t>
+                      </a:r>
+                    </a:p>
+                  </a:txBody>
+                  <a:tcPr marL="76200" marR="76200" marT="50800" marB="50800">
+                    <a:solidFill>
+                      <a:schemeClr val="tx2">
+                        <a:lumMod val="75000"/>
+                        <a:lumOff val="25000"/>
+                      </a:schemeClr>
+                    </a:solidFill>
+                  </a:tcPr>
+                </a:tc>
+                <a:tc>
+                  <a:txBody>
+                    <a:bodyPr/>
+                    <a:lstStyle/>
+                    <a:p>
+                      <a:pPr marL="0" marR="0" lvl="0" indent="0" algn="l" defTabSz="914400" rtl="0" eaLnBrk="1" latinLnBrk="0" hangingPunct="1">
+                        <a:spcBef>
+                          <a:spcPts val="0"/>
+                        </a:spcBef>
+                        <a:spcAft>
+                          <a:spcPts val="0"/>
+                        </a:spcAft>
+                        <a:buNone/>
+                      </a:pPr>
+                      <a:r>
+                        <a:rPr lang="en-PK" sz="1800" b="1" u="none" strike="noStrike" kern="1200" cap="none" dirty="0">
+                          <a:solidFill>
+                            <a:srgbClr val="003366"/>
+                          </a:solidFill>
+                          <a:latin typeface="+mn-lt"/>
+                          <a:ea typeface="+mn-ea"/>
+                          <a:cs typeface="+mn-cs"/>
+                        </a:rPr>
+                        <a:t>ROC-AUC</a:t>
+                      </a:r>
+                    </a:p>
+                  </a:txBody>
+                  <a:tcPr marL="76200" marR="76200" marT="50800" marB="50800">
+                    <a:solidFill>
+                      <a:schemeClr val="tx2">
+                        <a:lumMod val="75000"/>
+                        <a:lumOff val="25000"/>
+                      </a:schemeClr>
+                    </a:solidFill>
+                  </a:tcPr>
+                </a:tc>
+                <a:tc>
+                  <a:txBody>
+                    <a:bodyPr/>
+                    <a:lstStyle/>
+                    <a:p>
+                      <a:pPr marL="0" marR="0" lvl="0" indent="0" algn="l" defTabSz="914400" rtl="0" eaLnBrk="1" latinLnBrk="0" hangingPunct="1">
+                        <a:spcBef>
+                          <a:spcPts val="0"/>
+                        </a:spcBef>
+                        <a:spcAft>
+                          <a:spcPts val="0"/>
+                        </a:spcAft>
+                        <a:buNone/>
+                      </a:pPr>
+                      <a:r>
+                        <a:rPr lang="en-PK" sz="1800" b="1" u="none" strike="noStrike" kern="1200" cap="none" dirty="0">
+                          <a:solidFill>
+                            <a:srgbClr val="003366"/>
+                          </a:solidFill>
+                          <a:latin typeface="+mn-lt"/>
+                          <a:ea typeface="+mn-ea"/>
+                          <a:cs typeface="+mn-cs"/>
+                        </a:rPr>
+                        <a:t>Recall</a:t>
+                      </a:r>
+                    </a:p>
+                  </a:txBody>
+                  <a:tcPr marL="76200" marR="76200" marT="50800" marB="50800">
+                    <a:solidFill>
+                      <a:schemeClr val="tx2">
+                        <a:lumMod val="75000"/>
+                        <a:lumOff val="25000"/>
+                      </a:schemeClr>
+                    </a:solidFill>
+                  </a:tcPr>
+                </a:tc>
+                <a:tc>
+                  <a:txBody>
+                    <a:bodyPr/>
+                    <a:lstStyle/>
+                    <a:p>
+                      <a:pPr marL="0" marR="0" lvl="0" indent="0" algn="l" defTabSz="914400" rtl="0" eaLnBrk="1" latinLnBrk="0" hangingPunct="1">
+                        <a:spcBef>
+                          <a:spcPts val="0"/>
+                        </a:spcBef>
+                        <a:spcAft>
+                          <a:spcPts val="0"/>
+                        </a:spcAft>
+                        <a:buNone/>
+                      </a:pPr>
+                      <a:r>
+                        <a:rPr lang="en-PK" sz="1800" b="1" u="none" strike="noStrike" kern="1200" cap="none" dirty="0">
+                          <a:solidFill>
+                            <a:srgbClr val="003366"/>
+                          </a:solidFill>
+                          <a:latin typeface="+mn-lt"/>
+                          <a:ea typeface="+mn-ea"/>
+                          <a:cs typeface="+mn-cs"/>
+                        </a:rPr>
+                        <a:t>F1</a:t>
+                      </a:r>
+                    </a:p>
+                  </a:txBody>
+                  <a:tcPr marL="76200" marR="76200" marT="50800" marB="50800">
+                    <a:solidFill>
+                      <a:schemeClr val="tx2">
+                        <a:lumMod val="75000"/>
+                        <a:lumOff val="25000"/>
+                      </a:schemeClr>
+                    </a:solidFill>
+                  </a:tcPr>
+                </a:tc>
+                <a:tc>
+                  <a:txBody>
+                    <a:bodyPr/>
+                    <a:lstStyle/>
+                    <a:p>
+                      <a:pPr marL="0" marR="0" lvl="0" indent="0" algn="l" defTabSz="914400" rtl="0" eaLnBrk="1" latinLnBrk="0" hangingPunct="1">
+                        <a:spcBef>
+                          <a:spcPts val="0"/>
+                        </a:spcBef>
+                        <a:spcAft>
+                          <a:spcPts val="0"/>
+                        </a:spcAft>
+                        <a:buNone/>
+                      </a:pPr>
+                      <a:r>
+                        <a:rPr lang="en-PK" sz="1800" b="1" u="none" strike="noStrike" kern="1200" cap="none" dirty="0">
+                          <a:solidFill>
+                            <a:srgbClr val="003366"/>
+                          </a:solidFill>
+                          <a:latin typeface="+mn-lt"/>
+                          <a:ea typeface="+mn-ea"/>
+                          <a:cs typeface="+mn-cs"/>
+                        </a:rPr>
+                        <a:t>Note</a:t>
+                      </a:r>
+                    </a:p>
+                  </a:txBody>
+                  <a:tcPr marL="76200" marR="76200" marT="50800" marB="50800">
+                    <a:solidFill>
+                      <a:schemeClr val="tx2">
+                        <a:lumMod val="75000"/>
+                        <a:lumOff val="25000"/>
+                      </a:schemeClr>
+                    </a:solidFill>
+                  </a:tcPr>
+                </a:tc>
+                <a:extLst>
+                  <a:ext uri="{0D108BD9-81ED-4DB2-BD59-A6C34878D82A}">
+                    <a16:rowId xmlns:a16="http://schemas.microsoft.com/office/drawing/2014/main" val="1297102956"/>
+                  </a:ext>
+                </a:extLst>
+              </a:tr>
+              <a:tr h="807547">
+                <a:tc>
+                  <a:txBody>
+                    <a:bodyPr/>
+                    <a:lstStyle/>
+                    <a:p>
+                      <a:pPr algn="l">
+                        <a:buNone/>
+                      </a:pPr>
+                      <a:r>
+                        <a:rPr lang="en-PK" sz="1800" dirty="0">
+                          <a:effectLst/>
+                        </a:rPr>
+                        <a:t>Random Forest</a:t>
+                      </a:r>
+                      <a:endParaRPr lang="en-PK" sz="1800" dirty="0">
+                        <a:effectLst/>
+                        <a:latin typeface="Arial" panose="020B0604020202020204" pitchFamily="34" charset="0"/>
+                        <a:ea typeface="Arial" panose="020B0604020202020204" pitchFamily="34" charset="0"/>
+                      </a:endParaRPr>
+                    </a:p>
+                  </a:txBody>
+                  <a:tcPr marL="76200" marR="76200" marT="50800" marB="50800"/>
+                </a:tc>
+                <a:tc>
+                  <a:txBody>
+                    <a:bodyPr/>
+                    <a:lstStyle/>
+                    <a:p>
+                      <a:pPr algn="l">
+                        <a:buNone/>
+                      </a:pPr>
+                      <a:r>
+                        <a:rPr lang="en-PK" sz="1800" dirty="0">
+                          <a:effectLst/>
+                        </a:rPr>
+                        <a:t>1.0000</a:t>
+                      </a:r>
+                      <a:endParaRPr lang="en-PK" sz="1800" dirty="0">
+                        <a:effectLst/>
+                        <a:latin typeface="Arial" panose="020B0604020202020204" pitchFamily="34" charset="0"/>
+                        <a:ea typeface="Arial" panose="020B0604020202020204" pitchFamily="34" charset="0"/>
+                      </a:endParaRPr>
+                    </a:p>
+                  </a:txBody>
+                  <a:tcPr marL="76200" marR="76200" marT="50800" marB="50800"/>
+                </a:tc>
+                <a:tc>
+                  <a:txBody>
+                    <a:bodyPr/>
+                    <a:lstStyle/>
+                    <a:p>
+                      <a:pPr algn="l">
+                        <a:buNone/>
+                      </a:pPr>
+                      <a:r>
+                        <a:rPr lang="en-PK" sz="1800" dirty="0">
+                          <a:effectLst/>
+                        </a:rPr>
+                        <a:t>1.00</a:t>
+                      </a:r>
+                      <a:endParaRPr lang="en-PK" sz="1800" dirty="0">
+                        <a:effectLst/>
+                        <a:latin typeface="Arial" panose="020B0604020202020204" pitchFamily="34" charset="0"/>
+                        <a:ea typeface="Arial" panose="020B0604020202020204" pitchFamily="34" charset="0"/>
+                      </a:endParaRPr>
+                    </a:p>
+                  </a:txBody>
+                  <a:tcPr marL="76200" marR="76200" marT="50800" marB="50800"/>
+                </a:tc>
+                <a:tc>
+                  <a:txBody>
+                    <a:bodyPr/>
+                    <a:lstStyle/>
+                    <a:p>
+                      <a:pPr algn="l">
+                        <a:buNone/>
+                      </a:pPr>
+                      <a:r>
+                        <a:rPr lang="en-PK" sz="1800">
+                          <a:effectLst/>
+                        </a:rPr>
+                        <a:t>1.00</a:t>
+                      </a:r>
+                      <a:endParaRPr lang="en-PK" sz="1800">
+                        <a:effectLst/>
+                        <a:latin typeface="Arial" panose="020B0604020202020204" pitchFamily="34" charset="0"/>
+                        <a:ea typeface="Arial" panose="020B0604020202020204" pitchFamily="34" charset="0"/>
+                      </a:endParaRPr>
+                    </a:p>
+                  </a:txBody>
+                  <a:tcPr marL="76200" marR="76200" marT="50800" marB="50800"/>
+                </a:tc>
+                <a:tc>
+                  <a:txBody>
+                    <a:bodyPr/>
+                    <a:lstStyle/>
+                    <a:p>
+                      <a:pPr algn="l">
+                        <a:buNone/>
+                      </a:pPr>
+                      <a:r>
+                        <a:rPr lang="en-PK" sz="1800">
+                          <a:effectLst/>
+                        </a:rPr>
+                        <a:t>⚠️ Label Leakage</a:t>
+                      </a:r>
+                      <a:endParaRPr lang="en-PK" sz="1800">
+                        <a:effectLst/>
+                        <a:latin typeface="Arial" panose="020B0604020202020204" pitchFamily="34" charset="0"/>
+                        <a:ea typeface="Arial" panose="020B0604020202020204" pitchFamily="34" charset="0"/>
+                      </a:endParaRPr>
+                    </a:p>
+                  </a:txBody>
+                  <a:tcPr marL="76200" marR="76200" marT="50800" marB="50800"/>
+                </a:tc>
+                <a:extLst>
+                  <a:ext uri="{0D108BD9-81ED-4DB2-BD59-A6C34878D82A}">
+                    <a16:rowId xmlns:a16="http://schemas.microsoft.com/office/drawing/2014/main" val="2593582636"/>
+                  </a:ext>
+                </a:extLst>
+              </a:tr>
+              <a:tr h="466864">
+                <a:tc>
+                  <a:txBody>
+                    <a:bodyPr/>
+                    <a:lstStyle/>
+                    <a:p>
+                      <a:pPr algn="l">
+                        <a:buNone/>
+                      </a:pPr>
+                      <a:r>
+                        <a:rPr lang="en-PK" sz="1800">
+                          <a:effectLst/>
+                        </a:rPr>
+                        <a:t>CNN Classifier</a:t>
+                      </a:r>
+                      <a:endParaRPr lang="en-PK" sz="1800">
+                        <a:effectLst/>
+                        <a:latin typeface="Arial" panose="020B0604020202020204" pitchFamily="34" charset="0"/>
+                        <a:ea typeface="Arial" panose="020B0604020202020204" pitchFamily="34" charset="0"/>
+                      </a:endParaRPr>
+                    </a:p>
+                  </a:txBody>
+                  <a:tcPr marL="76200" marR="76200" marT="50800" marB="50800"/>
+                </a:tc>
+                <a:tc>
+                  <a:txBody>
+                    <a:bodyPr/>
+                    <a:lstStyle/>
+                    <a:p>
+                      <a:pPr algn="l">
+                        <a:buNone/>
+                      </a:pPr>
+                      <a:r>
+                        <a:rPr lang="en-PK" sz="1800" dirty="0">
+                          <a:effectLst/>
+                        </a:rPr>
+                        <a:t>0.9617</a:t>
+                      </a:r>
+                      <a:endParaRPr lang="en-PK" sz="1800" dirty="0">
+                        <a:effectLst/>
+                        <a:latin typeface="Arial" panose="020B0604020202020204" pitchFamily="34" charset="0"/>
+                        <a:ea typeface="Arial" panose="020B0604020202020204" pitchFamily="34" charset="0"/>
+                      </a:endParaRPr>
+                    </a:p>
+                  </a:txBody>
+                  <a:tcPr marL="76200" marR="76200" marT="50800" marB="50800"/>
+                </a:tc>
+                <a:tc>
+                  <a:txBody>
+                    <a:bodyPr/>
+                    <a:lstStyle/>
+                    <a:p>
+                      <a:pPr algn="l">
+                        <a:buNone/>
+                      </a:pPr>
+                      <a:r>
+                        <a:rPr lang="en-PK" sz="1800">
+                          <a:effectLst/>
+                        </a:rPr>
+                        <a:t>0.84</a:t>
+                      </a:r>
+                      <a:endParaRPr lang="en-PK" sz="1800">
+                        <a:effectLst/>
+                        <a:latin typeface="Arial" panose="020B0604020202020204" pitchFamily="34" charset="0"/>
+                        <a:ea typeface="Arial" panose="020B0604020202020204" pitchFamily="34" charset="0"/>
+                      </a:endParaRPr>
+                    </a:p>
+                  </a:txBody>
+                  <a:tcPr marL="76200" marR="76200" marT="50800" marB="50800"/>
+                </a:tc>
+                <a:tc>
+                  <a:txBody>
+                    <a:bodyPr/>
+                    <a:lstStyle/>
+                    <a:p>
+                      <a:pPr algn="l">
+                        <a:buNone/>
+                      </a:pPr>
+                      <a:r>
+                        <a:rPr lang="en-PK" sz="1800" dirty="0">
+                          <a:effectLst/>
+                        </a:rPr>
+                        <a:t>0.91</a:t>
+                      </a:r>
+                      <a:endParaRPr lang="en-PK" sz="1800" dirty="0">
+                        <a:effectLst/>
+                        <a:latin typeface="Arial" panose="020B0604020202020204" pitchFamily="34" charset="0"/>
+                        <a:ea typeface="Arial" panose="020B0604020202020204" pitchFamily="34" charset="0"/>
+                      </a:endParaRPr>
+                    </a:p>
+                  </a:txBody>
+                  <a:tcPr marL="76200" marR="76200" marT="50800" marB="50800"/>
+                </a:tc>
+                <a:tc>
+                  <a:txBody>
+                    <a:bodyPr/>
+                    <a:lstStyle/>
+                    <a:p>
+                      <a:pPr algn="l">
+                        <a:buNone/>
+                      </a:pPr>
+                      <a:r>
+                        <a:rPr lang="en-PK" sz="1800">
+                          <a:effectLst/>
+                        </a:rPr>
+                        <a:t>✅ Reliable</a:t>
+                      </a:r>
+                      <a:endParaRPr lang="en-PK" sz="1800">
+                        <a:effectLst/>
+                        <a:latin typeface="Arial" panose="020B0604020202020204" pitchFamily="34" charset="0"/>
+                        <a:ea typeface="Arial" panose="020B0604020202020204" pitchFamily="34" charset="0"/>
+                      </a:endParaRPr>
+                    </a:p>
+                  </a:txBody>
+                  <a:tcPr marL="76200" marR="76200" marT="50800" marB="50800"/>
+                </a:tc>
+                <a:extLst>
+                  <a:ext uri="{0D108BD9-81ED-4DB2-BD59-A6C34878D82A}">
+                    <a16:rowId xmlns:a16="http://schemas.microsoft.com/office/drawing/2014/main" val="732718329"/>
+                  </a:ext>
+                </a:extLst>
+              </a:tr>
+              <a:tr h="466864">
+                <a:tc>
+                  <a:txBody>
+                    <a:bodyPr/>
+                    <a:lstStyle/>
+                    <a:p>
+                      <a:pPr algn="l">
+                        <a:buNone/>
+                      </a:pPr>
+                      <a:r>
+                        <a:rPr lang="en-PK" sz="1800" dirty="0">
+                          <a:effectLst/>
+                        </a:rPr>
+                        <a:t>LSTM Autoencoder</a:t>
+                      </a:r>
+                      <a:endParaRPr lang="en-PK" sz="1800" dirty="0">
+                        <a:effectLst/>
+                        <a:latin typeface="Arial" panose="020B0604020202020204" pitchFamily="34" charset="0"/>
+                        <a:ea typeface="Arial" panose="020B0604020202020204" pitchFamily="34" charset="0"/>
+                      </a:endParaRPr>
+                    </a:p>
+                  </a:txBody>
+                  <a:tcPr marL="76200" marR="76200" marT="50800" marB="50800"/>
+                </a:tc>
+                <a:tc>
+                  <a:txBody>
+                    <a:bodyPr/>
+                    <a:lstStyle/>
+                    <a:p>
+                      <a:pPr algn="l">
+                        <a:buNone/>
+                      </a:pPr>
+                      <a:r>
+                        <a:rPr lang="en-PK" sz="1800" dirty="0">
+                          <a:effectLst/>
+                        </a:rPr>
+                        <a:t>0.6519</a:t>
+                      </a:r>
+                      <a:endParaRPr lang="en-PK" sz="1800" dirty="0">
+                        <a:effectLst/>
+                        <a:latin typeface="Arial" panose="020B0604020202020204" pitchFamily="34" charset="0"/>
+                        <a:ea typeface="Arial" panose="020B0604020202020204" pitchFamily="34" charset="0"/>
+                      </a:endParaRPr>
+                    </a:p>
+                  </a:txBody>
+                  <a:tcPr marL="76200" marR="76200" marT="50800" marB="50800"/>
+                </a:tc>
+                <a:tc>
+                  <a:txBody>
+                    <a:bodyPr/>
+                    <a:lstStyle/>
+                    <a:p>
+                      <a:pPr algn="l">
+                        <a:buNone/>
+                      </a:pPr>
+                      <a:r>
+                        <a:rPr lang="en-PK" sz="1800" dirty="0">
+                          <a:effectLst/>
+                        </a:rPr>
+                        <a:t>0.29</a:t>
+                      </a:r>
+                      <a:endParaRPr lang="en-PK" sz="1800" dirty="0">
+                        <a:effectLst/>
+                        <a:latin typeface="Arial" panose="020B0604020202020204" pitchFamily="34" charset="0"/>
+                        <a:ea typeface="Arial" panose="020B0604020202020204" pitchFamily="34" charset="0"/>
+                      </a:endParaRPr>
+                    </a:p>
+                  </a:txBody>
+                  <a:tcPr marL="76200" marR="76200" marT="50800" marB="50800"/>
+                </a:tc>
+                <a:tc>
+                  <a:txBody>
+                    <a:bodyPr/>
+                    <a:lstStyle/>
+                    <a:p>
+                      <a:pPr algn="l">
+                        <a:buNone/>
+                      </a:pPr>
+                      <a:r>
+                        <a:rPr lang="en-PK" sz="1800" dirty="0">
+                          <a:effectLst/>
+                        </a:rPr>
+                        <a:t>0.45</a:t>
+                      </a:r>
+                      <a:endParaRPr lang="en-PK" sz="1800" dirty="0">
+                        <a:effectLst/>
+                        <a:latin typeface="Arial" panose="020B0604020202020204" pitchFamily="34" charset="0"/>
+                        <a:ea typeface="Arial" panose="020B0604020202020204" pitchFamily="34" charset="0"/>
+                      </a:endParaRPr>
+                    </a:p>
+                  </a:txBody>
+                  <a:tcPr marL="76200" marR="76200" marT="50800" marB="50800"/>
+                </a:tc>
+                <a:tc>
+                  <a:txBody>
+                    <a:bodyPr/>
+                    <a:lstStyle/>
+                    <a:p>
+                      <a:pPr algn="l">
+                        <a:buNone/>
+                      </a:pPr>
+                      <a:r>
+                        <a:rPr lang="en-PK" sz="1800">
+                          <a:effectLst/>
+                        </a:rPr>
+                        <a:t>Average</a:t>
+                      </a:r>
+                      <a:endParaRPr lang="en-PK" sz="1800">
+                        <a:effectLst/>
+                        <a:latin typeface="Arial" panose="020B0604020202020204" pitchFamily="34" charset="0"/>
+                        <a:ea typeface="Arial" panose="020B0604020202020204" pitchFamily="34" charset="0"/>
+                      </a:endParaRPr>
+                    </a:p>
+                  </a:txBody>
+                  <a:tcPr marL="76200" marR="76200" marT="50800" marB="50800"/>
+                </a:tc>
+                <a:extLst>
+                  <a:ext uri="{0D108BD9-81ED-4DB2-BD59-A6C34878D82A}">
+                    <a16:rowId xmlns:a16="http://schemas.microsoft.com/office/drawing/2014/main" val="3096906917"/>
+                  </a:ext>
+                </a:extLst>
+              </a:tr>
+              <a:tr h="466864">
+                <a:tc>
+                  <a:txBody>
+                    <a:bodyPr/>
+                    <a:lstStyle/>
+                    <a:p>
+                      <a:pPr algn="l">
+                        <a:buNone/>
+                      </a:pPr>
+                      <a:r>
+                        <a:rPr lang="en-PK" sz="1800">
+                          <a:effectLst/>
+                        </a:rPr>
+                        <a:t>GAN</a:t>
+                      </a:r>
+                      <a:endParaRPr lang="en-PK" sz="1800">
+                        <a:effectLst/>
+                        <a:latin typeface="Arial" panose="020B0604020202020204" pitchFamily="34" charset="0"/>
+                        <a:ea typeface="Arial" panose="020B0604020202020204" pitchFamily="34" charset="0"/>
+                      </a:endParaRPr>
+                    </a:p>
+                  </a:txBody>
+                  <a:tcPr marL="76200" marR="76200" marT="50800" marB="50800"/>
+                </a:tc>
+                <a:tc>
+                  <a:txBody>
+                    <a:bodyPr/>
+                    <a:lstStyle/>
+                    <a:p>
+                      <a:pPr algn="l">
+                        <a:buNone/>
+                      </a:pPr>
+                      <a:r>
+                        <a:rPr lang="en-PK" sz="1800">
+                          <a:effectLst/>
+                        </a:rPr>
+                        <a:t>0.6133</a:t>
+                      </a:r>
+                      <a:endParaRPr lang="en-PK" sz="1800">
+                        <a:effectLst/>
+                        <a:latin typeface="Arial" panose="020B0604020202020204" pitchFamily="34" charset="0"/>
+                        <a:ea typeface="Arial" panose="020B0604020202020204" pitchFamily="34" charset="0"/>
+                      </a:endParaRPr>
+                    </a:p>
+                  </a:txBody>
+                  <a:tcPr marL="76200" marR="76200" marT="50800" marB="50800"/>
+                </a:tc>
+                <a:tc>
+                  <a:txBody>
+                    <a:bodyPr/>
+                    <a:lstStyle/>
+                    <a:p>
+                      <a:pPr algn="l">
+                        <a:buNone/>
+                      </a:pPr>
+                      <a:r>
+                        <a:rPr lang="en-PK" sz="1800" dirty="0">
+                          <a:effectLst/>
+                        </a:rPr>
+                        <a:t>0.01</a:t>
+                      </a:r>
+                      <a:endParaRPr lang="en-PK" sz="1800" dirty="0">
+                        <a:effectLst/>
+                        <a:latin typeface="Arial" panose="020B0604020202020204" pitchFamily="34" charset="0"/>
+                        <a:ea typeface="Arial" panose="020B0604020202020204" pitchFamily="34" charset="0"/>
+                      </a:endParaRPr>
+                    </a:p>
+                  </a:txBody>
+                  <a:tcPr marL="76200" marR="76200" marT="50800" marB="50800"/>
+                </a:tc>
+                <a:tc>
+                  <a:txBody>
+                    <a:bodyPr/>
+                    <a:lstStyle/>
+                    <a:p>
+                      <a:pPr algn="l">
+                        <a:buNone/>
+                      </a:pPr>
+                      <a:r>
+                        <a:rPr lang="en-PK" sz="1800" dirty="0">
+                          <a:effectLst/>
+                        </a:rPr>
+                        <a:t>0.03</a:t>
+                      </a:r>
+                      <a:endParaRPr lang="en-PK" sz="1800" dirty="0">
+                        <a:effectLst/>
+                        <a:latin typeface="Arial" panose="020B0604020202020204" pitchFamily="34" charset="0"/>
+                        <a:ea typeface="Arial" panose="020B0604020202020204" pitchFamily="34" charset="0"/>
+                      </a:endParaRPr>
+                    </a:p>
+                  </a:txBody>
+                  <a:tcPr marL="76200" marR="76200" marT="50800" marB="50800"/>
+                </a:tc>
+                <a:tc>
+                  <a:txBody>
+                    <a:bodyPr/>
+                    <a:lstStyle/>
+                    <a:p>
+                      <a:pPr algn="l">
+                        <a:buNone/>
+                      </a:pPr>
+                      <a:r>
+                        <a:rPr lang="en-PK" sz="1800" dirty="0">
+                          <a:effectLst/>
+                        </a:rPr>
+                        <a:t>❌ Poor</a:t>
+                      </a:r>
+                      <a:endParaRPr lang="en-PK" sz="1800" dirty="0">
+                        <a:effectLst/>
+                        <a:latin typeface="Arial" panose="020B0604020202020204" pitchFamily="34" charset="0"/>
+                        <a:ea typeface="Arial" panose="020B0604020202020204" pitchFamily="34" charset="0"/>
+                      </a:endParaRPr>
+                    </a:p>
+                  </a:txBody>
+                  <a:tcPr marL="76200" marR="76200" marT="50800" marB="50800"/>
+                </a:tc>
+                <a:extLst>
+                  <a:ext uri="{0D108BD9-81ED-4DB2-BD59-A6C34878D82A}">
+                    <a16:rowId xmlns:a16="http://schemas.microsoft.com/office/drawing/2014/main" val="2350705500"/>
+                  </a:ext>
+                </a:extLst>
+              </a:tr>
+              <a:tr h="466864">
+                <a:tc>
+                  <a:txBody>
+                    <a:bodyPr/>
+                    <a:lstStyle/>
+                    <a:p>
+                      <a:pPr algn="l">
+                        <a:buNone/>
+                      </a:pPr>
+                      <a:r>
+                        <a:rPr lang="en-PK" sz="1800">
+                          <a:effectLst/>
+                        </a:rPr>
+                        <a:t>VAE</a:t>
+                      </a:r>
+                      <a:endParaRPr lang="en-PK" sz="1800">
+                        <a:effectLst/>
+                        <a:latin typeface="Arial" panose="020B0604020202020204" pitchFamily="34" charset="0"/>
+                        <a:ea typeface="Arial" panose="020B0604020202020204" pitchFamily="34" charset="0"/>
+                      </a:endParaRPr>
+                    </a:p>
+                  </a:txBody>
+                  <a:tcPr marL="76200" marR="76200" marT="50800" marB="50800"/>
+                </a:tc>
+                <a:tc>
+                  <a:txBody>
+                    <a:bodyPr/>
+                    <a:lstStyle/>
+                    <a:p>
+                      <a:pPr algn="l">
+                        <a:buNone/>
+                      </a:pPr>
+                      <a:r>
+                        <a:rPr lang="en-PK" sz="1800">
+                          <a:effectLst/>
+                        </a:rPr>
+                        <a:t>0.5235</a:t>
+                      </a:r>
+                      <a:endParaRPr lang="en-PK" sz="1800">
+                        <a:effectLst/>
+                        <a:latin typeface="Arial" panose="020B0604020202020204" pitchFamily="34" charset="0"/>
+                        <a:ea typeface="Arial" panose="020B0604020202020204" pitchFamily="34" charset="0"/>
+                      </a:endParaRPr>
+                    </a:p>
+                  </a:txBody>
+                  <a:tcPr marL="76200" marR="76200" marT="50800" marB="50800"/>
+                </a:tc>
+                <a:tc>
+                  <a:txBody>
+                    <a:bodyPr/>
+                    <a:lstStyle/>
+                    <a:p>
+                      <a:pPr algn="l">
+                        <a:buNone/>
+                      </a:pPr>
+                      <a:r>
+                        <a:rPr lang="en-PK" sz="1800" dirty="0">
+                          <a:effectLst/>
+                        </a:rPr>
+                        <a:t>0.07</a:t>
+                      </a:r>
+                      <a:endParaRPr lang="en-PK" sz="1800" dirty="0">
+                        <a:effectLst/>
+                        <a:latin typeface="Arial" panose="020B0604020202020204" pitchFamily="34" charset="0"/>
+                        <a:ea typeface="Arial" panose="020B0604020202020204" pitchFamily="34" charset="0"/>
+                      </a:endParaRPr>
+                    </a:p>
+                  </a:txBody>
+                  <a:tcPr marL="76200" marR="76200" marT="50800" marB="50800"/>
+                </a:tc>
+                <a:tc>
+                  <a:txBody>
+                    <a:bodyPr/>
+                    <a:lstStyle/>
+                    <a:p>
+                      <a:pPr algn="l">
+                        <a:buNone/>
+                      </a:pPr>
+                      <a:r>
+                        <a:rPr lang="en-PK" sz="1800" dirty="0">
+                          <a:effectLst/>
+                        </a:rPr>
+                        <a:t>0.12</a:t>
+                      </a:r>
+                      <a:endParaRPr lang="en-PK" sz="1800" dirty="0">
+                        <a:effectLst/>
+                        <a:latin typeface="Arial" panose="020B0604020202020204" pitchFamily="34" charset="0"/>
+                        <a:ea typeface="Arial" panose="020B0604020202020204" pitchFamily="34" charset="0"/>
+                      </a:endParaRPr>
+                    </a:p>
+                  </a:txBody>
+                  <a:tcPr marL="76200" marR="76200" marT="50800" marB="50800"/>
+                </a:tc>
+                <a:tc>
+                  <a:txBody>
+                    <a:bodyPr/>
+                    <a:lstStyle/>
+                    <a:p>
+                      <a:pPr algn="l">
+                        <a:buNone/>
+                      </a:pPr>
+                      <a:r>
+                        <a:rPr lang="en-PK" sz="1800" dirty="0">
+                          <a:effectLst/>
+                        </a:rPr>
+                        <a:t>❌ Poor</a:t>
+                      </a:r>
+                      <a:endParaRPr lang="en-PK" sz="1800" dirty="0">
+                        <a:effectLst/>
+                        <a:latin typeface="Arial" panose="020B0604020202020204" pitchFamily="34" charset="0"/>
+                        <a:ea typeface="Arial" panose="020B0604020202020204" pitchFamily="34" charset="0"/>
+                      </a:endParaRPr>
+                    </a:p>
+                  </a:txBody>
+                  <a:tcPr marL="76200" marR="76200" marT="50800" marB="50800"/>
+                </a:tc>
+                <a:extLst>
+                  <a:ext uri="{0D108BD9-81ED-4DB2-BD59-A6C34878D82A}">
+                    <a16:rowId xmlns:a16="http://schemas.microsoft.com/office/drawing/2014/main" val="242998160"/>
+                  </a:ext>
+                </a:extLst>
+              </a:tr>
+              <a:tr h="466864">
+                <a:tc>
+                  <a:txBody>
+                    <a:bodyPr/>
+                    <a:lstStyle/>
+                    <a:p>
+                      <a:pPr algn="l">
+                        <a:buNone/>
+                      </a:pPr>
+                      <a:r>
+                        <a:rPr lang="en-PK" sz="1800" dirty="0">
+                          <a:effectLst/>
+                        </a:rPr>
+                        <a:t>One-Class SVM</a:t>
+                      </a:r>
+                      <a:endParaRPr lang="en-PK" sz="1800" dirty="0">
+                        <a:effectLst/>
+                        <a:latin typeface="Arial" panose="020B0604020202020204" pitchFamily="34" charset="0"/>
+                        <a:ea typeface="Arial" panose="020B0604020202020204" pitchFamily="34" charset="0"/>
+                      </a:endParaRPr>
+                    </a:p>
+                  </a:txBody>
+                  <a:tcPr marL="76200" marR="76200" marT="50800" marB="50800"/>
+                </a:tc>
+                <a:tc>
+                  <a:txBody>
+                    <a:bodyPr/>
+                    <a:lstStyle/>
+                    <a:p>
+                      <a:pPr algn="l">
+                        <a:buNone/>
+                      </a:pPr>
+                      <a:r>
+                        <a:rPr lang="en-PK" sz="1800">
+                          <a:effectLst/>
+                        </a:rPr>
+                        <a:t>0.2383</a:t>
+                      </a:r>
+                      <a:endParaRPr lang="en-PK" sz="1800">
+                        <a:effectLst/>
+                        <a:latin typeface="Arial" panose="020B0604020202020204" pitchFamily="34" charset="0"/>
+                        <a:ea typeface="Arial" panose="020B0604020202020204" pitchFamily="34" charset="0"/>
+                      </a:endParaRPr>
+                    </a:p>
+                  </a:txBody>
+                  <a:tcPr marL="76200" marR="76200" marT="50800" marB="50800"/>
+                </a:tc>
+                <a:tc>
+                  <a:txBody>
+                    <a:bodyPr/>
+                    <a:lstStyle/>
+                    <a:p>
+                      <a:pPr algn="l">
+                        <a:buNone/>
+                      </a:pPr>
+                      <a:r>
+                        <a:rPr lang="en-PK" sz="1800">
+                          <a:effectLst/>
+                        </a:rPr>
+                        <a:t>0.20</a:t>
+                      </a:r>
+                      <a:endParaRPr lang="en-PK" sz="1800">
+                        <a:effectLst/>
+                        <a:latin typeface="Arial" panose="020B0604020202020204" pitchFamily="34" charset="0"/>
+                        <a:ea typeface="Arial" panose="020B0604020202020204" pitchFamily="34" charset="0"/>
+                      </a:endParaRPr>
+                    </a:p>
+                  </a:txBody>
+                  <a:tcPr marL="76200" marR="76200" marT="50800" marB="50800"/>
+                </a:tc>
+                <a:tc>
+                  <a:txBody>
+                    <a:bodyPr/>
+                    <a:lstStyle/>
+                    <a:p>
+                      <a:pPr algn="l">
+                        <a:buNone/>
+                      </a:pPr>
+                      <a:r>
+                        <a:rPr lang="en-PK" sz="1800" dirty="0">
+                          <a:effectLst/>
+                        </a:rPr>
+                        <a:t>0.32</a:t>
+                      </a:r>
+                      <a:endParaRPr lang="en-PK" sz="1800" dirty="0">
+                        <a:effectLst/>
+                        <a:latin typeface="Arial" panose="020B0604020202020204" pitchFamily="34" charset="0"/>
+                        <a:ea typeface="Arial" panose="020B0604020202020204" pitchFamily="34" charset="0"/>
+                      </a:endParaRPr>
+                    </a:p>
+                  </a:txBody>
+                  <a:tcPr marL="76200" marR="76200" marT="50800" marB="50800"/>
+                </a:tc>
+                <a:tc>
+                  <a:txBody>
+                    <a:bodyPr/>
+                    <a:lstStyle/>
+                    <a:p>
+                      <a:pPr algn="l">
+                        <a:buNone/>
+                      </a:pPr>
+                      <a:r>
+                        <a:rPr lang="en-PK" sz="1800" dirty="0">
+                          <a:effectLst/>
+                        </a:rPr>
+                        <a:t>❌ Poor</a:t>
+                      </a:r>
+                      <a:endParaRPr lang="en-PK" sz="1800" dirty="0">
+                        <a:effectLst/>
+                        <a:latin typeface="Arial" panose="020B0604020202020204" pitchFamily="34" charset="0"/>
+                        <a:ea typeface="Arial" panose="020B0604020202020204" pitchFamily="34" charset="0"/>
+                      </a:endParaRPr>
+                    </a:p>
+                  </a:txBody>
+                  <a:tcPr marL="76200" marR="76200" marT="50800" marB="50800"/>
+                </a:tc>
+                <a:extLst>
+                  <a:ext uri="{0D108BD9-81ED-4DB2-BD59-A6C34878D82A}">
+                    <a16:rowId xmlns:a16="http://schemas.microsoft.com/office/drawing/2014/main" val="2591253701"/>
+                  </a:ext>
+                </a:extLst>
+              </a:tr>
+              <a:tr h="466864">
+                <a:tc>
+                  <a:txBody>
+                    <a:bodyPr/>
+                    <a:lstStyle/>
+                    <a:p>
+                      <a:pPr algn="l">
+                        <a:buNone/>
+                      </a:pPr>
+                      <a:r>
+                        <a:rPr lang="en-PK" sz="1800" dirty="0">
+                          <a:effectLst/>
+                        </a:rPr>
+                        <a:t>Isolation Forest</a:t>
+                      </a:r>
+                      <a:endParaRPr lang="en-PK" sz="1800" dirty="0">
+                        <a:effectLst/>
+                        <a:latin typeface="Arial" panose="020B0604020202020204" pitchFamily="34" charset="0"/>
+                        <a:ea typeface="Arial" panose="020B0604020202020204" pitchFamily="34" charset="0"/>
+                      </a:endParaRPr>
+                    </a:p>
+                  </a:txBody>
+                  <a:tcPr marL="76200" marR="76200" marT="50800" marB="50800"/>
+                </a:tc>
+                <a:tc>
+                  <a:txBody>
+                    <a:bodyPr/>
+                    <a:lstStyle/>
+                    <a:p>
+                      <a:pPr algn="l">
+                        <a:buNone/>
+                      </a:pPr>
+                      <a:r>
+                        <a:rPr lang="en-PK" sz="1800">
+                          <a:effectLst/>
+                        </a:rPr>
+                        <a:t>0.2092</a:t>
+                      </a:r>
+                      <a:endParaRPr lang="en-PK" sz="1800">
+                        <a:effectLst/>
+                        <a:latin typeface="Arial" panose="020B0604020202020204" pitchFamily="34" charset="0"/>
+                        <a:ea typeface="Arial" panose="020B0604020202020204" pitchFamily="34" charset="0"/>
+                      </a:endParaRPr>
+                    </a:p>
+                  </a:txBody>
+                  <a:tcPr marL="76200" marR="76200" marT="50800" marB="50800"/>
+                </a:tc>
+                <a:tc>
+                  <a:txBody>
+                    <a:bodyPr/>
+                    <a:lstStyle/>
+                    <a:p>
+                      <a:pPr algn="l">
+                        <a:buNone/>
+                      </a:pPr>
+                      <a:r>
+                        <a:rPr lang="en-PK" sz="1800">
+                          <a:effectLst/>
+                        </a:rPr>
+                        <a:t>0.46</a:t>
+                      </a:r>
+                      <a:endParaRPr lang="en-PK" sz="1800">
+                        <a:effectLst/>
+                        <a:latin typeface="Arial" panose="020B0604020202020204" pitchFamily="34" charset="0"/>
+                        <a:ea typeface="Arial" panose="020B0604020202020204" pitchFamily="34" charset="0"/>
+                      </a:endParaRPr>
+                    </a:p>
+                  </a:txBody>
+                  <a:tcPr marL="76200" marR="76200" marT="50800" marB="50800"/>
+                </a:tc>
+                <a:tc>
+                  <a:txBody>
+                    <a:bodyPr/>
+                    <a:lstStyle/>
+                    <a:p>
+                      <a:pPr algn="l">
+                        <a:buNone/>
+                      </a:pPr>
+                      <a:r>
+                        <a:rPr lang="en-PK" sz="1800">
+                          <a:effectLst/>
+                        </a:rPr>
+                        <a:t>0.60</a:t>
+                      </a:r>
+                      <a:endParaRPr lang="en-PK" sz="1800">
+                        <a:effectLst/>
+                        <a:latin typeface="Arial" panose="020B0604020202020204" pitchFamily="34" charset="0"/>
+                        <a:ea typeface="Arial" panose="020B0604020202020204" pitchFamily="34" charset="0"/>
+                      </a:endParaRPr>
+                    </a:p>
+                  </a:txBody>
+                  <a:tcPr marL="76200" marR="76200" marT="50800" marB="50800"/>
+                </a:tc>
+                <a:tc>
+                  <a:txBody>
+                    <a:bodyPr/>
+                    <a:lstStyle/>
+                    <a:p>
+                      <a:pPr algn="l">
+                        <a:buNone/>
+                      </a:pPr>
+                      <a:r>
+                        <a:rPr lang="en-PK" sz="1800" dirty="0">
+                          <a:effectLst/>
+                        </a:rPr>
+                        <a:t>❌ Poor</a:t>
+                      </a:r>
+                      <a:endParaRPr lang="en-PK" sz="1800" dirty="0">
+                        <a:effectLst/>
+                        <a:latin typeface="Arial" panose="020B0604020202020204" pitchFamily="34" charset="0"/>
+                        <a:ea typeface="Arial" panose="020B0604020202020204" pitchFamily="34" charset="0"/>
+                      </a:endParaRPr>
+                    </a:p>
+                  </a:txBody>
+                  <a:tcPr marL="76200" marR="76200" marT="50800" marB="50800"/>
+                </a:tc>
+                <a:extLst>
+                  <a:ext uri="{0D108BD9-81ED-4DB2-BD59-A6C34878D82A}">
+                    <a16:rowId xmlns:a16="http://schemas.microsoft.com/office/drawing/2014/main" val="2459104397"/>
+                  </a:ext>
+                </a:extLst>
+              </a:tr>
+            </a:tbl>
+          </a:graphicData>
+        </a:graphic>
+      </p:graphicFrame>
+      <p:sp>
+        <p:nvSpPr>
+          <p:cNvPr id="4" name="TextBox 3">
+            <a:extLst>
+              <a:ext uri="{FF2B5EF4-FFF2-40B4-BE49-F238E27FC236}">
+                <a16:creationId xmlns:a16="http://schemas.microsoft.com/office/drawing/2014/main" id="{F7197D80-E5BF-0C81-D0A6-039EB213621C}"/>
+              </a:ext>
+            </a:extLst>
+          </p:cNvPr>
+          <p:cNvSpPr txBox="1"/>
+          <p:nvPr/>
+        </p:nvSpPr>
+        <p:spPr>
+          <a:xfrm>
+            <a:off x="1028699" y="528578"/>
+            <a:ext cx="8910083" cy="938719"/>
+          </a:xfrm>
+          <a:prstGeom prst="rect">
+            <a:avLst/>
+          </a:prstGeom>
+          <a:noFill/>
+        </p:spPr>
+        <p:txBody>
+          <a:bodyPr wrap="square">
+            <a:spAutoFit/>
+          </a:bodyPr>
+          <a:lstStyle/>
+          <a:p>
+            <a:pPr>
+              <a:spcBef>
+                <a:spcPts val="1200"/>
+              </a:spcBef>
+              <a:spcAft>
+                <a:spcPts val="600"/>
+              </a:spcAft>
+              <a:buNone/>
+            </a:pPr>
+            <a:r>
+              <a:rPr lang="en-US" sz="3150" b="1" i="0" u="none" strike="noStrike" cap="none" dirty="0">
+                <a:solidFill>
+                  <a:srgbClr val="003366"/>
+                </a:solidFill>
+                <a:latin typeface="Times New Roman" panose="02020603050405020304" pitchFamily="18" charset="0"/>
+                <a:ea typeface="Helvetica Neue"/>
+                <a:cs typeface="Times New Roman" panose="02020603050405020304" pitchFamily="18" charset="0"/>
+                <a:sym typeface="Helvetica Neue"/>
+              </a:rPr>
+              <a:t>Results: </a:t>
+            </a:r>
+            <a:r>
+              <a:rPr lang="en-PK" sz="3150" b="1" dirty="0">
+                <a:solidFill>
+                  <a:srgbClr val="003366"/>
+                </a:solidFill>
+                <a:latin typeface="Times New Roman" panose="02020603050405020304" pitchFamily="18" charset="0"/>
+                <a:cs typeface="Times New Roman" panose="02020603050405020304" pitchFamily="18" charset="0"/>
+              </a:rPr>
+              <a:t>Hadoop</a:t>
+            </a:r>
+            <a:r>
+              <a:rPr lang="en-PK" b="1" dirty="0"/>
+              <a:t> </a:t>
+            </a:r>
+            <a:r>
+              <a:rPr lang="en-PK" sz="3150" b="1" dirty="0">
+                <a:solidFill>
+                  <a:srgbClr val="003366"/>
+                </a:solidFill>
+                <a:latin typeface="Times New Roman" panose="02020603050405020304" pitchFamily="18" charset="0"/>
+                <a:cs typeface="Times New Roman" panose="02020603050405020304" pitchFamily="18" charset="0"/>
+              </a:rPr>
+              <a:t> Dataset Results</a:t>
+            </a:r>
+          </a:p>
+          <a:p>
+            <a:pPr marL="0" marR="0" lvl="0" indent="0" algn="l" rtl="0">
+              <a:spcBef>
+                <a:spcPts val="0"/>
+              </a:spcBef>
+              <a:spcAft>
+                <a:spcPts val="0"/>
+              </a:spcAft>
+              <a:buNone/>
+            </a:pPr>
+            <a:endParaRPr lang="en-US" sz="1800" dirty="0">
+              <a:latin typeface="Times New Roman" panose="02020603050405020304" pitchFamily="18" charset="0"/>
+              <a:cs typeface="Times New Roman" panose="02020603050405020304" pitchFamily="18" charset="0"/>
+            </a:endParaRPr>
+          </a:p>
+        </p:txBody>
+      </p:sp>
+      <p:sp>
+        <p:nvSpPr>
+          <p:cNvPr id="6" name="Google Shape;347;p24">
+            <a:extLst>
+              <a:ext uri="{FF2B5EF4-FFF2-40B4-BE49-F238E27FC236}">
+                <a16:creationId xmlns:a16="http://schemas.microsoft.com/office/drawing/2014/main" id="{D1B1E8FB-9B09-43FE-F863-8D7E57E8D419}"/>
+              </a:ext>
+            </a:extLst>
+          </p:cNvPr>
+          <p:cNvSpPr/>
+          <p:nvPr/>
+        </p:nvSpPr>
+        <p:spPr>
+          <a:xfrm>
+            <a:off x="762000" y="1200150"/>
+            <a:ext cx="10668000" cy="28575"/>
+          </a:xfrm>
+          <a:prstGeom prst="rect">
+            <a:avLst/>
+          </a:prstGeom>
+          <a:solidFill>
+            <a:srgbClr val="003366"/>
+          </a:solidFill>
+          <a:ln>
+            <a:noFill/>
+          </a:ln>
+        </p:spPr>
+        <p:txBody>
+          <a:bodyPr spcFirstLastPara="1" wrap="square" lIns="91425" tIns="45700" rIns="91425" bIns="45700" anchor="ctr" anchorCtr="0">
+            <a:noAutofit/>
+          </a:bodyPr>
+          <a:lstStyle/>
+          <a:p>
+            <a:pPr marL="0" marR="0" lvl="0" indent="0" algn="ctr" rtl="0">
+              <a:spcBef>
+                <a:spcPts val="0"/>
+              </a:spcBef>
+              <a:spcAft>
+                <a:spcPts val="0"/>
+              </a:spcAft>
+              <a:buNone/>
+            </a:pPr>
+            <a:endParaRPr sz="1800" b="0" i="0" u="none" strike="noStrike" cap="none">
+              <a:solidFill>
+                <a:schemeClr val="dk1"/>
+              </a:solidFill>
+              <a:latin typeface="Times New Roman" panose="02020603050405020304" pitchFamily="18" charset="0"/>
+              <a:ea typeface="Calibri"/>
+              <a:cs typeface="Times New Roman" panose="02020603050405020304" pitchFamily="18" charset="0"/>
+              <a:sym typeface="Calibri"/>
+            </a:endParaRPr>
+          </a:p>
+        </p:txBody>
+      </p:sp>
+    </p:spTree>
+    <p:extLst>
+      <p:ext uri="{BB962C8B-B14F-4D97-AF65-F5344CB8AC3E}">
+        <p14:creationId xmlns:p14="http://schemas.microsoft.com/office/powerpoint/2010/main" val="507702667"/>
+      </p:ext>
+    </p:extLst>
+  </p:cSld>
+  <p:clrMapOvr>
+    <a:masterClrMapping/>
+  </p:clrMapOvr>
+  <mc:AlternateContent xmlns:mc="http://schemas.openxmlformats.org/markup-compatibility/2006" xmlns:p14="http://schemas.microsoft.com/office/powerpoint/2010/main">
+    <mc:Choice Requires="p14">
+      <p:transition spd="slow" p14:dur="1500">
+        <p:random/>
+      </p:transition>
+    </mc:Choice>
+    <mc:Fallback xmlns="">
+      <p:transition spd="slow">
+        <p:random/>
+      </p:transition>
+    </mc:Fallback>
+  </mc:AlternateContent>
+</p:sld>
+</file>
+
+<file path=ppt/slides/slide26.xml><?xml version="1.0" encoding="utf-8"?>
 <p:sld xmlns:a="http://schemas.openxmlformats.org/drawingml/2006/main" xmlns:r="http://schemas.openxmlformats.org/officeDocument/2006/relationships" xmlns:p="http://schemas.openxmlformats.org/presentationml/2006/main">
   <p:cSld>
     <p:spTree>
@@ -16870,7 +19108,7 @@
 </p:sld>
 </file>
 
-<file path=ppt/slides/slide25.xml><?xml version="1.0" encoding="utf-8"?>
+<file path=ppt/slides/slide27.xml><?xml version="1.0" encoding="utf-8"?>
 <p:sld xmlns:a="http://schemas.openxmlformats.org/drawingml/2006/main" xmlns:r="http://schemas.openxmlformats.org/officeDocument/2006/relationships" xmlns:p="http://schemas.openxmlformats.org/presentationml/2006/main">
   <p:cSld>
     <p:spTree>
@@ -18903,7 +21141,7 @@
 </p:sld>
 </file>
 
-<file path=ppt/slides/slide26.xml><?xml version="1.0" encoding="utf-8"?>
+<file path=ppt/slides/slide28.xml><?xml version="1.0" encoding="utf-8"?>
 <p:sld xmlns:a="http://schemas.openxmlformats.org/drawingml/2006/main" xmlns:r="http://schemas.openxmlformats.org/officeDocument/2006/relationships" xmlns:p="http://schemas.openxmlformats.org/presentationml/2006/main">
   <p:cSld>
     <p:spTree>
@@ -19152,7 +21390,7 @@
 </p:sld>
 </file>
 
-<file path=ppt/slides/slide27.xml><?xml version="1.0" encoding="utf-8"?>
+<file path=ppt/slides/slide29.xml><?xml version="1.0" encoding="utf-8"?>
 <p:sld xmlns:a="http://schemas.openxmlformats.org/drawingml/2006/main" xmlns:r="http://schemas.openxmlformats.org/officeDocument/2006/relationships" xmlns:p="http://schemas.openxmlformats.org/presentationml/2006/main">
   <p:cSld>
     <p:spTree>
@@ -19440,533 +21678,6 @@
     <p:extLst>
       <p:ext uri="{BB962C8B-B14F-4D97-AF65-F5344CB8AC3E}">
         <p14:creationId xmlns:p14="http://schemas.microsoft.com/office/powerpoint/2010/main" val="2663058148"/>
-      </p:ext>
-    </p:extLst>
-  </p:cSld>
-  <p:clrMapOvr>
-    <a:masterClrMapping/>
-  </p:clrMapOvr>
-  <mc:AlternateContent xmlns:mc="http://schemas.openxmlformats.org/markup-compatibility/2006" xmlns:p14="http://schemas.microsoft.com/office/powerpoint/2010/main">
-    <mc:Choice Requires="p14">
-      <p:transition spd="slow" p14:dur="1500">
-        <p:random/>
-      </p:transition>
-    </mc:Choice>
-    <mc:Fallback xmlns="">
-      <p:transition spd="slow">
-        <p:random/>
-      </p:transition>
-    </mc:Fallback>
-  </mc:AlternateContent>
-</p:sld>
-</file>
-
-<file path=ppt/slides/slide28.xml><?xml version="1.0" encoding="utf-8"?>
-<p:sld xmlns:a="http://schemas.openxmlformats.org/drawingml/2006/main" xmlns:r="http://schemas.openxmlformats.org/officeDocument/2006/relationships" xmlns:p="http://schemas.openxmlformats.org/presentationml/2006/main">
-  <p:cSld>
-    <p:spTree>
-      <p:nvGrpSpPr>
-        <p:cNvPr id="1" name=""/>
-        <p:cNvGrpSpPr/>
-        <p:nvPr/>
-      </p:nvGrpSpPr>
-      <p:grpSpPr>
-        <a:xfrm>
-          <a:off x="0" y="0"/>
-          <a:ext cx="0" cy="0"/>
-          <a:chOff x="0" y="0"/>
-          <a:chExt cx="0" cy="0"/>
-        </a:xfrm>
-      </p:grpSpPr>
-      <p:sp>
-        <p:nvSpPr>
-          <p:cNvPr id="2" name="Title 1">
-            <a:extLst>
-              <a:ext uri="{FF2B5EF4-FFF2-40B4-BE49-F238E27FC236}">
-                <a16:creationId xmlns:a16="http://schemas.microsoft.com/office/drawing/2014/main" id="{D5350369-3A8B-4DD0-1528-9A2577EB4D0F}"/>
-              </a:ext>
-            </a:extLst>
-          </p:cNvPr>
-          <p:cNvSpPr>
-            <a:spLocks noGrp="1"/>
-          </p:cNvSpPr>
-          <p:nvPr>
-            <p:ph type="title"/>
-          </p:nvPr>
-        </p:nvSpPr>
-        <p:spPr/>
-        <p:txBody>
-          <a:bodyPr/>
-          <a:lstStyle/>
-          <a:p>
-            <a:r>
-              <a:rPr lang="en-US" b="1" cap="none" dirty="0">
-                <a:solidFill>
-                  <a:srgbClr val="003366"/>
-                </a:solidFill>
-                <a:latin typeface="Times New Roman" panose="02020603050405020304" pitchFamily="18" charset="0"/>
-                <a:cs typeface="Times New Roman" panose="02020603050405020304" pitchFamily="18" charset="0"/>
-                <a:sym typeface="Poppins SemiBold"/>
-              </a:rPr>
-              <a:t>Thesis Core Finding and My Contribution</a:t>
-            </a:r>
-            <a:endParaRPr lang="en-PK" b="1" cap="none" dirty="0">
-              <a:solidFill>
-                <a:srgbClr val="003366"/>
-              </a:solidFill>
-              <a:latin typeface="Times New Roman" panose="02020603050405020304" pitchFamily="18" charset="0"/>
-              <a:cs typeface="Times New Roman" panose="02020603050405020304" pitchFamily="18" charset="0"/>
-            </a:endParaRPr>
-          </a:p>
-        </p:txBody>
-      </p:sp>
-      <p:sp>
-        <p:nvSpPr>
-          <p:cNvPr id="3" name="Content Placeholder 2">
-            <a:extLst>
-              <a:ext uri="{FF2B5EF4-FFF2-40B4-BE49-F238E27FC236}">
-                <a16:creationId xmlns:a16="http://schemas.microsoft.com/office/drawing/2014/main" id="{2A8AE484-9237-DF21-1810-6D7EE503F318}"/>
-              </a:ext>
-            </a:extLst>
-          </p:cNvPr>
-          <p:cNvSpPr>
-            <a:spLocks noGrp="1"/>
-          </p:cNvSpPr>
-          <p:nvPr>
-            <p:ph idx="1"/>
-          </p:nvPr>
-        </p:nvSpPr>
-        <p:spPr/>
-        <p:txBody>
-          <a:bodyPr>
-            <a:normAutofit fontScale="85000" lnSpcReduction="20000"/>
-          </a:bodyPr>
-          <a:lstStyle/>
-          <a:p>
-            <a:pPr algn="ctr"/>
-            <a:r>
-              <a:rPr lang="en-US" sz="3600" b="1" dirty="0">
-                <a:solidFill>
-                  <a:srgbClr val="38BDF8"/>
-                </a:solidFill>
-                <a:latin typeface="Times New Roman" panose="02020603050405020304" pitchFamily="18" charset="0"/>
-                <a:ea typeface="Poppins"/>
-                <a:cs typeface="Times New Roman" panose="02020603050405020304" pitchFamily="18" charset="0"/>
-                <a:sym typeface="Poppins"/>
-              </a:rPr>
-              <a:t>Supervised &gt; Unsupervised &gt; Generative</a:t>
-            </a:r>
-            <a:endParaRPr lang="en-US" sz="3600" dirty="0">
-              <a:latin typeface="Times New Roman" panose="02020603050405020304" pitchFamily="18" charset="0"/>
-              <a:cs typeface="Times New Roman" panose="02020603050405020304" pitchFamily="18" charset="0"/>
-            </a:endParaRPr>
-          </a:p>
-          <a:p>
-            <a:r>
-              <a:rPr lang="en-US" sz="2100" b="1" dirty="0">
-                <a:solidFill>
-                  <a:schemeClr val="tx1">
-                    <a:lumMod val="90000"/>
-                    <a:lumOff val="10000"/>
-                  </a:schemeClr>
-                </a:solidFill>
-                <a:latin typeface="Times New Roman" panose="02020603050405020304" pitchFamily="18" charset="0"/>
-                <a:cs typeface="Times New Roman" panose="02020603050405020304" pitchFamily="18" charset="0"/>
-                <a:sym typeface="Inter"/>
-              </a:rPr>
-              <a:t>Consistent Hierarchy Across All Datasets</a:t>
-            </a:r>
-            <a:endParaRPr lang="en-US" sz="2100" b="1" dirty="0">
-              <a:solidFill>
-                <a:schemeClr val="tx1">
-                  <a:lumMod val="90000"/>
-                  <a:lumOff val="10000"/>
-                </a:schemeClr>
-              </a:solidFill>
-              <a:latin typeface="Times New Roman" panose="02020603050405020304" pitchFamily="18" charset="0"/>
-              <a:cs typeface="Times New Roman" panose="02020603050405020304" pitchFamily="18" charset="0"/>
-            </a:endParaRPr>
-          </a:p>
-          <a:p>
-            <a:pPr>
-              <a:lnSpc>
-                <a:spcPct val="120000"/>
-              </a:lnSpc>
-            </a:pPr>
-            <a:r>
-              <a:rPr lang="en-US" sz="2100" dirty="0">
-                <a:solidFill>
-                  <a:srgbClr val="333333"/>
-                </a:solidFill>
-                <a:latin typeface="Times New Roman" panose="02020603050405020304" pitchFamily="18" charset="0"/>
-                <a:cs typeface="Times New Roman" panose="02020603050405020304" pitchFamily="18" charset="0"/>
-                <a:sym typeface="Inter"/>
-              </a:rPr>
-              <a:t>Despite removing the need for manual feature engineering, Generative models are significantly inferior to traditional supervised models for detecting anomalies in large-scale system logs due to structural mismatches and noise sensitivity.</a:t>
-            </a:r>
-            <a:endParaRPr lang="en-US" sz="1900" dirty="0">
-              <a:solidFill>
-                <a:srgbClr val="333333"/>
-              </a:solidFill>
-              <a:latin typeface="Times New Roman" panose="02020603050405020304" pitchFamily="18" charset="0"/>
-              <a:cs typeface="Times New Roman" panose="02020603050405020304" pitchFamily="18" charset="0"/>
-              <a:sym typeface="Inter"/>
-            </a:endParaRPr>
-          </a:p>
-          <a:p>
-            <a:r>
-              <a:rPr lang="en-PK" sz="2100" b="1" dirty="0">
-                <a:solidFill>
-                  <a:schemeClr val="tx1">
-                    <a:lumMod val="90000"/>
-                    <a:lumOff val="10000"/>
-                  </a:schemeClr>
-                </a:solidFill>
-                <a:latin typeface="Times New Roman" panose="02020603050405020304" pitchFamily="18" charset="0"/>
-                <a:cs typeface="Times New Roman" panose="02020603050405020304" pitchFamily="18" charset="0"/>
-              </a:rPr>
-              <a:t>My Contributions</a:t>
-            </a:r>
-          </a:p>
-          <a:p>
-            <a:pPr lvl="0">
-              <a:lnSpc>
-                <a:spcPct val="140000"/>
-              </a:lnSpc>
-            </a:pPr>
-            <a:r>
-              <a:rPr lang="en-PK" sz="2100" dirty="0">
-                <a:solidFill>
-                  <a:srgbClr val="333333"/>
-                </a:solidFill>
-                <a:latin typeface="Times New Roman" panose="02020603050405020304" pitchFamily="18" charset="0"/>
-                <a:cs typeface="Times New Roman" panose="02020603050405020304" pitchFamily="18" charset="0"/>
-              </a:rPr>
-              <a:t>Developed a comprehensive 5-phase comparative framework benchmarking across diverse architectures (HDFS, Spark, Hadoop).</a:t>
-            </a:r>
-          </a:p>
-          <a:p>
-            <a:pPr lvl="0">
-              <a:lnSpc>
-                <a:spcPct val="140000"/>
-              </a:lnSpc>
-            </a:pPr>
-            <a:r>
-              <a:rPr lang="en-PK" sz="2100" dirty="0">
-                <a:solidFill>
-                  <a:srgbClr val="333333"/>
-                </a:solidFill>
-                <a:latin typeface="Times New Roman" panose="02020603050405020304" pitchFamily="18" charset="0"/>
-                <a:cs typeface="Times New Roman" panose="02020603050405020304" pitchFamily="18" charset="0"/>
-              </a:rPr>
-              <a:t>Successfully solved extreme class imbalance (93.57% vs 0.14%) via SMOTE and targeted data pollution.</a:t>
-            </a:r>
-          </a:p>
-          <a:p>
-            <a:pPr lvl="0">
-              <a:lnSpc>
-                <a:spcPct val="140000"/>
-              </a:lnSpc>
-            </a:pPr>
-            <a:r>
-              <a:rPr lang="en-PK" sz="2100" dirty="0">
-                <a:solidFill>
-                  <a:srgbClr val="333333"/>
-                </a:solidFill>
-                <a:latin typeface="Times New Roman" panose="02020603050405020304" pitchFamily="18" charset="0"/>
-                <a:cs typeface="Times New Roman" panose="02020603050405020304" pitchFamily="18" charset="0"/>
-              </a:rPr>
-              <a:t>Proved the functional limitations of Generative AI vs Traditional ML, bridging a critical gap in current cybersecurity literature.</a:t>
-            </a:r>
-          </a:p>
-          <a:p>
-            <a:endParaRPr lang="en-US" sz="1800" dirty="0">
-              <a:solidFill>
-                <a:srgbClr val="333333"/>
-              </a:solidFill>
-              <a:latin typeface="Times New Roman" panose="02020603050405020304" pitchFamily="18" charset="0"/>
-              <a:cs typeface="Times New Roman" panose="02020603050405020304" pitchFamily="18" charset="0"/>
-            </a:endParaRPr>
-          </a:p>
-          <a:p>
-            <a:endParaRPr lang="en-PK" sz="1800" dirty="0"/>
-          </a:p>
-        </p:txBody>
-      </p:sp>
-      <p:sp>
-        <p:nvSpPr>
-          <p:cNvPr id="5" name="Google Shape;299;p22">
-            <a:extLst>
-              <a:ext uri="{FF2B5EF4-FFF2-40B4-BE49-F238E27FC236}">
-                <a16:creationId xmlns:a16="http://schemas.microsoft.com/office/drawing/2014/main" id="{93E5888D-174A-FA67-9866-9892C07F94EE}"/>
-              </a:ext>
-            </a:extLst>
-          </p:cNvPr>
-          <p:cNvSpPr/>
-          <p:nvPr/>
-        </p:nvSpPr>
-        <p:spPr>
-          <a:xfrm>
-            <a:off x="602986" y="1620871"/>
-            <a:ext cx="10668000" cy="28575"/>
-          </a:xfrm>
-          <a:prstGeom prst="rect">
-            <a:avLst/>
-          </a:prstGeom>
-          <a:solidFill>
-            <a:srgbClr val="003366"/>
-          </a:solidFill>
-          <a:ln>
-            <a:noFill/>
-          </a:ln>
-        </p:spPr>
-        <p:txBody>
-          <a:bodyPr spcFirstLastPara="1" wrap="square" lIns="91425" tIns="45700" rIns="91425" bIns="45700" anchor="ctr" anchorCtr="0">
-            <a:noAutofit/>
-          </a:bodyPr>
-          <a:lstStyle/>
-          <a:p>
-            <a:pPr marL="0" marR="0" lvl="0" indent="0" algn="ctr" rtl="0">
-              <a:spcBef>
-                <a:spcPts val="0"/>
-              </a:spcBef>
-              <a:spcAft>
-                <a:spcPts val="0"/>
-              </a:spcAft>
-              <a:buNone/>
-            </a:pPr>
-            <a:endParaRPr sz="1800" b="0" i="0" u="none" strike="noStrike" cap="none">
-              <a:solidFill>
-                <a:schemeClr val="dk1"/>
-              </a:solidFill>
-              <a:latin typeface="Times New Roman" panose="02020603050405020304" pitchFamily="18" charset="0"/>
-              <a:ea typeface="Calibri"/>
-              <a:cs typeface="Times New Roman" panose="02020603050405020304" pitchFamily="18" charset="0"/>
-              <a:sym typeface="Calibri"/>
-            </a:endParaRPr>
-          </a:p>
-        </p:txBody>
-      </p:sp>
-    </p:spTree>
-    <p:extLst>
-      <p:ext uri="{BB962C8B-B14F-4D97-AF65-F5344CB8AC3E}">
-        <p14:creationId xmlns:p14="http://schemas.microsoft.com/office/powerpoint/2010/main" val="1693836063"/>
-      </p:ext>
-    </p:extLst>
-  </p:cSld>
-  <p:clrMapOvr>
-    <a:masterClrMapping/>
-  </p:clrMapOvr>
-  <mc:AlternateContent xmlns:mc="http://schemas.openxmlformats.org/markup-compatibility/2006" xmlns:p14="http://schemas.microsoft.com/office/powerpoint/2010/main">
-    <mc:Choice Requires="p14">
-      <p:transition spd="slow" p14:dur="1500">
-        <p:random/>
-      </p:transition>
-    </mc:Choice>
-    <mc:Fallback xmlns="">
-      <p:transition spd="slow">
-        <p:random/>
-      </p:transition>
-    </mc:Fallback>
-  </mc:AlternateContent>
-</p:sld>
-</file>
-
-<file path=ppt/slides/slide29.xml><?xml version="1.0" encoding="utf-8"?>
-<p:sld xmlns:a="http://schemas.openxmlformats.org/drawingml/2006/main" xmlns:r="http://schemas.openxmlformats.org/officeDocument/2006/relationships" xmlns:p="http://schemas.openxmlformats.org/presentationml/2006/main">
-  <p:cSld>
-    <p:spTree>
-      <p:nvGrpSpPr>
-        <p:cNvPr id="1" name=""/>
-        <p:cNvGrpSpPr/>
-        <p:nvPr/>
-      </p:nvGrpSpPr>
-      <p:grpSpPr>
-        <a:xfrm>
-          <a:off x="0" y="0"/>
-          <a:ext cx="0" cy="0"/>
-          <a:chOff x="0" y="0"/>
-          <a:chExt cx="0" cy="0"/>
-        </a:xfrm>
-      </p:grpSpPr>
-      <p:sp>
-        <p:nvSpPr>
-          <p:cNvPr id="2" name="Title 1">
-            <a:extLst>
-              <a:ext uri="{FF2B5EF4-FFF2-40B4-BE49-F238E27FC236}">
-                <a16:creationId xmlns:a16="http://schemas.microsoft.com/office/drawing/2014/main" id="{610102FA-770B-E2BA-E183-3C5B45D86DD3}"/>
-              </a:ext>
-            </a:extLst>
-          </p:cNvPr>
-          <p:cNvSpPr>
-            <a:spLocks noGrp="1"/>
-          </p:cNvSpPr>
-          <p:nvPr>
-            <p:ph type="title"/>
-          </p:nvPr>
-        </p:nvSpPr>
-        <p:spPr>
-          <a:xfrm>
-            <a:off x="838200" y="365126"/>
-            <a:ext cx="10515600" cy="1134066"/>
-          </a:xfrm>
-        </p:spPr>
-        <p:txBody>
-          <a:bodyPr/>
-          <a:lstStyle/>
-          <a:p>
-            <a:r>
-              <a:rPr lang="en-US" cap="none" dirty="0">
-                <a:solidFill>
-                  <a:srgbClr val="003366"/>
-                </a:solidFill>
-                <a:latin typeface="Times New Roman" panose="02020603050405020304" pitchFamily="18" charset="0"/>
-                <a:cs typeface="Times New Roman" panose="02020603050405020304" pitchFamily="18" charset="0"/>
-              </a:rPr>
-              <a:t>Research Questions Answers</a:t>
-            </a:r>
-            <a:endParaRPr lang="en-PK" cap="none" dirty="0">
-              <a:solidFill>
-                <a:srgbClr val="003366"/>
-              </a:solidFill>
-              <a:latin typeface="Times New Roman" panose="02020603050405020304" pitchFamily="18" charset="0"/>
-              <a:cs typeface="Times New Roman" panose="02020603050405020304" pitchFamily="18" charset="0"/>
-            </a:endParaRPr>
-          </a:p>
-        </p:txBody>
-      </p:sp>
-      <p:sp>
-        <p:nvSpPr>
-          <p:cNvPr id="3" name="Content Placeholder 2">
-            <a:extLst>
-              <a:ext uri="{FF2B5EF4-FFF2-40B4-BE49-F238E27FC236}">
-                <a16:creationId xmlns:a16="http://schemas.microsoft.com/office/drawing/2014/main" id="{329FD8A7-2492-7883-4283-EE27FEBBD6F7}"/>
-              </a:ext>
-            </a:extLst>
-          </p:cNvPr>
-          <p:cNvSpPr>
-            <a:spLocks noGrp="1"/>
-          </p:cNvSpPr>
-          <p:nvPr>
-            <p:ph idx="1"/>
-          </p:nvPr>
-        </p:nvSpPr>
-        <p:spPr>
-          <a:xfrm>
-            <a:off x="838200" y="1499192"/>
-            <a:ext cx="10515600" cy="4677771"/>
-          </a:xfrm>
-        </p:spPr>
-        <p:txBody>
-          <a:bodyPr>
-            <a:normAutofit/>
-          </a:bodyPr>
-          <a:lstStyle/>
-          <a:p>
-            <a:pPr lvl="0">
-              <a:lnSpc>
-                <a:spcPct val="120000"/>
-              </a:lnSpc>
-            </a:pPr>
-            <a:r>
-              <a:rPr lang="en-PK" sz="2000" b="1" dirty="0">
-                <a:solidFill>
-                  <a:srgbClr val="333333"/>
-                </a:solidFill>
-                <a:latin typeface="Times New Roman" panose="02020603050405020304" pitchFamily="18" charset="0"/>
-                <a:cs typeface="Times New Roman" panose="02020603050405020304" pitchFamily="18" charset="0"/>
-              </a:rPr>
-              <a:t>How Gen AI generalize better than Traditional ML across systems? </a:t>
-            </a:r>
-            <a:endParaRPr lang="en-US" sz="2000" b="1" dirty="0">
-              <a:solidFill>
-                <a:srgbClr val="333333"/>
-              </a:solidFill>
-              <a:latin typeface="Times New Roman" panose="02020603050405020304" pitchFamily="18" charset="0"/>
-              <a:cs typeface="Times New Roman" panose="02020603050405020304" pitchFamily="18" charset="0"/>
-            </a:endParaRPr>
-          </a:p>
-          <a:p>
-            <a:pPr>
-              <a:lnSpc>
-                <a:spcPct val="120000"/>
-              </a:lnSpc>
-            </a:pPr>
-            <a:r>
-              <a:rPr lang="en-PK" sz="1800" dirty="0">
-                <a:solidFill>
-                  <a:srgbClr val="333333"/>
-                </a:solidFill>
-                <a:latin typeface="Times New Roman" panose="02020603050405020304" pitchFamily="18" charset="0"/>
-                <a:cs typeface="Times New Roman" panose="02020603050405020304" pitchFamily="18" charset="0"/>
-              </a:rPr>
-              <a:t>Generative AI theoretically adapts better to new systems because it skips manual feature engineering—a rigid process that breaks when system formats change. Instead, it learns what "normal" activity looks like to automatically catch unknown, zero-day errors. However, real-world testing proves that Generative AI is too sensitive to background noise. On complex systems like Apache Spark, it gets confused and generates too many false alarms, making traditional supervised models much more reliable in practice. </a:t>
-            </a:r>
-            <a:endParaRPr lang="en-US" sz="1800" dirty="0">
-              <a:solidFill>
-                <a:srgbClr val="333333"/>
-              </a:solidFill>
-              <a:latin typeface="Times New Roman" panose="02020603050405020304" pitchFamily="18" charset="0"/>
-              <a:cs typeface="Times New Roman" panose="02020603050405020304" pitchFamily="18" charset="0"/>
-            </a:endParaRPr>
-          </a:p>
-          <a:p>
-            <a:pPr lvl="0"/>
-            <a:r>
-              <a:rPr lang="en-PK" sz="2000" b="1" dirty="0">
-                <a:solidFill>
-                  <a:srgbClr val="333333"/>
-                </a:solidFill>
-                <a:latin typeface="Times New Roman" panose="02020603050405020304" pitchFamily="18" charset="0"/>
-                <a:cs typeface="Times New Roman" panose="02020603050405020304" pitchFamily="18" charset="0"/>
-              </a:rPr>
-              <a:t>Could Gen AI outperform traditional unsupervised methods for unknown anomalies?</a:t>
-            </a:r>
-            <a:endParaRPr lang="en-US" sz="2000" b="1" dirty="0">
-              <a:solidFill>
-                <a:srgbClr val="333333"/>
-              </a:solidFill>
-              <a:latin typeface="Times New Roman" panose="02020603050405020304" pitchFamily="18" charset="0"/>
-              <a:cs typeface="Times New Roman" panose="02020603050405020304" pitchFamily="18" charset="0"/>
-            </a:endParaRPr>
-          </a:p>
-          <a:p>
-            <a:pPr lvl="0">
-              <a:lnSpc>
-                <a:spcPct val="120000"/>
-              </a:lnSpc>
-            </a:pPr>
-            <a:r>
-              <a:rPr lang="en-PK" sz="1800" dirty="0">
-                <a:solidFill>
-                  <a:srgbClr val="333333"/>
-                </a:solidFill>
-                <a:latin typeface="Times New Roman" panose="02020603050405020304" pitchFamily="18" charset="0"/>
-                <a:cs typeface="Times New Roman" panose="02020603050405020304" pitchFamily="18" charset="0"/>
-              </a:rPr>
-              <a:t> Generative AI can successfully identify zero-day (unknown) anomalies, achieving strong ROC-AUC scores and providing a valuable baseline through normal-only training. However, it produces massive false positive rates, meaning its overall F1-score is lower, limiting its standalone production readiness. </a:t>
-            </a:r>
-          </a:p>
-          <a:p>
-            <a:pPr>
-              <a:lnSpc>
-                <a:spcPct val="120000"/>
-              </a:lnSpc>
-            </a:pPr>
-            <a:endParaRPr lang="en-PK" sz="1800" dirty="0">
-              <a:solidFill>
-                <a:srgbClr val="333333"/>
-              </a:solidFill>
-              <a:latin typeface="Times New Roman" panose="02020603050405020304" pitchFamily="18" charset="0"/>
-              <a:cs typeface="Times New Roman" panose="02020603050405020304" pitchFamily="18" charset="0"/>
-            </a:endParaRPr>
-          </a:p>
-        </p:txBody>
-      </p:sp>
-    </p:spTree>
-    <p:extLst>
-      <p:ext uri="{BB962C8B-B14F-4D97-AF65-F5344CB8AC3E}">
-        <p14:creationId xmlns:p14="http://schemas.microsoft.com/office/powerpoint/2010/main" val="1555171605"/>
       </p:ext>
     </p:extLst>
   </p:cSld>
@@ -20550,6 +22261,533 @@
           <p:cNvPr id="2" name="Title 1">
             <a:extLst>
               <a:ext uri="{FF2B5EF4-FFF2-40B4-BE49-F238E27FC236}">
+                <a16:creationId xmlns:a16="http://schemas.microsoft.com/office/drawing/2014/main" id="{D5350369-3A8B-4DD0-1528-9A2577EB4D0F}"/>
+              </a:ext>
+            </a:extLst>
+          </p:cNvPr>
+          <p:cNvSpPr>
+            <a:spLocks noGrp="1"/>
+          </p:cNvSpPr>
+          <p:nvPr>
+            <p:ph type="title"/>
+          </p:nvPr>
+        </p:nvSpPr>
+        <p:spPr/>
+        <p:txBody>
+          <a:bodyPr/>
+          <a:lstStyle/>
+          <a:p>
+            <a:r>
+              <a:rPr lang="en-US" b="1" cap="none" dirty="0">
+                <a:solidFill>
+                  <a:srgbClr val="003366"/>
+                </a:solidFill>
+                <a:latin typeface="Times New Roman" panose="02020603050405020304" pitchFamily="18" charset="0"/>
+                <a:cs typeface="Times New Roman" panose="02020603050405020304" pitchFamily="18" charset="0"/>
+                <a:sym typeface="Poppins SemiBold"/>
+              </a:rPr>
+              <a:t>Thesis Core Finding and My Contribution</a:t>
+            </a:r>
+            <a:endParaRPr lang="en-PK" b="1" cap="none" dirty="0">
+              <a:solidFill>
+                <a:srgbClr val="003366"/>
+              </a:solidFill>
+              <a:latin typeface="Times New Roman" panose="02020603050405020304" pitchFamily="18" charset="0"/>
+              <a:cs typeface="Times New Roman" panose="02020603050405020304" pitchFamily="18" charset="0"/>
+            </a:endParaRPr>
+          </a:p>
+        </p:txBody>
+      </p:sp>
+      <p:sp>
+        <p:nvSpPr>
+          <p:cNvPr id="3" name="Content Placeholder 2">
+            <a:extLst>
+              <a:ext uri="{FF2B5EF4-FFF2-40B4-BE49-F238E27FC236}">
+                <a16:creationId xmlns:a16="http://schemas.microsoft.com/office/drawing/2014/main" id="{2A8AE484-9237-DF21-1810-6D7EE503F318}"/>
+              </a:ext>
+            </a:extLst>
+          </p:cNvPr>
+          <p:cNvSpPr>
+            <a:spLocks noGrp="1"/>
+          </p:cNvSpPr>
+          <p:nvPr>
+            <p:ph idx="1"/>
+          </p:nvPr>
+        </p:nvSpPr>
+        <p:spPr/>
+        <p:txBody>
+          <a:bodyPr>
+            <a:normAutofit fontScale="85000" lnSpcReduction="20000"/>
+          </a:bodyPr>
+          <a:lstStyle/>
+          <a:p>
+            <a:pPr algn="ctr"/>
+            <a:r>
+              <a:rPr lang="en-US" sz="3600" b="1" dirty="0">
+                <a:solidFill>
+                  <a:srgbClr val="38BDF8"/>
+                </a:solidFill>
+                <a:latin typeface="Times New Roman" panose="02020603050405020304" pitchFamily="18" charset="0"/>
+                <a:ea typeface="Poppins"/>
+                <a:cs typeface="Times New Roman" panose="02020603050405020304" pitchFamily="18" charset="0"/>
+                <a:sym typeface="Poppins"/>
+              </a:rPr>
+              <a:t>Supervised &gt; Unsupervised &gt; Generative</a:t>
+            </a:r>
+            <a:endParaRPr lang="en-US" sz="3600" dirty="0">
+              <a:latin typeface="Times New Roman" panose="02020603050405020304" pitchFamily="18" charset="0"/>
+              <a:cs typeface="Times New Roman" panose="02020603050405020304" pitchFamily="18" charset="0"/>
+            </a:endParaRPr>
+          </a:p>
+          <a:p>
+            <a:r>
+              <a:rPr lang="en-US" sz="2100" b="1" dirty="0">
+                <a:solidFill>
+                  <a:schemeClr val="tx1">
+                    <a:lumMod val="90000"/>
+                    <a:lumOff val="10000"/>
+                  </a:schemeClr>
+                </a:solidFill>
+                <a:latin typeface="Times New Roman" panose="02020603050405020304" pitchFamily="18" charset="0"/>
+                <a:cs typeface="Times New Roman" panose="02020603050405020304" pitchFamily="18" charset="0"/>
+                <a:sym typeface="Inter"/>
+              </a:rPr>
+              <a:t>Consistent Hierarchy Across All Datasets</a:t>
+            </a:r>
+            <a:endParaRPr lang="en-US" sz="2100" b="1" dirty="0">
+              <a:solidFill>
+                <a:schemeClr val="tx1">
+                  <a:lumMod val="90000"/>
+                  <a:lumOff val="10000"/>
+                </a:schemeClr>
+              </a:solidFill>
+              <a:latin typeface="Times New Roman" panose="02020603050405020304" pitchFamily="18" charset="0"/>
+              <a:cs typeface="Times New Roman" panose="02020603050405020304" pitchFamily="18" charset="0"/>
+            </a:endParaRPr>
+          </a:p>
+          <a:p>
+            <a:pPr>
+              <a:lnSpc>
+                <a:spcPct val="120000"/>
+              </a:lnSpc>
+            </a:pPr>
+            <a:r>
+              <a:rPr lang="en-US" sz="2100" dirty="0">
+                <a:solidFill>
+                  <a:srgbClr val="333333"/>
+                </a:solidFill>
+                <a:latin typeface="Times New Roman" panose="02020603050405020304" pitchFamily="18" charset="0"/>
+                <a:cs typeface="Times New Roman" panose="02020603050405020304" pitchFamily="18" charset="0"/>
+                <a:sym typeface="Inter"/>
+              </a:rPr>
+              <a:t>Despite removing the need for manual feature engineering, Generative models are significantly inferior to traditional supervised models for detecting anomalies in large-scale system logs due to structural mismatches and noise sensitivity.</a:t>
+            </a:r>
+            <a:endParaRPr lang="en-US" sz="1900" dirty="0">
+              <a:solidFill>
+                <a:srgbClr val="333333"/>
+              </a:solidFill>
+              <a:latin typeface="Times New Roman" panose="02020603050405020304" pitchFamily="18" charset="0"/>
+              <a:cs typeface="Times New Roman" panose="02020603050405020304" pitchFamily="18" charset="0"/>
+              <a:sym typeface="Inter"/>
+            </a:endParaRPr>
+          </a:p>
+          <a:p>
+            <a:r>
+              <a:rPr lang="en-PK" sz="2100" b="1" dirty="0">
+                <a:solidFill>
+                  <a:schemeClr val="tx1">
+                    <a:lumMod val="90000"/>
+                    <a:lumOff val="10000"/>
+                  </a:schemeClr>
+                </a:solidFill>
+                <a:latin typeface="Times New Roman" panose="02020603050405020304" pitchFamily="18" charset="0"/>
+                <a:cs typeface="Times New Roman" panose="02020603050405020304" pitchFamily="18" charset="0"/>
+              </a:rPr>
+              <a:t>My Contributions</a:t>
+            </a:r>
+          </a:p>
+          <a:p>
+            <a:pPr lvl="0">
+              <a:lnSpc>
+                <a:spcPct val="140000"/>
+              </a:lnSpc>
+            </a:pPr>
+            <a:r>
+              <a:rPr lang="en-PK" sz="2100" dirty="0">
+                <a:solidFill>
+                  <a:srgbClr val="333333"/>
+                </a:solidFill>
+                <a:latin typeface="Times New Roman" panose="02020603050405020304" pitchFamily="18" charset="0"/>
+                <a:cs typeface="Times New Roman" panose="02020603050405020304" pitchFamily="18" charset="0"/>
+              </a:rPr>
+              <a:t>Developed a comprehensive 5-phase comparative framework benchmarking across diverse architectures (HDFS, Spark, Hadoop).</a:t>
+            </a:r>
+          </a:p>
+          <a:p>
+            <a:pPr lvl="0">
+              <a:lnSpc>
+                <a:spcPct val="140000"/>
+              </a:lnSpc>
+            </a:pPr>
+            <a:r>
+              <a:rPr lang="en-PK" sz="2100" dirty="0">
+                <a:solidFill>
+                  <a:srgbClr val="333333"/>
+                </a:solidFill>
+                <a:latin typeface="Times New Roman" panose="02020603050405020304" pitchFamily="18" charset="0"/>
+                <a:cs typeface="Times New Roman" panose="02020603050405020304" pitchFamily="18" charset="0"/>
+              </a:rPr>
+              <a:t>Successfully solved extreme class imbalance (93.57% vs 0.14%) via SMOTE and targeted data pollution.</a:t>
+            </a:r>
+          </a:p>
+          <a:p>
+            <a:pPr lvl="0">
+              <a:lnSpc>
+                <a:spcPct val="140000"/>
+              </a:lnSpc>
+            </a:pPr>
+            <a:r>
+              <a:rPr lang="en-PK" sz="2100" dirty="0">
+                <a:solidFill>
+                  <a:srgbClr val="333333"/>
+                </a:solidFill>
+                <a:latin typeface="Times New Roman" panose="02020603050405020304" pitchFamily="18" charset="0"/>
+                <a:cs typeface="Times New Roman" panose="02020603050405020304" pitchFamily="18" charset="0"/>
+              </a:rPr>
+              <a:t>Proved the functional limitations of Generative AI vs Traditional ML, bridging a critical gap in current cybersecurity literature.</a:t>
+            </a:r>
+          </a:p>
+          <a:p>
+            <a:endParaRPr lang="en-US" sz="1800" dirty="0">
+              <a:solidFill>
+                <a:srgbClr val="333333"/>
+              </a:solidFill>
+              <a:latin typeface="Times New Roman" panose="02020603050405020304" pitchFamily="18" charset="0"/>
+              <a:cs typeface="Times New Roman" panose="02020603050405020304" pitchFamily="18" charset="0"/>
+            </a:endParaRPr>
+          </a:p>
+          <a:p>
+            <a:endParaRPr lang="en-PK" sz="1800" dirty="0"/>
+          </a:p>
+        </p:txBody>
+      </p:sp>
+      <p:sp>
+        <p:nvSpPr>
+          <p:cNvPr id="5" name="Google Shape;299;p22">
+            <a:extLst>
+              <a:ext uri="{FF2B5EF4-FFF2-40B4-BE49-F238E27FC236}">
+                <a16:creationId xmlns:a16="http://schemas.microsoft.com/office/drawing/2014/main" id="{93E5888D-174A-FA67-9866-9892C07F94EE}"/>
+              </a:ext>
+            </a:extLst>
+          </p:cNvPr>
+          <p:cNvSpPr/>
+          <p:nvPr/>
+        </p:nvSpPr>
+        <p:spPr>
+          <a:xfrm>
+            <a:off x="602986" y="1620871"/>
+            <a:ext cx="10668000" cy="28575"/>
+          </a:xfrm>
+          <a:prstGeom prst="rect">
+            <a:avLst/>
+          </a:prstGeom>
+          <a:solidFill>
+            <a:srgbClr val="003366"/>
+          </a:solidFill>
+          <a:ln>
+            <a:noFill/>
+          </a:ln>
+        </p:spPr>
+        <p:txBody>
+          <a:bodyPr spcFirstLastPara="1" wrap="square" lIns="91425" tIns="45700" rIns="91425" bIns="45700" anchor="ctr" anchorCtr="0">
+            <a:noAutofit/>
+          </a:bodyPr>
+          <a:lstStyle/>
+          <a:p>
+            <a:pPr marL="0" marR="0" lvl="0" indent="0" algn="ctr" rtl="0">
+              <a:spcBef>
+                <a:spcPts val="0"/>
+              </a:spcBef>
+              <a:spcAft>
+                <a:spcPts val="0"/>
+              </a:spcAft>
+              <a:buNone/>
+            </a:pPr>
+            <a:endParaRPr sz="1800" b="0" i="0" u="none" strike="noStrike" cap="none">
+              <a:solidFill>
+                <a:schemeClr val="dk1"/>
+              </a:solidFill>
+              <a:latin typeface="Times New Roman" panose="02020603050405020304" pitchFamily="18" charset="0"/>
+              <a:ea typeface="Calibri"/>
+              <a:cs typeface="Times New Roman" panose="02020603050405020304" pitchFamily="18" charset="0"/>
+              <a:sym typeface="Calibri"/>
+            </a:endParaRPr>
+          </a:p>
+        </p:txBody>
+      </p:sp>
+    </p:spTree>
+    <p:extLst>
+      <p:ext uri="{BB962C8B-B14F-4D97-AF65-F5344CB8AC3E}">
+        <p14:creationId xmlns:p14="http://schemas.microsoft.com/office/powerpoint/2010/main" val="1693836063"/>
+      </p:ext>
+    </p:extLst>
+  </p:cSld>
+  <p:clrMapOvr>
+    <a:masterClrMapping/>
+  </p:clrMapOvr>
+  <mc:AlternateContent xmlns:mc="http://schemas.openxmlformats.org/markup-compatibility/2006" xmlns:p14="http://schemas.microsoft.com/office/powerpoint/2010/main">
+    <mc:Choice Requires="p14">
+      <p:transition spd="slow" p14:dur="1500">
+        <p:random/>
+      </p:transition>
+    </mc:Choice>
+    <mc:Fallback xmlns="">
+      <p:transition spd="slow">
+        <p:random/>
+      </p:transition>
+    </mc:Fallback>
+  </mc:AlternateContent>
+</p:sld>
+</file>
+
+<file path=ppt/slides/slide31.xml><?xml version="1.0" encoding="utf-8"?>
+<p:sld xmlns:a="http://schemas.openxmlformats.org/drawingml/2006/main" xmlns:r="http://schemas.openxmlformats.org/officeDocument/2006/relationships" xmlns:p="http://schemas.openxmlformats.org/presentationml/2006/main">
+  <p:cSld>
+    <p:spTree>
+      <p:nvGrpSpPr>
+        <p:cNvPr id="1" name=""/>
+        <p:cNvGrpSpPr/>
+        <p:nvPr/>
+      </p:nvGrpSpPr>
+      <p:grpSpPr>
+        <a:xfrm>
+          <a:off x="0" y="0"/>
+          <a:ext cx="0" cy="0"/>
+          <a:chOff x="0" y="0"/>
+          <a:chExt cx="0" cy="0"/>
+        </a:xfrm>
+      </p:grpSpPr>
+      <p:sp>
+        <p:nvSpPr>
+          <p:cNvPr id="2" name="Title 1">
+            <a:extLst>
+              <a:ext uri="{FF2B5EF4-FFF2-40B4-BE49-F238E27FC236}">
+                <a16:creationId xmlns:a16="http://schemas.microsoft.com/office/drawing/2014/main" id="{610102FA-770B-E2BA-E183-3C5B45D86DD3}"/>
+              </a:ext>
+            </a:extLst>
+          </p:cNvPr>
+          <p:cNvSpPr>
+            <a:spLocks noGrp="1"/>
+          </p:cNvSpPr>
+          <p:nvPr>
+            <p:ph type="title"/>
+          </p:nvPr>
+        </p:nvSpPr>
+        <p:spPr>
+          <a:xfrm>
+            <a:off x="838200" y="365126"/>
+            <a:ext cx="10515600" cy="1134066"/>
+          </a:xfrm>
+        </p:spPr>
+        <p:txBody>
+          <a:bodyPr/>
+          <a:lstStyle/>
+          <a:p>
+            <a:r>
+              <a:rPr lang="en-US" cap="none" dirty="0">
+                <a:solidFill>
+                  <a:srgbClr val="003366"/>
+                </a:solidFill>
+                <a:latin typeface="Times New Roman" panose="02020603050405020304" pitchFamily="18" charset="0"/>
+                <a:cs typeface="Times New Roman" panose="02020603050405020304" pitchFamily="18" charset="0"/>
+              </a:rPr>
+              <a:t>Research Questions Answers</a:t>
+            </a:r>
+            <a:endParaRPr lang="en-PK" cap="none" dirty="0">
+              <a:solidFill>
+                <a:srgbClr val="003366"/>
+              </a:solidFill>
+              <a:latin typeface="Times New Roman" panose="02020603050405020304" pitchFamily="18" charset="0"/>
+              <a:cs typeface="Times New Roman" panose="02020603050405020304" pitchFamily="18" charset="0"/>
+            </a:endParaRPr>
+          </a:p>
+        </p:txBody>
+      </p:sp>
+      <p:sp>
+        <p:nvSpPr>
+          <p:cNvPr id="3" name="Content Placeholder 2">
+            <a:extLst>
+              <a:ext uri="{FF2B5EF4-FFF2-40B4-BE49-F238E27FC236}">
+                <a16:creationId xmlns:a16="http://schemas.microsoft.com/office/drawing/2014/main" id="{329FD8A7-2492-7883-4283-EE27FEBBD6F7}"/>
+              </a:ext>
+            </a:extLst>
+          </p:cNvPr>
+          <p:cNvSpPr>
+            <a:spLocks noGrp="1"/>
+          </p:cNvSpPr>
+          <p:nvPr>
+            <p:ph idx="1"/>
+          </p:nvPr>
+        </p:nvSpPr>
+        <p:spPr>
+          <a:xfrm>
+            <a:off x="838200" y="1499192"/>
+            <a:ext cx="10515600" cy="4677771"/>
+          </a:xfrm>
+        </p:spPr>
+        <p:txBody>
+          <a:bodyPr>
+            <a:normAutofit/>
+          </a:bodyPr>
+          <a:lstStyle/>
+          <a:p>
+            <a:pPr lvl="0">
+              <a:lnSpc>
+                <a:spcPct val="120000"/>
+              </a:lnSpc>
+            </a:pPr>
+            <a:r>
+              <a:rPr lang="en-PK" sz="2000" b="1" dirty="0">
+                <a:solidFill>
+                  <a:srgbClr val="333333"/>
+                </a:solidFill>
+                <a:latin typeface="Times New Roman" panose="02020603050405020304" pitchFamily="18" charset="0"/>
+                <a:cs typeface="Times New Roman" panose="02020603050405020304" pitchFamily="18" charset="0"/>
+              </a:rPr>
+              <a:t>How Gen AI generalize better than Traditional ML across systems? </a:t>
+            </a:r>
+            <a:endParaRPr lang="en-US" sz="2000" b="1" dirty="0">
+              <a:solidFill>
+                <a:srgbClr val="333333"/>
+              </a:solidFill>
+              <a:latin typeface="Times New Roman" panose="02020603050405020304" pitchFamily="18" charset="0"/>
+              <a:cs typeface="Times New Roman" panose="02020603050405020304" pitchFamily="18" charset="0"/>
+            </a:endParaRPr>
+          </a:p>
+          <a:p>
+            <a:pPr>
+              <a:lnSpc>
+                <a:spcPct val="120000"/>
+              </a:lnSpc>
+            </a:pPr>
+            <a:r>
+              <a:rPr lang="en-PK" sz="1800" dirty="0">
+                <a:solidFill>
+                  <a:srgbClr val="333333"/>
+                </a:solidFill>
+                <a:latin typeface="Times New Roman" panose="02020603050405020304" pitchFamily="18" charset="0"/>
+                <a:cs typeface="Times New Roman" panose="02020603050405020304" pitchFamily="18" charset="0"/>
+              </a:rPr>
+              <a:t>Generative AI theoretically adapts better to new systems because it skips manual feature engineering—a rigid process that breaks when system formats change. Instead, it learns what "normal" activity looks like to automatically catch unknown, zero-day errors. However, real-world testing proves that Generative AI is too sensitive to background noise. On complex systems like Apache Spark, it gets confused and generates too many false alarms, making traditional supervised models much more reliable in practice. </a:t>
+            </a:r>
+            <a:endParaRPr lang="en-US" sz="1800" dirty="0">
+              <a:solidFill>
+                <a:srgbClr val="333333"/>
+              </a:solidFill>
+              <a:latin typeface="Times New Roman" panose="02020603050405020304" pitchFamily="18" charset="0"/>
+              <a:cs typeface="Times New Roman" panose="02020603050405020304" pitchFamily="18" charset="0"/>
+            </a:endParaRPr>
+          </a:p>
+          <a:p>
+            <a:pPr lvl="0"/>
+            <a:r>
+              <a:rPr lang="en-PK" sz="2000" b="1" dirty="0">
+                <a:solidFill>
+                  <a:srgbClr val="333333"/>
+                </a:solidFill>
+                <a:latin typeface="Times New Roman" panose="02020603050405020304" pitchFamily="18" charset="0"/>
+                <a:cs typeface="Times New Roman" panose="02020603050405020304" pitchFamily="18" charset="0"/>
+              </a:rPr>
+              <a:t>Could Gen AI outperform traditional unsupervised methods for unknown anomalies?</a:t>
+            </a:r>
+            <a:endParaRPr lang="en-US" sz="2000" b="1" dirty="0">
+              <a:solidFill>
+                <a:srgbClr val="333333"/>
+              </a:solidFill>
+              <a:latin typeface="Times New Roman" panose="02020603050405020304" pitchFamily="18" charset="0"/>
+              <a:cs typeface="Times New Roman" panose="02020603050405020304" pitchFamily="18" charset="0"/>
+            </a:endParaRPr>
+          </a:p>
+          <a:p>
+            <a:pPr lvl="0">
+              <a:lnSpc>
+                <a:spcPct val="120000"/>
+              </a:lnSpc>
+            </a:pPr>
+            <a:r>
+              <a:rPr lang="en-PK" sz="1800" dirty="0">
+                <a:solidFill>
+                  <a:srgbClr val="333333"/>
+                </a:solidFill>
+                <a:latin typeface="Times New Roman" panose="02020603050405020304" pitchFamily="18" charset="0"/>
+                <a:cs typeface="Times New Roman" panose="02020603050405020304" pitchFamily="18" charset="0"/>
+              </a:rPr>
+              <a:t> Generative AI can successfully identify zero-day (unknown) anomalies, achieving strong ROC-AUC scores and providing a valuable baseline through normal-only training. However, it produces massive false positive rates, meaning its overall F1-score is lower, limiting its standalone production readiness. </a:t>
+            </a:r>
+          </a:p>
+          <a:p>
+            <a:pPr>
+              <a:lnSpc>
+                <a:spcPct val="120000"/>
+              </a:lnSpc>
+            </a:pPr>
+            <a:endParaRPr lang="en-PK" sz="1800" dirty="0">
+              <a:solidFill>
+                <a:srgbClr val="333333"/>
+              </a:solidFill>
+              <a:latin typeface="Times New Roman" panose="02020603050405020304" pitchFamily="18" charset="0"/>
+              <a:cs typeface="Times New Roman" panose="02020603050405020304" pitchFamily="18" charset="0"/>
+            </a:endParaRPr>
+          </a:p>
+        </p:txBody>
+      </p:sp>
+    </p:spTree>
+    <p:extLst>
+      <p:ext uri="{BB962C8B-B14F-4D97-AF65-F5344CB8AC3E}">
+        <p14:creationId xmlns:p14="http://schemas.microsoft.com/office/powerpoint/2010/main" val="1555171605"/>
+      </p:ext>
+    </p:extLst>
+  </p:cSld>
+  <p:clrMapOvr>
+    <a:masterClrMapping/>
+  </p:clrMapOvr>
+  <mc:AlternateContent xmlns:mc="http://schemas.openxmlformats.org/markup-compatibility/2006" xmlns:p14="http://schemas.microsoft.com/office/powerpoint/2010/main">
+    <mc:Choice Requires="p14">
+      <p:transition spd="slow" p14:dur="1500">
+        <p:random/>
+      </p:transition>
+    </mc:Choice>
+    <mc:Fallback xmlns="">
+      <p:transition spd="slow">
+        <p:random/>
+      </p:transition>
+    </mc:Fallback>
+  </mc:AlternateContent>
+</p:sld>
+</file>
+
+<file path=ppt/slides/slide32.xml><?xml version="1.0" encoding="utf-8"?>
+<p:sld xmlns:a="http://schemas.openxmlformats.org/drawingml/2006/main" xmlns:r="http://schemas.openxmlformats.org/officeDocument/2006/relationships" xmlns:p="http://schemas.openxmlformats.org/presentationml/2006/main">
+  <p:cSld>
+    <p:spTree>
+      <p:nvGrpSpPr>
+        <p:cNvPr id="1" name=""/>
+        <p:cNvGrpSpPr/>
+        <p:nvPr/>
+      </p:nvGrpSpPr>
+      <p:grpSpPr>
+        <a:xfrm>
+          <a:off x="0" y="0"/>
+          <a:ext cx="0" cy="0"/>
+          <a:chOff x="0" y="0"/>
+          <a:chExt cx="0" cy="0"/>
+        </a:xfrm>
+      </p:grpSpPr>
+      <p:sp>
+        <p:nvSpPr>
+          <p:cNvPr id="2" name="Title 1">
+            <a:extLst>
+              <a:ext uri="{FF2B5EF4-FFF2-40B4-BE49-F238E27FC236}">
                 <a16:creationId xmlns:a16="http://schemas.microsoft.com/office/drawing/2014/main" id="{A2BF8C9C-5063-907A-C2DF-6EF13FE98691}"/>
               </a:ext>
             </a:extLst>
@@ -20853,7 +23091,7 @@
 </p:sld>
 </file>
 
-<file path=ppt/slides/slide31.xml><?xml version="1.0" encoding="utf-8"?>
+<file path=ppt/slides/slide33.xml><?xml version="1.0" encoding="utf-8"?>
 <p:sld xmlns:a="http://schemas.openxmlformats.org/drawingml/2006/main" xmlns:r="http://schemas.openxmlformats.org/officeDocument/2006/relationships" xmlns:p="http://schemas.openxmlformats.org/presentationml/2006/main">
   <p:cSld>
     <p:spTree>
